--- a/sources/diagram.pptx
+++ b/sources/diagram.pptx
@@ -104,6 +104,11 @@
       </a:defRPr>
     </a:lvl9pPr>
   </p:defaultTextStyle>
+  <p:extLst>
+    <p:ext uri="{EFAFB233-063F-42B5-8137-9DF3F51BA10A}">
+      <p15:sldGuideLst xmlns:p15="http://schemas.microsoft.com/office/powerpoint/2012/main"/>
+    </p:ext>
+  </p:extLst>
 </p:presentation>
 </file>
 
@@ -254,7 +259,7 @@
           <a:p>
             <a:fld id="{250BD5E0-9785-4F56-82D1-A5DCCFBB3361}" type="datetimeFigureOut">
               <a:rPr lang="en-US" smtClean="0"/>
-              <a:t>10/4/2026</a:t>
+              <a:t>10/5/2026</a:t>
             </a:fld>
             <a:endParaRPr lang="en-US"/>
           </a:p>
@@ -452,7 +457,7 @@
           <a:p>
             <a:fld id="{250BD5E0-9785-4F56-82D1-A5DCCFBB3361}" type="datetimeFigureOut">
               <a:rPr lang="en-US" smtClean="0"/>
-              <a:t>10/4/2026</a:t>
+              <a:t>10/5/2026</a:t>
             </a:fld>
             <a:endParaRPr lang="en-US"/>
           </a:p>
@@ -660,7 +665,7 @@
           <a:p>
             <a:fld id="{250BD5E0-9785-4F56-82D1-A5DCCFBB3361}" type="datetimeFigureOut">
               <a:rPr lang="en-US" smtClean="0"/>
-              <a:t>10/4/2026</a:t>
+              <a:t>10/5/2026</a:t>
             </a:fld>
             <a:endParaRPr lang="en-US"/>
           </a:p>
@@ -858,7 +863,7 @@
           <a:p>
             <a:fld id="{250BD5E0-9785-4F56-82D1-A5DCCFBB3361}" type="datetimeFigureOut">
               <a:rPr lang="en-US" smtClean="0"/>
-              <a:t>10/4/2026</a:t>
+              <a:t>10/5/2026</a:t>
             </a:fld>
             <a:endParaRPr lang="en-US"/>
           </a:p>
@@ -1133,7 +1138,7 @@
           <a:p>
             <a:fld id="{250BD5E0-9785-4F56-82D1-A5DCCFBB3361}" type="datetimeFigureOut">
               <a:rPr lang="en-US" smtClean="0"/>
-              <a:t>10/4/2026</a:t>
+              <a:t>10/5/2026</a:t>
             </a:fld>
             <a:endParaRPr lang="en-US"/>
           </a:p>
@@ -1398,7 +1403,7 @@
           <a:p>
             <a:fld id="{250BD5E0-9785-4F56-82D1-A5DCCFBB3361}" type="datetimeFigureOut">
               <a:rPr lang="en-US" smtClean="0"/>
-              <a:t>10/4/2026</a:t>
+              <a:t>10/5/2026</a:t>
             </a:fld>
             <a:endParaRPr lang="en-US"/>
           </a:p>
@@ -1810,7 +1815,7 @@
           <a:p>
             <a:fld id="{250BD5E0-9785-4F56-82D1-A5DCCFBB3361}" type="datetimeFigureOut">
               <a:rPr lang="en-US" smtClean="0"/>
-              <a:t>10/4/2026</a:t>
+              <a:t>10/5/2026</a:t>
             </a:fld>
             <a:endParaRPr lang="en-US"/>
           </a:p>
@@ -1951,7 +1956,7 @@
           <a:p>
             <a:fld id="{250BD5E0-9785-4F56-82D1-A5DCCFBB3361}" type="datetimeFigureOut">
               <a:rPr lang="en-US" smtClean="0"/>
-              <a:t>10/4/2026</a:t>
+              <a:t>10/5/2026</a:t>
             </a:fld>
             <a:endParaRPr lang="en-US"/>
           </a:p>
@@ -2064,7 +2069,7 @@
           <a:p>
             <a:fld id="{250BD5E0-9785-4F56-82D1-A5DCCFBB3361}" type="datetimeFigureOut">
               <a:rPr lang="en-US" smtClean="0"/>
-              <a:t>10/4/2026</a:t>
+              <a:t>10/5/2026</a:t>
             </a:fld>
             <a:endParaRPr lang="en-US"/>
           </a:p>
@@ -2375,7 +2380,7 @@
           <a:p>
             <a:fld id="{250BD5E0-9785-4F56-82D1-A5DCCFBB3361}" type="datetimeFigureOut">
               <a:rPr lang="en-US" smtClean="0"/>
-              <a:t>10/4/2026</a:t>
+              <a:t>10/5/2026</a:t>
             </a:fld>
             <a:endParaRPr lang="en-US"/>
           </a:p>
@@ -2663,7 +2668,7 @@
           <a:p>
             <a:fld id="{250BD5E0-9785-4F56-82D1-A5DCCFBB3361}" type="datetimeFigureOut">
               <a:rPr lang="en-US" smtClean="0"/>
-              <a:t>10/4/2026</a:t>
+              <a:t>10/5/2026</a:t>
             </a:fld>
             <a:endParaRPr lang="en-US"/>
           </a:p>
@@ -2904,7 +2909,7 @@
           <a:p>
             <a:fld id="{250BD5E0-9785-4F56-82D1-A5DCCFBB3361}" type="datetimeFigureOut">
               <a:rPr lang="en-US" smtClean="0"/>
-              <a:t>10/4/2026</a:t>
+              <a:t>10/5/2026</a:t>
             </a:fld>
             <a:endParaRPr lang="en-US"/>
           </a:p>
@@ -3448,560 +3453,6 @@
       </p:sp>
       <p:sp>
         <p:nvSpPr>
-          <p:cNvPr id="12" name="Rectangle 11">
-            <a:extLst>
-              <a:ext uri="{FF2B5EF4-FFF2-40B4-BE49-F238E27FC236}">
-                <a16:creationId xmlns:a16="http://schemas.microsoft.com/office/drawing/2014/main" id="{90748546-5113-33E4-9C50-33730F6ABFF6}"/>
-              </a:ext>
-            </a:extLst>
-          </p:cNvPr>
-          <p:cNvSpPr/>
-          <p:nvPr/>
-        </p:nvSpPr>
-        <p:spPr>
-          <a:xfrm>
-            <a:off x="3589509" y="1447711"/>
-            <a:ext cx="1284454" cy="179084"/>
-          </a:xfrm>
-          <a:prstGeom prst="rect">
-            <a:avLst/>
-          </a:prstGeom>
-          <a:solidFill>
-            <a:schemeClr val="tx1">
-              <a:lumMod val="75000"/>
-              <a:lumOff val="25000"/>
-            </a:schemeClr>
-          </a:solidFill>
-          <a:ln w="12700">
-            <a:noFill/>
-          </a:ln>
-        </p:spPr>
-        <p:style>
-          <a:lnRef idx="2">
-            <a:schemeClr val="accent1">
-              <a:shade val="15000"/>
-            </a:schemeClr>
-          </a:lnRef>
-          <a:fillRef idx="1">
-            <a:schemeClr val="accent1"/>
-          </a:fillRef>
-          <a:effectRef idx="0">
-            <a:schemeClr val="accent1"/>
-          </a:effectRef>
-          <a:fontRef idx="minor">
-            <a:schemeClr val="lt1"/>
-          </a:fontRef>
-        </p:style>
-        <p:txBody>
-          <a:bodyPr rtlCol="0" anchor="ctr"/>
-          <a:lstStyle/>
-          <a:p>
-            <a:pPr algn="ctr"/>
-            <a:r>
-              <a:rPr lang="en-US" sz="800" dirty="0">
-                <a:solidFill>
-                  <a:schemeClr val="bg1">
-                    <a:lumMod val="95000"/>
-                  </a:schemeClr>
-                </a:solidFill>
-              </a:rPr>
-              <a:t>namespace</a:t>
-            </a:r>
-          </a:p>
-        </p:txBody>
-      </p:sp>
-      <p:sp>
-        <p:nvSpPr>
-          <p:cNvPr id="14" name="Rectangle 13">
-            <a:extLst>
-              <a:ext uri="{FF2B5EF4-FFF2-40B4-BE49-F238E27FC236}">
-                <a16:creationId xmlns:a16="http://schemas.microsoft.com/office/drawing/2014/main" id="{1FD9D23D-F062-141F-B0EE-5538F6B65C2C}"/>
-              </a:ext>
-            </a:extLst>
-          </p:cNvPr>
-          <p:cNvSpPr/>
-          <p:nvPr/>
-        </p:nvSpPr>
-        <p:spPr>
-          <a:xfrm>
-            <a:off x="823176" y="4079526"/>
-            <a:ext cx="1284454" cy="179084"/>
-          </a:xfrm>
-          <a:prstGeom prst="rect">
-            <a:avLst/>
-          </a:prstGeom>
-          <a:solidFill>
-            <a:schemeClr val="tx1">
-              <a:lumMod val="75000"/>
-              <a:lumOff val="25000"/>
-            </a:schemeClr>
-          </a:solidFill>
-          <a:ln w="12700">
-            <a:noFill/>
-          </a:ln>
-        </p:spPr>
-        <p:style>
-          <a:lnRef idx="2">
-            <a:schemeClr val="accent1">
-              <a:shade val="15000"/>
-            </a:schemeClr>
-          </a:lnRef>
-          <a:fillRef idx="1">
-            <a:schemeClr val="accent1"/>
-          </a:fillRef>
-          <a:effectRef idx="0">
-            <a:schemeClr val="accent1"/>
-          </a:effectRef>
-          <a:fontRef idx="minor">
-            <a:schemeClr val="lt1"/>
-          </a:fontRef>
-        </p:style>
-        <p:txBody>
-          <a:bodyPr rtlCol="0" anchor="ctr"/>
-          <a:lstStyle/>
-          <a:p>
-            <a:pPr algn="ctr"/>
-            <a:r>
-              <a:rPr lang="en-US" sz="800" dirty="0">
-                <a:solidFill>
-                  <a:schemeClr val="bg1">
-                    <a:lumMod val="95000"/>
-                  </a:schemeClr>
-                </a:solidFill>
-              </a:rPr>
-              <a:t>region</a:t>
-            </a:r>
-          </a:p>
-        </p:txBody>
-      </p:sp>
-      <p:sp>
-        <p:nvSpPr>
-          <p:cNvPr id="16" name="Rectangle 15">
-            <a:extLst>
-              <a:ext uri="{FF2B5EF4-FFF2-40B4-BE49-F238E27FC236}">
-                <a16:creationId xmlns:a16="http://schemas.microsoft.com/office/drawing/2014/main" id="{1C8129DE-8797-FF90-6F9D-D75199286DBF}"/>
-              </a:ext>
-            </a:extLst>
-          </p:cNvPr>
-          <p:cNvSpPr/>
-          <p:nvPr/>
-        </p:nvSpPr>
-        <p:spPr>
-          <a:xfrm>
-            <a:off x="3593832" y="630114"/>
-            <a:ext cx="1284454" cy="179084"/>
-          </a:xfrm>
-          <a:prstGeom prst="rect">
-            <a:avLst/>
-          </a:prstGeom>
-          <a:solidFill>
-            <a:schemeClr val="tx1">
-              <a:lumMod val="75000"/>
-              <a:lumOff val="25000"/>
-            </a:schemeClr>
-          </a:solidFill>
-          <a:ln w="12700">
-            <a:noFill/>
-          </a:ln>
-        </p:spPr>
-        <p:style>
-          <a:lnRef idx="2">
-            <a:schemeClr val="accent1">
-              <a:shade val="15000"/>
-            </a:schemeClr>
-          </a:lnRef>
-          <a:fillRef idx="1">
-            <a:schemeClr val="accent1"/>
-          </a:fillRef>
-          <a:effectRef idx="0">
-            <a:schemeClr val="accent1"/>
-          </a:effectRef>
-          <a:fontRef idx="minor">
-            <a:schemeClr val="lt1"/>
-          </a:fontRef>
-        </p:style>
-        <p:txBody>
-          <a:bodyPr rtlCol="0" anchor="ctr"/>
-          <a:lstStyle/>
-          <a:p>
-            <a:pPr algn="ctr"/>
-            <a:r>
-              <a:rPr lang="en-US" sz="800" dirty="0" err="1">
-                <a:solidFill>
-                  <a:schemeClr val="bg1">
-                    <a:lumMod val="95000"/>
-                  </a:schemeClr>
-                </a:solidFill>
-              </a:rPr>
-              <a:t>db_name</a:t>
-            </a:r>
-            <a:endParaRPr lang="en-US" sz="800" dirty="0">
-              <a:solidFill>
-                <a:schemeClr val="bg1">
-                  <a:lumMod val="95000"/>
-                </a:schemeClr>
-              </a:solidFill>
-            </a:endParaRPr>
-          </a:p>
-        </p:txBody>
-      </p:sp>
-      <p:sp>
-        <p:nvSpPr>
-          <p:cNvPr id="18" name="Rectangle 17">
-            <a:extLst>
-              <a:ext uri="{FF2B5EF4-FFF2-40B4-BE49-F238E27FC236}">
-                <a16:creationId xmlns:a16="http://schemas.microsoft.com/office/drawing/2014/main" id="{7880AA8C-A3A4-6526-CC40-95DCBCBBDC59}"/>
-              </a:ext>
-            </a:extLst>
-          </p:cNvPr>
-          <p:cNvSpPr/>
-          <p:nvPr/>
-        </p:nvSpPr>
-        <p:spPr>
-          <a:xfrm>
-            <a:off x="3593831" y="903336"/>
-            <a:ext cx="1284454" cy="179084"/>
-          </a:xfrm>
-          <a:prstGeom prst="rect">
-            <a:avLst/>
-          </a:prstGeom>
-          <a:solidFill>
-            <a:schemeClr val="tx1">
-              <a:lumMod val="75000"/>
-              <a:lumOff val="25000"/>
-            </a:schemeClr>
-          </a:solidFill>
-          <a:ln w="12700">
-            <a:noFill/>
-          </a:ln>
-        </p:spPr>
-        <p:style>
-          <a:lnRef idx="2">
-            <a:schemeClr val="accent1">
-              <a:shade val="15000"/>
-            </a:schemeClr>
-          </a:lnRef>
-          <a:fillRef idx="1">
-            <a:schemeClr val="accent1"/>
-          </a:fillRef>
-          <a:effectRef idx="0">
-            <a:schemeClr val="accent1"/>
-          </a:effectRef>
-          <a:fontRef idx="minor">
-            <a:schemeClr val="lt1"/>
-          </a:fontRef>
-        </p:style>
-        <p:txBody>
-          <a:bodyPr rtlCol="0" anchor="ctr"/>
-          <a:lstStyle/>
-          <a:p>
-            <a:pPr algn="ctr"/>
-            <a:r>
-              <a:rPr lang="en-US" sz="800" dirty="0" err="1">
-                <a:solidFill>
-                  <a:schemeClr val="bg1">
-                    <a:lumMod val="95000"/>
-                  </a:schemeClr>
-                </a:solidFill>
-              </a:rPr>
-              <a:t>db_username</a:t>
-            </a:r>
-            <a:endParaRPr lang="en-US" sz="800" dirty="0">
-              <a:solidFill>
-                <a:schemeClr val="bg1">
-                  <a:lumMod val="95000"/>
-                </a:schemeClr>
-              </a:solidFill>
-            </a:endParaRPr>
-          </a:p>
-        </p:txBody>
-      </p:sp>
-      <p:sp>
-        <p:nvSpPr>
-          <p:cNvPr id="19" name="Rectangle 18">
-            <a:extLst>
-              <a:ext uri="{FF2B5EF4-FFF2-40B4-BE49-F238E27FC236}">
-                <a16:creationId xmlns:a16="http://schemas.microsoft.com/office/drawing/2014/main" id="{C5017D0B-1948-D640-7617-A4D01B9E39DE}"/>
-              </a:ext>
-            </a:extLst>
-          </p:cNvPr>
-          <p:cNvSpPr/>
-          <p:nvPr/>
-        </p:nvSpPr>
-        <p:spPr>
-          <a:xfrm>
-            <a:off x="3593831" y="1175510"/>
-            <a:ext cx="1284454" cy="179084"/>
-          </a:xfrm>
-          <a:prstGeom prst="rect">
-            <a:avLst/>
-          </a:prstGeom>
-          <a:solidFill>
-            <a:schemeClr val="tx1">
-              <a:lumMod val="75000"/>
-              <a:lumOff val="25000"/>
-            </a:schemeClr>
-          </a:solidFill>
-          <a:ln w="12700">
-            <a:noFill/>
-          </a:ln>
-        </p:spPr>
-        <p:style>
-          <a:lnRef idx="2">
-            <a:schemeClr val="accent1">
-              <a:shade val="15000"/>
-            </a:schemeClr>
-          </a:lnRef>
-          <a:fillRef idx="1">
-            <a:schemeClr val="accent1"/>
-          </a:fillRef>
-          <a:effectRef idx="0">
-            <a:schemeClr val="accent1"/>
-          </a:effectRef>
-          <a:fontRef idx="minor">
-            <a:schemeClr val="lt1"/>
-          </a:fontRef>
-        </p:style>
-        <p:txBody>
-          <a:bodyPr rtlCol="0" anchor="ctr"/>
-          <a:lstStyle/>
-          <a:p>
-            <a:pPr algn="ctr"/>
-            <a:r>
-              <a:rPr lang="en-US" sz="800" dirty="0" err="1">
-                <a:solidFill>
-                  <a:schemeClr val="bg1">
-                    <a:lumMod val="95000"/>
-                  </a:schemeClr>
-                </a:solidFill>
-              </a:rPr>
-              <a:t>db_password</a:t>
-            </a:r>
-            <a:endParaRPr lang="en-US" sz="800" dirty="0">
-              <a:solidFill>
-                <a:schemeClr val="bg1">
-                  <a:lumMod val="95000"/>
-                </a:schemeClr>
-              </a:solidFill>
-            </a:endParaRPr>
-          </a:p>
-        </p:txBody>
-      </p:sp>
-      <p:sp>
-        <p:nvSpPr>
-          <p:cNvPr id="21" name="Rectangle 20">
-            <a:extLst>
-              <a:ext uri="{FF2B5EF4-FFF2-40B4-BE49-F238E27FC236}">
-                <a16:creationId xmlns:a16="http://schemas.microsoft.com/office/drawing/2014/main" id="{567C05BB-0EFD-1DD8-D313-38886E0460C0}"/>
-              </a:ext>
-            </a:extLst>
-          </p:cNvPr>
-          <p:cNvSpPr/>
-          <p:nvPr/>
-        </p:nvSpPr>
-        <p:spPr>
-          <a:xfrm>
-            <a:off x="823176" y="4792351"/>
-            <a:ext cx="1284454" cy="179084"/>
-          </a:xfrm>
-          <a:prstGeom prst="rect">
-            <a:avLst/>
-          </a:prstGeom>
-          <a:solidFill>
-            <a:schemeClr val="tx1">
-              <a:lumMod val="75000"/>
-              <a:lumOff val="25000"/>
-            </a:schemeClr>
-          </a:solidFill>
-          <a:ln w="12700">
-            <a:noFill/>
-          </a:ln>
-        </p:spPr>
-        <p:style>
-          <a:lnRef idx="2">
-            <a:schemeClr val="accent1">
-              <a:shade val="15000"/>
-            </a:schemeClr>
-          </a:lnRef>
-          <a:fillRef idx="1">
-            <a:schemeClr val="accent1"/>
-          </a:fillRef>
-          <a:effectRef idx="0">
-            <a:schemeClr val="accent1"/>
-          </a:effectRef>
-          <a:fontRef idx="minor">
-            <a:schemeClr val="lt1"/>
-          </a:fontRef>
-        </p:style>
-        <p:txBody>
-          <a:bodyPr rtlCol="0" anchor="ctr"/>
-          <a:lstStyle/>
-          <a:p>
-            <a:pPr algn="ctr"/>
-            <a:r>
-              <a:rPr lang="en-US" sz="800" dirty="0" err="1">
-                <a:solidFill>
-                  <a:schemeClr val="bg1">
-                    <a:lumMod val="95000"/>
-                  </a:schemeClr>
-                </a:solidFill>
-              </a:rPr>
-              <a:t>wordpress_url</a:t>
-            </a:r>
-            <a:endParaRPr lang="en-US" sz="800" dirty="0">
-              <a:solidFill>
-                <a:schemeClr val="bg1">
-                  <a:lumMod val="95000"/>
-                </a:schemeClr>
-              </a:solidFill>
-            </a:endParaRPr>
-          </a:p>
-        </p:txBody>
-      </p:sp>
-      <p:sp>
-        <p:nvSpPr>
-          <p:cNvPr id="23" name="Rectangle 22">
-            <a:extLst>
-              <a:ext uri="{FF2B5EF4-FFF2-40B4-BE49-F238E27FC236}">
-                <a16:creationId xmlns:a16="http://schemas.microsoft.com/office/drawing/2014/main" id="{E7DC2BE7-B053-5A67-609C-DF89BE2CFC74}"/>
-              </a:ext>
-            </a:extLst>
-          </p:cNvPr>
-          <p:cNvSpPr/>
-          <p:nvPr/>
-        </p:nvSpPr>
-        <p:spPr>
-          <a:xfrm>
-            <a:off x="823176" y="5063212"/>
-            <a:ext cx="1284454" cy="179084"/>
-          </a:xfrm>
-          <a:prstGeom prst="rect">
-            <a:avLst/>
-          </a:prstGeom>
-          <a:solidFill>
-            <a:schemeClr val="tx1">
-              <a:lumMod val="75000"/>
-              <a:lumOff val="25000"/>
-            </a:schemeClr>
-          </a:solidFill>
-          <a:ln w="12700">
-            <a:noFill/>
-          </a:ln>
-        </p:spPr>
-        <p:style>
-          <a:lnRef idx="2">
-            <a:schemeClr val="accent1">
-              <a:shade val="15000"/>
-            </a:schemeClr>
-          </a:lnRef>
-          <a:fillRef idx="1">
-            <a:schemeClr val="accent1"/>
-          </a:fillRef>
-          <a:effectRef idx="0">
-            <a:schemeClr val="accent1"/>
-          </a:effectRef>
-          <a:fontRef idx="minor">
-            <a:schemeClr val="lt1"/>
-          </a:fontRef>
-        </p:style>
-        <p:txBody>
-          <a:bodyPr rtlCol="0" anchor="ctr"/>
-          <a:lstStyle/>
-          <a:p>
-            <a:pPr algn="ctr"/>
-            <a:r>
-              <a:rPr lang="en-US" sz="800" dirty="0" err="1">
-                <a:solidFill>
-                  <a:schemeClr val="bg1">
-                    <a:lumMod val="95000"/>
-                  </a:schemeClr>
-                </a:solidFill>
-              </a:rPr>
-              <a:t>rds_endpoint</a:t>
-            </a:r>
-            <a:endParaRPr lang="en-US" sz="800" dirty="0">
-              <a:solidFill>
-                <a:schemeClr val="bg1">
-                  <a:lumMod val="95000"/>
-                </a:schemeClr>
-              </a:solidFill>
-            </a:endParaRPr>
-          </a:p>
-        </p:txBody>
-      </p:sp>
-      <p:sp>
-        <p:nvSpPr>
-          <p:cNvPr id="25" name="Rectangle 24">
-            <a:extLst>
-              <a:ext uri="{FF2B5EF4-FFF2-40B4-BE49-F238E27FC236}">
-                <a16:creationId xmlns:a16="http://schemas.microsoft.com/office/drawing/2014/main" id="{3AB2C2BE-AC00-BC31-9D4D-1368132F4E74}"/>
-              </a:ext>
-            </a:extLst>
-          </p:cNvPr>
-          <p:cNvSpPr/>
-          <p:nvPr/>
-        </p:nvSpPr>
-        <p:spPr>
-          <a:xfrm>
-            <a:off x="823176" y="5330783"/>
-            <a:ext cx="1284454" cy="179084"/>
-          </a:xfrm>
-          <a:prstGeom prst="rect">
-            <a:avLst/>
-          </a:prstGeom>
-          <a:solidFill>
-            <a:schemeClr val="tx1">
-              <a:lumMod val="75000"/>
-              <a:lumOff val="25000"/>
-            </a:schemeClr>
-          </a:solidFill>
-          <a:ln w="12700">
-            <a:noFill/>
-          </a:ln>
-        </p:spPr>
-        <p:style>
-          <a:lnRef idx="2">
-            <a:schemeClr val="accent1">
-              <a:shade val="15000"/>
-            </a:schemeClr>
-          </a:lnRef>
-          <a:fillRef idx="1">
-            <a:schemeClr val="accent1"/>
-          </a:fillRef>
-          <a:effectRef idx="0">
-            <a:schemeClr val="accent1"/>
-          </a:effectRef>
-          <a:fontRef idx="minor">
-            <a:schemeClr val="lt1"/>
-          </a:fontRef>
-        </p:style>
-        <p:txBody>
-          <a:bodyPr rtlCol="0" anchor="ctr"/>
-          <a:lstStyle/>
-          <a:p>
-            <a:pPr algn="ctr"/>
-            <a:r>
-              <a:rPr lang="en-US" sz="800" dirty="0" err="1">
-                <a:solidFill>
-                  <a:schemeClr val="bg1">
-                    <a:lumMod val="95000"/>
-                  </a:schemeClr>
-                </a:solidFill>
-              </a:rPr>
-              <a:t>ebs_volume_id</a:t>
-            </a:r>
-            <a:endParaRPr lang="en-US" sz="800" dirty="0">
-              <a:solidFill>
-                <a:schemeClr val="bg1">
-                  <a:lumMod val="95000"/>
-                </a:schemeClr>
-              </a:solidFill>
-            </a:endParaRPr>
-          </a:p>
-        </p:txBody>
-      </p:sp>
-      <p:sp>
-        <p:nvSpPr>
           <p:cNvPr id="47" name="Cube 46">
             <a:extLst>
               <a:ext uri="{FF2B5EF4-FFF2-40B4-BE49-F238E27FC236}">
@@ -4501,15 +3952,14 @@
           </p:cNvPr>
           <p:cNvCxnSpPr>
             <a:cxnSpLocks/>
-            <a:stCxn id="16" idx="3"/>
             <a:endCxn id="759" idx="1"/>
           </p:cNvCxnSpPr>
           <p:nvPr/>
         </p:nvCxnSpPr>
         <p:spPr>
           <a:xfrm>
-            <a:off x="4878286" y="719656"/>
-            <a:ext cx="2924732" cy="407845"/>
+            <a:off x="3254076" y="733177"/>
+            <a:ext cx="4548942" cy="394324"/>
           </a:xfrm>
           <a:prstGeom prst="bentConnector3">
             <a:avLst>
@@ -4549,15 +3999,14 @@
           </p:cNvPr>
           <p:cNvCxnSpPr>
             <a:cxnSpLocks/>
-            <a:stCxn id="18" idx="3"/>
             <a:endCxn id="759" idx="1"/>
           </p:cNvCxnSpPr>
           <p:nvPr/>
         </p:nvCxnSpPr>
         <p:spPr>
           <a:xfrm>
-            <a:off x="4878285" y="992878"/>
-            <a:ext cx="2924733" cy="134623"/>
+            <a:off x="3254077" y="988227"/>
+            <a:ext cx="4548941" cy="139274"/>
           </a:xfrm>
           <a:prstGeom prst="bentConnector3">
             <a:avLst>
@@ -4597,15 +4046,14 @@
           </p:cNvPr>
           <p:cNvCxnSpPr>
             <a:cxnSpLocks/>
-            <a:stCxn id="19" idx="3"/>
             <a:endCxn id="759" idx="1"/>
           </p:cNvCxnSpPr>
           <p:nvPr/>
         </p:nvCxnSpPr>
         <p:spPr>
           <a:xfrm flipV="1">
-            <a:off x="4878285" y="1127501"/>
-            <a:ext cx="2924733" cy="137551"/>
+            <a:off x="3254076" y="1127501"/>
+            <a:ext cx="4548942" cy="141788"/>
           </a:xfrm>
           <a:prstGeom prst="bentConnector3">
             <a:avLst>
@@ -4634,463 +4082,6 @@
           </a:fontRef>
         </p:style>
       </p:cxnSp>
-      <p:cxnSp>
-        <p:nvCxnSpPr>
-          <p:cNvPr id="227" name="Straight Arrow Connector 226">
-            <a:extLst>
-              <a:ext uri="{FF2B5EF4-FFF2-40B4-BE49-F238E27FC236}">
-                <a16:creationId xmlns:a16="http://schemas.microsoft.com/office/drawing/2014/main" id="{3B1FD4A6-2B8B-139F-97A1-56ED1CE8FB40}"/>
-              </a:ext>
-            </a:extLst>
-          </p:cNvPr>
-          <p:cNvCxnSpPr>
-            <a:cxnSpLocks/>
-            <a:endCxn id="16" idx="1"/>
-          </p:cNvCxnSpPr>
-          <p:nvPr/>
-        </p:nvCxnSpPr>
-        <p:spPr>
-          <a:xfrm>
-            <a:off x="3256174" y="719656"/>
-            <a:ext cx="337658" cy="0"/>
-          </a:xfrm>
-          <a:prstGeom prst="straightConnector1">
-            <a:avLst/>
-          </a:prstGeom>
-          <a:ln>
-            <a:solidFill>
-              <a:schemeClr val="accent5"/>
-            </a:solidFill>
-            <a:tailEnd type="triangle"/>
-          </a:ln>
-        </p:spPr>
-        <p:style>
-          <a:lnRef idx="2">
-            <a:schemeClr val="accent1"/>
-          </a:lnRef>
-          <a:fillRef idx="0">
-            <a:schemeClr val="accent1"/>
-          </a:fillRef>
-          <a:effectRef idx="1">
-            <a:schemeClr val="accent1"/>
-          </a:effectRef>
-          <a:fontRef idx="minor">
-            <a:schemeClr val="tx1"/>
-          </a:fontRef>
-        </p:style>
-      </p:cxnSp>
-      <p:cxnSp>
-        <p:nvCxnSpPr>
-          <p:cNvPr id="228" name="Straight Arrow Connector 227">
-            <a:extLst>
-              <a:ext uri="{FF2B5EF4-FFF2-40B4-BE49-F238E27FC236}">
-                <a16:creationId xmlns:a16="http://schemas.microsoft.com/office/drawing/2014/main" id="{A858A602-2D52-DEB7-6B90-4232629FF7AF}"/>
-              </a:ext>
-            </a:extLst>
-          </p:cNvPr>
-          <p:cNvCxnSpPr>
-            <a:cxnSpLocks/>
-            <a:endCxn id="18" idx="1"/>
-          </p:cNvCxnSpPr>
-          <p:nvPr/>
-        </p:nvCxnSpPr>
-        <p:spPr>
-          <a:xfrm>
-            <a:off x="3256174" y="992878"/>
-            <a:ext cx="337657" cy="0"/>
-          </a:xfrm>
-          <a:prstGeom prst="straightConnector1">
-            <a:avLst/>
-          </a:prstGeom>
-          <a:ln>
-            <a:solidFill>
-              <a:schemeClr val="accent5"/>
-            </a:solidFill>
-            <a:tailEnd type="triangle"/>
-          </a:ln>
-        </p:spPr>
-        <p:style>
-          <a:lnRef idx="2">
-            <a:schemeClr val="accent1"/>
-          </a:lnRef>
-          <a:fillRef idx="0">
-            <a:schemeClr val="accent1"/>
-          </a:fillRef>
-          <a:effectRef idx="1">
-            <a:schemeClr val="accent1"/>
-          </a:effectRef>
-          <a:fontRef idx="minor">
-            <a:schemeClr val="tx1"/>
-          </a:fontRef>
-        </p:style>
-      </p:cxnSp>
-      <p:cxnSp>
-        <p:nvCxnSpPr>
-          <p:cNvPr id="229" name="Straight Arrow Connector 228">
-            <a:extLst>
-              <a:ext uri="{FF2B5EF4-FFF2-40B4-BE49-F238E27FC236}">
-                <a16:creationId xmlns:a16="http://schemas.microsoft.com/office/drawing/2014/main" id="{D45A6829-09EC-0D0E-18C1-454392F4A154}"/>
-              </a:ext>
-            </a:extLst>
-          </p:cNvPr>
-          <p:cNvCxnSpPr>
-            <a:cxnSpLocks/>
-            <a:endCxn id="19" idx="1"/>
-          </p:cNvCxnSpPr>
-          <p:nvPr/>
-        </p:nvCxnSpPr>
-        <p:spPr>
-          <a:xfrm>
-            <a:off x="3256174" y="1265052"/>
-            <a:ext cx="337657" cy="0"/>
-          </a:xfrm>
-          <a:prstGeom prst="straightConnector1">
-            <a:avLst/>
-          </a:prstGeom>
-          <a:ln>
-            <a:solidFill>
-              <a:schemeClr val="accent5"/>
-            </a:solidFill>
-            <a:tailEnd type="triangle"/>
-          </a:ln>
-        </p:spPr>
-        <p:style>
-          <a:lnRef idx="2">
-            <a:schemeClr val="accent1"/>
-          </a:lnRef>
-          <a:fillRef idx="0">
-            <a:schemeClr val="accent1"/>
-          </a:fillRef>
-          <a:effectRef idx="1">
-            <a:schemeClr val="accent1"/>
-          </a:effectRef>
-          <a:fontRef idx="minor">
-            <a:schemeClr val="tx1"/>
-          </a:fontRef>
-        </p:style>
-      </p:cxnSp>
-      <p:sp>
-        <p:nvSpPr>
-          <p:cNvPr id="230" name="Rectangle 229">
-            <a:extLst>
-              <a:ext uri="{FF2B5EF4-FFF2-40B4-BE49-F238E27FC236}">
-                <a16:creationId xmlns:a16="http://schemas.microsoft.com/office/drawing/2014/main" id="{8191BFEA-A323-CE73-71B3-101C1C69AE0A}"/>
-              </a:ext>
-            </a:extLst>
-          </p:cNvPr>
-          <p:cNvSpPr/>
-          <p:nvPr/>
-        </p:nvSpPr>
-        <p:spPr>
-          <a:xfrm>
-            <a:off x="823177" y="3013584"/>
-            <a:ext cx="1284454" cy="179084"/>
-          </a:xfrm>
-          <a:prstGeom prst="rect">
-            <a:avLst/>
-          </a:prstGeom>
-          <a:solidFill>
-            <a:schemeClr val="tx1">
-              <a:lumMod val="75000"/>
-              <a:lumOff val="25000"/>
-            </a:schemeClr>
-          </a:solidFill>
-          <a:ln w="12700">
-            <a:noFill/>
-          </a:ln>
-        </p:spPr>
-        <p:style>
-          <a:lnRef idx="2">
-            <a:schemeClr val="accent1">
-              <a:shade val="15000"/>
-            </a:schemeClr>
-          </a:lnRef>
-          <a:fillRef idx="1">
-            <a:schemeClr val="accent1"/>
-          </a:fillRef>
-          <a:effectRef idx="0">
-            <a:schemeClr val="accent1"/>
-          </a:effectRef>
-          <a:fontRef idx="minor">
-            <a:schemeClr val="lt1"/>
-          </a:fontRef>
-        </p:style>
-        <p:txBody>
-          <a:bodyPr rtlCol="0" anchor="ctr"/>
-          <a:lstStyle/>
-          <a:p>
-            <a:pPr algn="ctr"/>
-            <a:r>
-              <a:rPr lang="en-US" sz="800" dirty="0" err="1">
-                <a:solidFill>
-                  <a:schemeClr val="bg1">
-                    <a:lumMod val="95000"/>
-                  </a:schemeClr>
-                </a:solidFill>
-              </a:rPr>
-              <a:t>db_name</a:t>
-            </a:r>
-            <a:endParaRPr lang="en-US" sz="800" dirty="0">
-              <a:solidFill>
-                <a:schemeClr val="bg1">
-                  <a:lumMod val="95000"/>
-                </a:schemeClr>
-              </a:solidFill>
-            </a:endParaRPr>
-          </a:p>
-        </p:txBody>
-      </p:sp>
-      <p:sp>
-        <p:nvSpPr>
-          <p:cNvPr id="231" name="Rectangle 230">
-            <a:extLst>
-              <a:ext uri="{FF2B5EF4-FFF2-40B4-BE49-F238E27FC236}">
-                <a16:creationId xmlns:a16="http://schemas.microsoft.com/office/drawing/2014/main" id="{EA51BE06-5205-71A1-2303-219B4BF5A2CF}"/>
-              </a:ext>
-            </a:extLst>
-          </p:cNvPr>
-          <p:cNvSpPr/>
-          <p:nvPr/>
-        </p:nvSpPr>
-        <p:spPr>
-          <a:xfrm>
-            <a:off x="823176" y="3286806"/>
-            <a:ext cx="1284454" cy="179084"/>
-          </a:xfrm>
-          <a:prstGeom prst="rect">
-            <a:avLst/>
-          </a:prstGeom>
-          <a:solidFill>
-            <a:schemeClr val="tx1">
-              <a:lumMod val="75000"/>
-              <a:lumOff val="25000"/>
-            </a:schemeClr>
-          </a:solidFill>
-          <a:ln w="12700">
-            <a:noFill/>
-          </a:ln>
-        </p:spPr>
-        <p:style>
-          <a:lnRef idx="2">
-            <a:schemeClr val="accent1">
-              <a:shade val="15000"/>
-            </a:schemeClr>
-          </a:lnRef>
-          <a:fillRef idx="1">
-            <a:schemeClr val="accent1"/>
-          </a:fillRef>
-          <a:effectRef idx="0">
-            <a:schemeClr val="accent1"/>
-          </a:effectRef>
-          <a:fontRef idx="minor">
-            <a:schemeClr val="lt1"/>
-          </a:fontRef>
-        </p:style>
-        <p:txBody>
-          <a:bodyPr rtlCol="0" anchor="ctr"/>
-          <a:lstStyle/>
-          <a:p>
-            <a:pPr algn="ctr"/>
-            <a:r>
-              <a:rPr lang="en-US" sz="800" dirty="0" err="1">
-                <a:solidFill>
-                  <a:schemeClr val="bg1">
-                    <a:lumMod val="95000"/>
-                  </a:schemeClr>
-                </a:solidFill>
-              </a:rPr>
-              <a:t>db_username</a:t>
-            </a:r>
-            <a:endParaRPr lang="en-US" sz="800" dirty="0">
-              <a:solidFill>
-                <a:schemeClr val="bg1">
-                  <a:lumMod val="95000"/>
-                </a:schemeClr>
-              </a:solidFill>
-            </a:endParaRPr>
-          </a:p>
-        </p:txBody>
-      </p:sp>
-      <p:sp>
-        <p:nvSpPr>
-          <p:cNvPr id="232" name="Rectangle 231">
-            <a:extLst>
-              <a:ext uri="{FF2B5EF4-FFF2-40B4-BE49-F238E27FC236}">
-                <a16:creationId xmlns:a16="http://schemas.microsoft.com/office/drawing/2014/main" id="{F2FF2A0A-93F3-B33E-085D-8EED0423AEFD}"/>
-              </a:ext>
-            </a:extLst>
-          </p:cNvPr>
-          <p:cNvSpPr/>
-          <p:nvPr/>
-        </p:nvSpPr>
-        <p:spPr>
-          <a:xfrm>
-            <a:off x="823176" y="3552016"/>
-            <a:ext cx="1284454" cy="179084"/>
-          </a:xfrm>
-          <a:prstGeom prst="rect">
-            <a:avLst/>
-          </a:prstGeom>
-          <a:solidFill>
-            <a:schemeClr val="tx1">
-              <a:lumMod val="75000"/>
-              <a:lumOff val="25000"/>
-            </a:schemeClr>
-          </a:solidFill>
-          <a:ln w="12700">
-            <a:noFill/>
-          </a:ln>
-        </p:spPr>
-        <p:style>
-          <a:lnRef idx="2">
-            <a:schemeClr val="accent1">
-              <a:shade val="15000"/>
-            </a:schemeClr>
-          </a:lnRef>
-          <a:fillRef idx="1">
-            <a:schemeClr val="accent1"/>
-          </a:fillRef>
-          <a:effectRef idx="0">
-            <a:schemeClr val="accent1"/>
-          </a:effectRef>
-          <a:fontRef idx="minor">
-            <a:schemeClr val="lt1"/>
-          </a:fontRef>
-        </p:style>
-        <p:txBody>
-          <a:bodyPr rtlCol="0" anchor="ctr"/>
-          <a:lstStyle/>
-          <a:p>
-            <a:pPr algn="ctr"/>
-            <a:r>
-              <a:rPr lang="en-US" sz="800" dirty="0" err="1">
-                <a:solidFill>
-                  <a:schemeClr val="bg1">
-                    <a:lumMod val="95000"/>
-                  </a:schemeClr>
-                </a:solidFill>
-              </a:rPr>
-              <a:t>db_password</a:t>
-            </a:r>
-            <a:endParaRPr lang="en-US" sz="800" dirty="0">
-              <a:solidFill>
-                <a:schemeClr val="bg1">
-                  <a:lumMod val="95000"/>
-                </a:schemeClr>
-              </a:solidFill>
-            </a:endParaRPr>
-          </a:p>
-        </p:txBody>
-      </p:sp>
-      <p:cxnSp>
-        <p:nvCxnSpPr>
-          <p:cNvPr id="238" name="Straight Arrow Connector 237">
-            <a:extLst>
-              <a:ext uri="{FF2B5EF4-FFF2-40B4-BE49-F238E27FC236}">
-                <a16:creationId xmlns:a16="http://schemas.microsoft.com/office/drawing/2014/main" id="{7F60D126-90EA-4165-8D80-8D5BD43D93CA}"/>
-              </a:ext>
-            </a:extLst>
-          </p:cNvPr>
-          <p:cNvCxnSpPr>
-            <a:cxnSpLocks/>
-            <a:endCxn id="12" idx="1"/>
-          </p:cNvCxnSpPr>
-          <p:nvPr/>
-        </p:nvCxnSpPr>
-        <p:spPr>
-          <a:xfrm>
-            <a:off x="3246630" y="1537253"/>
-            <a:ext cx="342879" cy="0"/>
-          </a:xfrm>
-          <a:prstGeom prst="straightConnector1">
-            <a:avLst/>
-          </a:prstGeom>
-          <a:ln>
-            <a:solidFill>
-              <a:schemeClr val="accent5"/>
-            </a:solidFill>
-            <a:tailEnd type="triangle"/>
-          </a:ln>
-        </p:spPr>
-        <p:style>
-          <a:lnRef idx="2">
-            <a:schemeClr val="accent1"/>
-          </a:lnRef>
-          <a:fillRef idx="0">
-            <a:schemeClr val="accent1"/>
-          </a:fillRef>
-          <a:effectRef idx="1">
-            <a:schemeClr val="accent1"/>
-          </a:effectRef>
-          <a:fontRef idx="minor">
-            <a:schemeClr val="tx1"/>
-          </a:fontRef>
-        </p:style>
-      </p:cxnSp>
-      <p:sp>
-        <p:nvSpPr>
-          <p:cNvPr id="242" name="Rectangle 241">
-            <a:extLst>
-              <a:ext uri="{FF2B5EF4-FFF2-40B4-BE49-F238E27FC236}">
-                <a16:creationId xmlns:a16="http://schemas.microsoft.com/office/drawing/2014/main" id="{DA1B2662-E071-FD1E-9B02-993B4D7B013D}"/>
-              </a:ext>
-            </a:extLst>
-          </p:cNvPr>
-          <p:cNvSpPr/>
-          <p:nvPr/>
-        </p:nvSpPr>
-        <p:spPr>
-          <a:xfrm>
-            <a:off x="823176" y="3817226"/>
-            <a:ext cx="1284454" cy="179084"/>
-          </a:xfrm>
-          <a:prstGeom prst="rect">
-            <a:avLst/>
-          </a:prstGeom>
-          <a:solidFill>
-            <a:schemeClr val="tx1">
-              <a:lumMod val="75000"/>
-              <a:lumOff val="25000"/>
-            </a:schemeClr>
-          </a:solidFill>
-          <a:ln w="12700">
-            <a:noFill/>
-          </a:ln>
-        </p:spPr>
-        <p:style>
-          <a:lnRef idx="2">
-            <a:schemeClr val="accent1">
-              <a:shade val="15000"/>
-            </a:schemeClr>
-          </a:lnRef>
-          <a:fillRef idx="1">
-            <a:schemeClr val="accent1"/>
-          </a:fillRef>
-          <a:effectRef idx="0">
-            <a:schemeClr val="accent1"/>
-          </a:effectRef>
-          <a:fontRef idx="minor">
-            <a:schemeClr val="lt1"/>
-          </a:fontRef>
-        </p:style>
-        <p:txBody>
-          <a:bodyPr rtlCol="0" anchor="ctr"/>
-          <a:lstStyle/>
-          <a:p>
-            <a:pPr algn="ctr"/>
-            <a:r>
-              <a:rPr lang="en-US" sz="800" dirty="0">
-                <a:solidFill>
-                  <a:schemeClr val="bg1">
-                    <a:lumMod val="95000"/>
-                  </a:schemeClr>
-                </a:solidFill>
-              </a:rPr>
-              <a:t>namespace</a:t>
-            </a:r>
-          </a:p>
-        </p:txBody>
-      </p:sp>
       <p:sp>
         <p:nvSpPr>
           <p:cNvPr id="312" name="Rectangle 311">
@@ -5235,23 +4226,23 @@
       </p:sp>
       <p:cxnSp>
         <p:nvCxnSpPr>
-          <p:cNvPr id="316" name="Straight Arrow Connector 315">
-            <a:extLst>
-              <a:ext uri="{FF2B5EF4-FFF2-40B4-BE49-F238E27FC236}">
-                <a16:creationId xmlns:a16="http://schemas.microsoft.com/office/drawing/2014/main" id="{64823659-F8FC-9C99-0576-3B9CF36894A5}"/>
+          <p:cNvPr id="317" name="Straight Arrow Connector 316">
+            <a:extLst>
+              <a:ext uri="{FF2B5EF4-FFF2-40B4-BE49-F238E27FC236}">
+                <a16:creationId xmlns:a16="http://schemas.microsoft.com/office/drawing/2014/main" id="{BC014F30-B5F6-F750-42DF-D4E9A22D8D1A}"/>
               </a:ext>
             </a:extLst>
           </p:cNvPr>
           <p:cNvCxnSpPr>
             <a:cxnSpLocks/>
-            <a:stCxn id="313" idx="1"/>
+            <a:stCxn id="1033" idx="2"/>
           </p:cNvCxnSpPr>
           <p:nvPr/>
         </p:nvCxnSpPr>
         <p:spPr>
           <a:xfrm flipH="1">
-            <a:off x="3246630" y="2398364"/>
-            <a:ext cx="347201" cy="0"/>
+            <a:off x="3246630" y="3285661"/>
+            <a:ext cx="3532025" cy="0"/>
           </a:xfrm>
           <a:prstGeom prst="straightConnector1">
             <a:avLst/>
@@ -5280,26 +4271,207 @@
       </p:cxnSp>
       <p:cxnSp>
         <p:nvCxnSpPr>
-          <p:cNvPr id="317" name="Straight Arrow Connector 316">
-            <a:extLst>
-              <a:ext uri="{FF2B5EF4-FFF2-40B4-BE49-F238E27FC236}">
-                <a16:creationId xmlns:a16="http://schemas.microsoft.com/office/drawing/2014/main" id="{BC014F30-B5F6-F750-42DF-D4E9A22D8D1A}"/>
+          <p:cNvPr id="318" name="Straight Arrow Connector 317">
+            <a:extLst>
+              <a:ext uri="{FF2B5EF4-FFF2-40B4-BE49-F238E27FC236}">
+                <a16:creationId xmlns:a16="http://schemas.microsoft.com/office/drawing/2014/main" id="{34BCC3E4-72C2-2AAA-6644-1DA749E30979}"/>
               </a:ext>
             </a:extLst>
           </p:cNvPr>
           <p:cNvCxnSpPr>
             <a:cxnSpLocks/>
-            <a:stCxn id="1033" idx="2"/>
-            <a:endCxn id="314" idx="3"/>
+            <a:endCxn id="315" idx="1"/>
           </p:cNvCxnSpPr>
           <p:nvPr/>
         </p:nvCxnSpPr>
         <p:spPr>
-          <a:xfrm flipH="1">
-            <a:off x="4878285" y="3285661"/>
-            <a:ext cx="1900370" cy="1699"/>
+          <a:xfrm>
+            <a:off x="9695614" y="2996483"/>
+            <a:ext cx="580402" cy="0"/>
           </a:xfrm>
           <a:prstGeom prst="straightConnector1">
+            <a:avLst/>
+          </a:prstGeom>
+          <a:ln>
+            <a:solidFill>
+              <a:schemeClr val="accent5"/>
+            </a:solidFill>
+            <a:tailEnd type="none"/>
+          </a:ln>
+        </p:spPr>
+        <p:style>
+          <a:lnRef idx="2">
+            <a:schemeClr val="accent1"/>
+          </a:lnRef>
+          <a:fillRef idx="0">
+            <a:schemeClr val="accent1"/>
+          </a:fillRef>
+          <a:effectRef idx="1">
+            <a:schemeClr val="accent1"/>
+          </a:effectRef>
+          <a:fontRef idx="minor">
+            <a:schemeClr val="tx1"/>
+          </a:fontRef>
+        </p:style>
+      </p:cxnSp>
+      <p:cxnSp>
+        <p:nvCxnSpPr>
+          <p:cNvPr id="319" name="Straight Arrow Connector 318">
+            <a:extLst>
+              <a:ext uri="{FF2B5EF4-FFF2-40B4-BE49-F238E27FC236}">
+                <a16:creationId xmlns:a16="http://schemas.microsoft.com/office/drawing/2014/main" id="{40CEC93D-0826-CB19-B0B0-2DD43F3A7971}"/>
+              </a:ext>
+            </a:extLst>
+          </p:cNvPr>
+          <p:cNvCxnSpPr>
+            <a:cxnSpLocks/>
+            <a:stCxn id="999" idx="3"/>
+            <a:endCxn id="312" idx="1"/>
+          </p:cNvCxnSpPr>
+          <p:nvPr/>
+        </p:nvCxnSpPr>
+        <p:spPr>
+          <a:xfrm>
+            <a:off x="9695614" y="3285661"/>
+            <a:ext cx="580402" cy="1349"/>
+          </a:xfrm>
+          <a:prstGeom prst="straightConnector1">
+            <a:avLst/>
+          </a:prstGeom>
+          <a:ln>
+            <a:solidFill>
+              <a:schemeClr val="accent5"/>
+            </a:solidFill>
+            <a:tailEnd type="none"/>
+          </a:ln>
+        </p:spPr>
+        <p:style>
+          <a:lnRef idx="2">
+            <a:schemeClr val="accent1"/>
+          </a:lnRef>
+          <a:fillRef idx="0">
+            <a:schemeClr val="accent1"/>
+          </a:fillRef>
+          <a:effectRef idx="1">
+            <a:schemeClr val="accent1"/>
+          </a:effectRef>
+          <a:fontRef idx="minor">
+            <a:schemeClr val="tx1"/>
+          </a:fontRef>
+        </p:style>
+      </p:cxnSp>
+      <p:cxnSp>
+        <p:nvCxnSpPr>
+          <p:cNvPr id="403" name="Straight Arrow Connector 402">
+            <a:extLst>
+              <a:ext uri="{FF2B5EF4-FFF2-40B4-BE49-F238E27FC236}">
+                <a16:creationId xmlns:a16="http://schemas.microsoft.com/office/drawing/2014/main" id="{160B9708-4CA7-97D4-09E9-FFF0A8B3FC0C}"/>
+              </a:ext>
+            </a:extLst>
+          </p:cNvPr>
+          <p:cNvCxnSpPr>
+            <a:cxnSpLocks/>
+            <a:endCxn id="74" idx="1"/>
+          </p:cNvCxnSpPr>
+          <p:nvPr/>
+        </p:nvCxnSpPr>
+        <p:spPr>
+          <a:xfrm>
+            <a:off x="9695614" y="2786912"/>
+            <a:ext cx="584859" cy="0"/>
+          </a:xfrm>
+          <a:prstGeom prst="straightConnector1">
+            <a:avLst/>
+          </a:prstGeom>
+          <a:ln>
+            <a:solidFill>
+              <a:schemeClr val="accent5"/>
+            </a:solidFill>
+            <a:tailEnd type="none"/>
+          </a:ln>
+        </p:spPr>
+        <p:style>
+          <a:lnRef idx="2">
+            <a:schemeClr val="accent1"/>
+          </a:lnRef>
+          <a:fillRef idx="0">
+            <a:schemeClr val="accent1"/>
+          </a:fillRef>
+          <a:effectRef idx="1">
+            <a:schemeClr val="accent1"/>
+          </a:effectRef>
+          <a:fontRef idx="minor">
+            <a:schemeClr val="tx1"/>
+          </a:fontRef>
+        </p:style>
+      </p:cxnSp>
+      <p:cxnSp>
+        <p:nvCxnSpPr>
+          <p:cNvPr id="404" name="Straight Arrow Connector 403">
+            <a:extLst>
+              <a:ext uri="{FF2B5EF4-FFF2-40B4-BE49-F238E27FC236}">
+                <a16:creationId xmlns:a16="http://schemas.microsoft.com/office/drawing/2014/main" id="{85AF0D9B-826D-5EEA-83E7-70FAB6865BF4}"/>
+              </a:ext>
+            </a:extLst>
+          </p:cNvPr>
+          <p:cNvCxnSpPr>
+            <a:cxnSpLocks/>
+            <a:stCxn id="995" idx="3"/>
+            <a:endCxn id="83" idx="1"/>
+          </p:cNvCxnSpPr>
+          <p:nvPr/>
+        </p:nvCxnSpPr>
+        <p:spPr>
+          <a:xfrm flipV="1">
+            <a:off x="9695614" y="2511738"/>
+            <a:ext cx="580402" cy="121"/>
+          </a:xfrm>
+          <a:prstGeom prst="straightConnector1">
+            <a:avLst/>
+          </a:prstGeom>
+          <a:ln>
+            <a:solidFill>
+              <a:schemeClr val="accent5"/>
+            </a:solidFill>
+            <a:tailEnd type="none"/>
+          </a:ln>
+        </p:spPr>
+        <p:style>
+          <a:lnRef idx="2">
+            <a:schemeClr val="accent1"/>
+          </a:lnRef>
+          <a:fillRef idx="0">
+            <a:schemeClr val="accent1"/>
+          </a:fillRef>
+          <a:effectRef idx="1">
+            <a:schemeClr val="accent1"/>
+          </a:effectRef>
+          <a:fontRef idx="minor">
+            <a:schemeClr val="tx1"/>
+          </a:fontRef>
+        </p:style>
+      </p:cxnSp>
+      <p:cxnSp>
+        <p:nvCxnSpPr>
+          <p:cNvPr id="413" name="Connector: Elbow 412">
+            <a:extLst>
+              <a:ext uri="{FF2B5EF4-FFF2-40B4-BE49-F238E27FC236}">
+                <a16:creationId xmlns:a16="http://schemas.microsoft.com/office/drawing/2014/main" id="{B0C5170D-2AB7-E20F-8412-084FD76712DC}"/>
+              </a:ext>
+            </a:extLst>
+          </p:cNvPr>
+          <p:cNvCxnSpPr>
+            <a:cxnSpLocks/>
+            <a:stCxn id="83" idx="0"/>
+          </p:cNvCxnSpPr>
+          <p:nvPr/>
+        </p:nvCxnSpPr>
+        <p:spPr>
+          <a:xfrm rot="16200000" flipV="1">
+            <a:off x="9024204" y="528157"/>
+            <a:ext cx="682530" cy="3105548"/>
+          </a:xfrm>
+          <a:prstGeom prst="bentConnector2">
             <a:avLst/>
           </a:prstGeom>
           <a:ln>
@@ -5326,26 +4498,28 @@
       </p:cxnSp>
       <p:cxnSp>
         <p:nvCxnSpPr>
-          <p:cNvPr id="318" name="Straight Arrow Connector 317">
-            <a:extLst>
-              <a:ext uri="{FF2B5EF4-FFF2-40B4-BE49-F238E27FC236}">
-                <a16:creationId xmlns:a16="http://schemas.microsoft.com/office/drawing/2014/main" id="{34BCC3E4-72C2-2AAA-6644-1DA749E30979}"/>
+          <p:cNvPr id="419" name="Connector: Elbow 418">
+            <a:extLst>
+              <a:ext uri="{FF2B5EF4-FFF2-40B4-BE49-F238E27FC236}">
+                <a16:creationId xmlns:a16="http://schemas.microsoft.com/office/drawing/2014/main" id="{DEA13547-FB4C-E101-B1B7-F966472950BB}"/>
               </a:ext>
             </a:extLst>
           </p:cNvPr>
           <p:cNvCxnSpPr>
             <a:cxnSpLocks/>
-            <a:endCxn id="315" idx="1"/>
+            <a:stCxn id="74" idx="3"/>
           </p:cNvCxnSpPr>
           <p:nvPr/>
         </p:nvCxnSpPr>
         <p:spPr>
-          <a:xfrm>
-            <a:off x="9695614" y="2996483"/>
-            <a:ext cx="580402" cy="0"/>
-          </a:xfrm>
-          <a:prstGeom prst="straightConnector1">
-            <a:avLst/>
+          <a:xfrm flipH="1" flipV="1">
+            <a:off x="9093140" y="1226089"/>
+            <a:ext cx="2471787" cy="1560823"/>
+          </a:xfrm>
+          <a:prstGeom prst="bentConnector3">
+            <a:avLst>
+              <a:gd name="adj1" fmla="val -9248"/>
+            </a:avLst>
           </a:prstGeom>
           <a:ln>
             <a:solidFill>
@@ -5371,27 +4545,30 @@
       </p:cxnSp>
       <p:cxnSp>
         <p:nvCxnSpPr>
-          <p:cNvPr id="319" name="Straight Arrow Connector 318">
-            <a:extLst>
-              <a:ext uri="{FF2B5EF4-FFF2-40B4-BE49-F238E27FC236}">
-                <a16:creationId xmlns:a16="http://schemas.microsoft.com/office/drawing/2014/main" id="{40CEC93D-0826-CB19-B0B0-2DD43F3A7971}"/>
+          <p:cNvPr id="468" name="Connector: Elbow 467">
+            <a:extLst>
+              <a:ext uri="{FF2B5EF4-FFF2-40B4-BE49-F238E27FC236}">
+                <a16:creationId xmlns:a16="http://schemas.microsoft.com/office/drawing/2014/main" id="{DB0F603A-A4DA-B2C7-3401-77A5077CE1AA}"/>
               </a:ext>
             </a:extLst>
           </p:cNvPr>
           <p:cNvCxnSpPr>
             <a:cxnSpLocks/>
-            <a:stCxn id="999" idx="3"/>
-            <a:endCxn id="312" idx="1"/>
+            <a:stCxn id="315" idx="3"/>
+            <a:endCxn id="33" idx="0"/>
           </p:cNvCxnSpPr>
           <p:nvPr/>
         </p:nvCxnSpPr>
         <p:spPr>
-          <a:xfrm>
-            <a:off x="9695614" y="3285661"/>
-            <a:ext cx="580402" cy="1349"/>
-          </a:xfrm>
-          <a:prstGeom prst="straightConnector1">
-            <a:avLst/>
+          <a:xfrm flipH="1">
+            <a:off x="8302998" y="2996483"/>
+            <a:ext cx="3257472" cy="1343765"/>
+          </a:xfrm>
+          <a:prstGeom prst="bentConnector4">
+            <a:avLst>
+              <a:gd name="adj1" fmla="val -7018"/>
+              <a:gd name="adj2" fmla="val 77059"/>
+            </a:avLst>
           </a:prstGeom>
           <a:ln>
             <a:solidFill>
@@ -5417,238 +4594,6 @@
       </p:cxnSp>
       <p:cxnSp>
         <p:nvCxnSpPr>
-          <p:cNvPr id="403" name="Straight Arrow Connector 402">
-            <a:extLst>
-              <a:ext uri="{FF2B5EF4-FFF2-40B4-BE49-F238E27FC236}">
-                <a16:creationId xmlns:a16="http://schemas.microsoft.com/office/drawing/2014/main" id="{160B9708-4CA7-97D4-09E9-FFF0A8B3FC0C}"/>
-              </a:ext>
-            </a:extLst>
-          </p:cNvPr>
-          <p:cNvCxnSpPr>
-            <a:cxnSpLocks/>
-            <a:endCxn id="74" idx="1"/>
-          </p:cNvCxnSpPr>
-          <p:nvPr/>
-        </p:nvCxnSpPr>
-        <p:spPr>
-          <a:xfrm>
-            <a:off x="9695614" y="2786912"/>
-            <a:ext cx="584859" cy="0"/>
-          </a:xfrm>
-          <a:prstGeom prst="straightConnector1">
-            <a:avLst/>
-          </a:prstGeom>
-          <a:ln>
-            <a:solidFill>
-              <a:schemeClr val="accent5"/>
-            </a:solidFill>
-            <a:tailEnd type="triangle"/>
-          </a:ln>
-        </p:spPr>
-        <p:style>
-          <a:lnRef idx="2">
-            <a:schemeClr val="accent1"/>
-          </a:lnRef>
-          <a:fillRef idx="0">
-            <a:schemeClr val="accent1"/>
-          </a:fillRef>
-          <a:effectRef idx="1">
-            <a:schemeClr val="accent1"/>
-          </a:effectRef>
-          <a:fontRef idx="minor">
-            <a:schemeClr val="tx1"/>
-          </a:fontRef>
-        </p:style>
-      </p:cxnSp>
-      <p:cxnSp>
-        <p:nvCxnSpPr>
-          <p:cNvPr id="404" name="Straight Arrow Connector 403">
-            <a:extLst>
-              <a:ext uri="{FF2B5EF4-FFF2-40B4-BE49-F238E27FC236}">
-                <a16:creationId xmlns:a16="http://schemas.microsoft.com/office/drawing/2014/main" id="{85AF0D9B-826D-5EEA-83E7-70FAB6865BF4}"/>
-              </a:ext>
-            </a:extLst>
-          </p:cNvPr>
-          <p:cNvCxnSpPr>
-            <a:cxnSpLocks/>
-            <a:stCxn id="995" idx="3"/>
-            <a:endCxn id="83" idx="1"/>
-          </p:cNvCxnSpPr>
-          <p:nvPr/>
-        </p:nvCxnSpPr>
-        <p:spPr>
-          <a:xfrm flipV="1">
-            <a:off x="9695614" y="2511738"/>
-            <a:ext cx="580402" cy="121"/>
-          </a:xfrm>
-          <a:prstGeom prst="straightConnector1">
-            <a:avLst/>
-          </a:prstGeom>
-          <a:ln>
-            <a:solidFill>
-              <a:schemeClr val="accent5"/>
-            </a:solidFill>
-            <a:tailEnd type="triangle"/>
-          </a:ln>
-        </p:spPr>
-        <p:style>
-          <a:lnRef idx="2">
-            <a:schemeClr val="accent1"/>
-          </a:lnRef>
-          <a:fillRef idx="0">
-            <a:schemeClr val="accent1"/>
-          </a:fillRef>
-          <a:effectRef idx="1">
-            <a:schemeClr val="accent1"/>
-          </a:effectRef>
-          <a:fontRef idx="minor">
-            <a:schemeClr val="tx1"/>
-          </a:fontRef>
-        </p:style>
-      </p:cxnSp>
-      <p:cxnSp>
-        <p:nvCxnSpPr>
-          <p:cNvPr id="413" name="Connector: Elbow 412">
-            <a:extLst>
-              <a:ext uri="{FF2B5EF4-FFF2-40B4-BE49-F238E27FC236}">
-                <a16:creationId xmlns:a16="http://schemas.microsoft.com/office/drawing/2014/main" id="{B0C5170D-2AB7-E20F-8412-084FD76712DC}"/>
-              </a:ext>
-            </a:extLst>
-          </p:cNvPr>
-          <p:cNvCxnSpPr>
-            <a:cxnSpLocks/>
-            <a:stCxn id="83" idx="0"/>
-          </p:cNvCxnSpPr>
-          <p:nvPr/>
-        </p:nvCxnSpPr>
-        <p:spPr>
-          <a:xfrm rot="16200000" flipV="1">
-            <a:off x="9024204" y="528157"/>
-            <a:ext cx="682530" cy="3105548"/>
-          </a:xfrm>
-          <a:prstGeom prst="bentConnector2">
-            <a:avLst/>
-          </a:prstGeom>
-          <a:ln>
-            <a:solidFill>
-              <a:schemeClr val="accent5"/>
-            </a:solidFill>
-            <a:tailEnd type="triangle"/>
-          </a:ln>
-        </p:spPr>
-        <p:style>
-          <a:lnRef idx="2">
-            <a:schemeClr val="accent1"/>
-          </a:lnRef>
-          <a:fillRef idx="0">
-            <a:schemeClr val="accent1"/>
-          </a:fillRef>
-          <a:effectRef idx="1">
-            <a:schemeClr val="accent1"/>
-          </a:effectRef>
-          <a:fontRef idx="minor">
-            <a:schemeClr val="tx1"/>
-          </a:fontRef>
-        </p:style>
-      </p:cxnSp>
-      <p:cxnSp>
-        <p:nvCxnSpPr>
-          <p:cNvPr id="419" name="Connector: Elbow 418">
-            <a:extLst>
-              <a:ext uri="{FF2B5EF4-FFF2-40B4-BE49-F238E27FC236}">
-                <a16:creationId xmlns:a16="http://schemas.microsoft.com/office/drawing/2014/main" id="{DEA13547-FB4C-E101-B1B7-F966472950BB}"/>
-              </a:ext>
-            </a:extLst>
-          </p:cNvPr>
-          <p:cNvCxnSpPr>
-            <a:cxnSpLocks/>
-            <a:stCxn id="74" idx="3"/>
-          </p:cNvCxnSpPr>
-          <p:nvPr/>
-        </p:nvCxnSpPr>
-        <p:spPr>
-          <a:xfrm flipH="1" flipV="1">
-            <a:off x="9093140" y="1226089"/>
-            <a:ext cx="2471787" cy="1560823"/>
-          </a:xfrm>
-          <a:prstGeom prst="bentConnector3">
-            <a:avLst>
-              <a:gd name="adj1" fmla="val -9248"/>
-            </a:avLst>
-          </a:prstGeom>
-          <a:ln>
-            <a:solidFill>
-              <a:schemeClr val="accent5"/>
-            </a:solidFill>
-            <a:tailEnd type="triangle"/>
-          </a:ln>
-        </p:spPr>
-        <p:style>
-          <a:lnRef idx="2">
-            <a:schemeClr val="accent1"/>
-          </a:lnRef>
-          <a:fillRef idx="0">
-            <a:schemeClr val="accent1"/>
-          </a:fillRef>
-          <a:effectRef idx="1">
-            <a:schemeClr val="accent1"/>
-          </a:effectRef>
-          <a:fontRef idx="minor">
-            <a:schemeClr val="tx1"/>
-          </a:fontRef>
-        </p:style>
-      </p:cxnSp>
-      <p:cxnSp>
-        <p:nvCxnSpPr>
-          <p:cNvPr id="468" name="Connector: Elbow 467">
-            <a:extLst>
-              <a:ext uri="{FF2B5EF4-FFF2-40B4-BE49-F238E27FC236}">
-                <a16:creationId xmlns:a16="http://schemas.microsoft.com/office/drawing/2014/main" id="{DB0F603A-A4DA-B2C7-3401-77A5077CE1AA}"/>
-              </a:ext>
-            </a:extLst>
-          </p:cNvPr>
-          <p:cNvCxnSpPr>
-            <a:cxnSpLocks/>
-            <a:stCxn id="315" idx="3"/>
-            <a:endCxn id="1068" idx="0"/>
-          </p:cNvCxnSpPr>
-          <p:nvPr/>
-        </p:nvCxnSpPr>
-        <p:spPr>
-          <a:xfrm flipH="1">
-            <a:off x="8027754" y="2996483"/>
-            <a:ext cx="3532716" cy="1240487"/>
-          </a:xfrm>
-          <a:prstGeom prst="bentConnector4">
-            <a:avLst>
-              <a:gd name="adj1" fmla="val -6471"/>
-              <a:gd name="adj2" fmla="val 78994"/>
-            </a:avLst>
-          </a:prstGeom>
-          <a:ln>
-            <a:solidFill>
-              <a:schemeClr val="accent5"/>
-            </a:solidFill>
-            <a:tailEnd type="triangle"/>
-          </a:ln>
-        </p:spPr>
-        <p:style>
-          <a:lnRef idx="2">
-            <a:schemeClr val="accent1"/>
-          </a:lnRef>
-          <a:fillRef idx="0">
-            <a:schemeClr val="accent1"/>
-          </a:fillRef>
-          <a:effectRef idx="1">
-            <a:schemeClr val="accent1"/>
-          </a:effectRef>
-          <a:fontRef idx="minor">
-            <a:schemeClr val="tx1"/>
-          </a:fontRef>
-        </p:style>
-      </p:cxnSp>
-      <p:cxnSp>
-        <p:nvCxnSpPr>
           <p:cNvPr id="471" name="Connector: Elbow 470">
             <a:extLst>
               <a:ext uri="{FF2B5EF4-FFF2-40B4-BE49-F238E27FC236}">
@@ -5665,12 +4610,12 @@
         </p:nvCxnSpPr>
         <p:spPr>
           <a:xfrm rot="5400000">
-            <a:off x="9042790" y="2361517"/>
-            <a:ext cx="860418" cy="2890489"/>
+            <a:off x="8991151" y="2413156"/>
+            <a:ext cx="963696" cy="2890489"/>
           </a:xfrm>
           <a:prstGeom prst="bentConnector3">
             <a:avLst>
-              <a:gd name="adj1" fmla="val 69706"/>
+              <a:gd name="adj1" fmla="val 50000"/>
             </a:avLst>
           </a:prstGeom>
           <a:ln>
@@ -6036,10 +4981,10 @@
       </p:cxnSp>
       <p:sp>
         <p:nvSpPr>
-          <p:cNvPr id="551" name="Rectangle 550">
-            <a:extLst>
-              <a:ext uri="{FF2B5EF4-FFF2-40B4-BE49-F238E27FC236}">
-                <a16:creationId xmlns:a16="http://schemas.microsoft.com/office/drawing/2014/main" id="{3313E321-9ACF-07D2-495C-74321F31B59F}"/>
+          <p:cNvPr id="572" name="Rectangle 571">
+            <a:extLst>
+              <a:ext uri="{FF2B5EF4-FFF2-40B4-BE49-F238E27FC236}">
+                <a16:creationId xmlns:a16="http://schemas.microsoft.com/office/drawing/2014/main" id="{A4C4C104-61B1-572E-775C-2C8F78A595C9}"/>
               </a:ext>
             </a:extLst>
           </p:cNvPr>
@@ -6048,238 +4993,7 @@
         </p:nvSpPr>
         <p:spPr>
           <a:xfrm>
-            <a:off x="3590553" y="4826095"/>
-            <a:ext cx="1284454" cy="179084"/>
-          </a:xfrm>
-          <a:prstGeom prst="rect">
-            <a:avLst/>
-          </a:prstGeom>
-          <a:solidFill>
-            <a:schemeClr val="tx1">
-              <a:lumMod val="75000"/>
-              <a:lumOff val="25000"/>
-            </a:schemeClr>
-          </a:solidFill>
-          <a:ln w="12700">
-            <a:noFill/>
-          </a:ln>
-        </p:spPr>
-        <p:style>
-          <a:lnRef idx="2">
-            <a:schemeClr val="accent1">
-              <a:shade val="15000"/>
-            </a:schemeClr>
-          </a:lnRef>
-          <a:fillRef idx="1">
-            <a:schemeClr val="accent1"/>
-          </a:fillRef>
-          <a:effectRef idx="0">
-            <a:schemeClr val="accent1"/>
-          </a:effectRef>
-          <a:fontRef idx="minor">
-            <a:schemeClr val="lt1"/>
-          </a:fontRef>
-        </p:style>
-        <p:txBody>
-          <a:bodyPr rtlCol="0" anchor="ctr"/>
-          <a:lstStyle/>
-          <a:p>
-            <a:pPr algn="ctr"/>
-            <a:r>
-              <a:rPr lang="en-US" sz="800" dirty="0" err="1">
-                <a:solidFill>
-                  <a:schemeClr val="bg1">
-                    <a:lumMod val="95000"/>
-                  </a:schemeClr>
-                </a:solidFill>
-              </a:rPr>
-              <a:t>user_data</a:t>
-            </a:r>
-            <a:endParaRPr lang="en-US" sz="800" dirty="0">
-              <a:solidFill>
-                <a:schemeClr val="bg1">
-                  <a:lumMod val="95000"/>
-                </a:schemeClr>
-              </a:solidFill>
-            </a:endParaRPr>
-          </a:p>
-        </p:txBody>
-      </p:sp>
-      <p:cxnSp>
-        <p:nvCxnSpPr>
-          <p:cNvPr id="552" name="Straight Arrow Connector 551">
-            <a:extLst>
-              <a:ext uri="{FF2B5EF4-FFF2-40B4-BE49-F238E27FC236}">
-                <a16:creationId xmlns:a16="http://schemas.microsoft.com/office/drawing/2014/main" id="{52BC12B5-8A9B-F37E-62BB-E77BF3389CE3}"/>
-              </a:ext>
-            </a:extLst>
-          </p:cNvPr>
-          <p:cNvCxnSpPr>
-            <a:cxnSpLocks/>
-          </p:cNvCxnSpPr>
-          <p:nvPr/>
-        </p:nvCxnSpPr>
-        <p:spPr>
-          <a:xfrm>
-            <a:off x="3256174" y="4915636"/>
-            <a:ext cx="338701" cy="0"/>
-          </a:xfrm>
-          <a:prstGeom prst="straightConnector1">
-            <a:avLst/>
-          </a:prstGeom>
-          <a:ln>
-            <a:solidFill>
-              <a:schemeClr val="accent5"/>
-            </a:solidFill>
-            <a:tailEnd type="triangle"/>
-          </a:ln>
-        </p:spPr>
-        <p:style>
-          <a:lnRef idx="2">
-            <a:schemeClr val="accent1"/>
-          </a:lnRef>
-          <a:fillRef idx="0">
-            <a:schemeClr val="accent1"/>
-          </a:fillRef>
-          <a:effectRef idx="1">
-            <a:schemeClr val="accent1"/>
-          </a:effectRef>
-          <a:fontRef idx="minor">
-            <a:schemeClr val="tx1"/>
-          </a:fontRef>
-        </p:style>
-      </p:cxnSp>
-      <p:cxnSp>
-        <p:nvCxnSpPr>
-          <p:cNvPr id="554" name="Straight Arrow Connector 553">
-            <a:extLst>
-              <a:ext uri="{FF2B5EF4-FFF2-40B4-BE49-F238E27FC236}">
-                <a16:creationId xmlns:a16="http://schemas.microsoft.com/office/drawing/2014/main" id="{9D24830A-FA2D-1D44-7D61-C2051D228786}"/>
-              </a:ext>
-            </a:extLst>
-          </p:cNvPr>
-          <p:cNvCxnSpPr>
-            <a:cxnSpLocks/>
-            <a:stCxn id="551" idx="3"/>
-          </p:cNvCxnSpPr>
-          <p:nvPr/>
-        </p:nvCxnSpPr>
-        <p:spPr>
-          <a:xfrm>
-            <a:off x="4875007" y="4915637"/>
-            <a:ext cx="331384" cy="0"/>
-          </a:xfrm>
-          <a:prstGeom prst="straightConnector1">
-            <a:avLst/>
-          </a:prstGeom>
-          <a:ln>
-            <a:solidFill>
-              <a:schemeClr val="accent5"/>
-            </a:solidFill>
-            <a:tailEnd type="triangle"/>
-          </a:ln>
-        </p:spPr>
-        <p:style>
-          <a:lnRef idx="2">
-            <a:schemeClr val="accent1"/>
-          </a:lnRef>
-          <a:fillRef idx="0">
-            <a:schemeClr val="accent1"/>
-          </a:fillRef>
-          <a:effectRef idx="1">
-            <a:schemeClr val="accent1"/>
-          </a:effectRef>
-          <a:fontRef idx="minor">
-            <a:schemeClr val="tx1"/>
-          </a:fontRef>
-        </p:style>
-      </p:cxnSp>
-      <p:sp>
-        <p:nvSpPr>
-          <p:cNvPr id="569" name="Rectangle 568">
-            <a:extLst>
-              <a:ext uri="{FF2B5EF4-FFF2-40B4-BE49-F238E27FC236}">
-                <a16:creationId xmlns:a16="http://schemas.microsoft.com/office/drawing/2014/main" id="{03C20564-25E5-C23D-DB92-1AE24BA67D9D}"/>
-              </a:ext>
-            </a:extLst>
-          </p:cNvPr>
-          <p:cNvSpPr/>
-          <p:nvPr/>
-        </p:nvSpPr>
-        <p:spPr>
-          <a:xfrm>
-            <a:off x="10276016" y="4311613"/>
-            <a:ext cx="1284454" cy="179084"/>
-          </a:xfrm>
-          <a:prstGeom prst="rect">
-            <a:avLst/>
-          </a:prstGeom>
-          <a:solidFill>
-            <a:schemeClr val="tx1">
-              <a:lumMod val="75000"/>
-              <a:lumOff val="25000"/>
-            </a:schemeClr>
-          </a:solidFill>
-          <a:ln w="12700">
-            <a:noFill/>
-          </a:ln>
-        </p:spPr>
-        <p:style>
-          <a:lnRef idx="2">
-            <a:schemeClr val="accent1">
-              <a:shade val="15000"/>
-            </a:schemeClr>
-          </a:lnRef>
-          <a:fillRef idx="1">
-            <a:schemeClr val="accent1"/>
-          </a:fillRef>
-          <a:effectRef idx="0">
-            <a:schemeClr val="accent1"/>
-          </a:effectRef>
-          <a:fontRef idx="minor">
-            <a:schemeClr val="lt1"/>
-          </a:fontRef>
-        </p:style>
-        <p:txBody>
-          <a:bodyPr rtlCol="0" anchor="ctr"/>
-          <a:lstStyle/>
-          <a:p>
-            <a:pPr algn="ctr"/>
-            <a:r>
-              <a:rPr lang="en-US" sz="800" dirty="0" err="1">
-                <a:solidFill>
-                  <a:schemeClr val="bg1">
-                    <a:lumMod val="95000"/>
-                  </a:schemeClr>
-                </a:solidFill>
-              </a:rPr>
-              <a:t>public_ip</a:t>
-            </a:r>
-            <a:endParaRPr lang="en-US" sz="800" dirty="0">
-              <a:solidFill>
-                <a:schemeClr val="bg1">
-                  <a:lumMod val="95000"/>
-                </a:schemeClr>
-              </a:solidFill>
-            </a:endParaRPr>
-          </a:p>
-        </p:txBody>
-      </p:sp>
-      <p:sp>
-        <p:nvSpPr>
-          <p:cNvPr id="572" name="Rectangle 571">
-            <a:extLst>
-              <a:ext uri="{FF2B5EF4-FFF2-40B4-BE49-F238E27FC236}">
-                <a16:creationId xmlns:a16="http://schemas.microsoft.com/office/drawing/2014/main" id="{A4C4C104-61B1-572E-775C-2C8F78A595C9}"/>
-              </a:ext>
-            </a:extLst>
-          </p:cNvPr>
-          <p:cNvSpPr/>
-          <p:nvPr/>
-        </p:nvSpPr>
-        <p:spPr>
-          <a:xfrm>
-            <a:off x="10271560" y="4548694"/>
+            <a:off x="10271560" y="4303067"/>
             <a:ext cx="1284454" cy="179084"/>
           </a:xfrm>
           <a:prstGeom prst="rect">
@@ -6350,7 +5064,7 @@
         </p:nvSpPr>
         <p:spPr>
           <a:xfrm>
-            <a:off x="10271559" y="4794321"/>
+            <a:off x="10271559" y="4548694"/>
             <a:ext cx="1284454" cy="179084"/>
           </a:xfrm>
           <a:prstGeom prst="rect">
@@ -6425,8 +5139,8 @@
         </p:nvCxnSpPr>
         <p:spPr>
           <a:xfrm flipH="1">
-            <a:off x="8313728" y="4638236"/>
-            <a:ext cx="3242286" cy="1726428"/>
+            <a:off x="8313728" y="4392609"/>
+            <a:ext cx="3242286" cy="1972055"/>
           </a:xfrm>
           <a:prstGeom prst="bentConnector3">
             <a:avLst>
@@ -6473,8 +5187,8 @@
         </p:nvCxnSpPr>
         <p:spPr>
           <a:xfrm rot="5400000">
-            <a:off x="8918128" y="4369005"/>
-            <a:ext cx="1391259" cy="2600058"/>
+            <a:off x="8795314" y="4246192"/>
+            <a:ext cx="1636886" cy="2600058"/>
           </a:xfrm>
           <a:prstGeom prst="bentConnector2">
             <a:avLst/>
@@ -6501,96 +5215,25 @@
           </a:fontRef>
         </p:style>
       </p:cxnSp>
-      <p:sp>
-        <p:nvSpPr>
-          <p:cNvPr id="594" name="Rectangle 593">
-            <a:extLst>
-              <a:ext uri="{FF2B5EF4-FFF2-40B4-BE49-F238E27FC236}">
-                <a16:creationId xmlns:a16="http://schemas.microsoft.com/office/drawing/2014/main" id="{0D5C298F-A5E8-F0BD-B4C8-E7CAA1AC5D29}"/>
-              </a:ext>
-            </a:extLst>
-          </p:cNvPr>
-          <p:cNvSpPr/>
-          <p:nvPr/>
-        </p:nvSpPr>
-        <p:spPr>
-          <a:xfrm>
-            <a:off x="3590553" y="6275122"/>
-            <a:ext cx="1284454" cy="179084"/>
-          </a:xfrm>
-          <a:prstGeom prst="rect">
-            <a:avLst/>
-          </a:prstGeom>
-          <a:solidFill>
-            <a:schemeClr val="tx1">
-              <a:lumMod val="75000"/>
-              <a:lumOff val="25000"/>
-            </a:schemeClr>
-          </a:solidFill>
-          <a:ln w="12700">
-            <a:noFill/>
-          </a:ln>
-        </p:spPr>
-        <p:style>
-          <a:lnRef idx="2">
-            <a:schemeClr val="accent1">
-              <a:shade val="15000"/>
-            </a:schemeClr>
-          </a:lnRef>
-          <a:fillRef idx="1">
-            <a:schemeClr val="accent1"/>
-          </a:fillRef>
-          <a:effectRef idx="0">
-            <a:schemeClr val="accent1"/>
-          </a:effectRef>
-          <a:fontRef idx="minor">
-            <a:schemeClr val="lt1"/>
-          </a:fontRef>
-        </p:style>
-        <p:txBody>
-          <a:bodyPr rtlCol="0" anchor="ctr"/>
-          <a:lstStyle/>
-          <a:p>
-            <a:pPr algn="ctr"/>
-            <a:r>
-              <a:rPr lang="en-US" sz="800" dirty="0" err="1">
-                <a:solidFill>
-                  <a:schemeClr val="bg1">
-                    <a:lumMod val="95000"/>
-                  </a:schemeClr>
-                </a:solidFill>
-              </a:rPr>
-              <a:t>size_gb</a:t>
-            </a:r>
-            <a:endParaRPr lang="en-US" sz="800" dirty="0">
-              <a:solidFill>
-                <a:schemeClr val="bg1">
-                  <a:lumMod val="95000"/>
-                </a:schemeClr>
-              </a:solidFill>
-            </a:endParaRPr>
-          </a:p>
-        </p:txBody>
-      </p:sp>
       <p:cxnSp>
         <p:nvCxnSpPr>
-          <p:cNvPr id="595" name="Straight Arrow Connector 594">
-            <a:extLst>
-              <a:ext uri="{FF2B5EF4-FFF2-40B4-BE49-F238E27FC236}">
-                <a16:creationId xmlns:a16="http://schemas.microsoft.com/office/drawing/2014/main" id="{754FB256-09B5-68DC-9D04-F59F1B824C08}"/>
+          <p:cNvPr id="596" name="Straight Arrow Connector 595">
+            <a:extLst>
+              <a:ext uri="{FF2B5EF4-FFF2-40B4-BE49-F238E27FC236}">
+                <a16:creationId xmlns:a16="http://schemas.microsoft.com/office/drawing/2014/main" id="{97499168-E7E0-8E82-CDFD-241287C1EADD}"/>
               </a:ext>
             </a:extLst>
           </p:cNvPr>
           <p:cNvCxnSpPr>
             <a:cxnSpLocks/>
-            <a:endCxn id="594" idx="1"/>
+            <a:endCxn id="1114" idx="1"/>
           </p:cNvCxnSpPr>
           <p:nvPr/>
         </p:nvCxnSpPr>
         <p:spPr>
           <a:xfrm>
-            <a:off x="3246630" y="6364664"/>
-            <a:ext cx="343923" cy="0"/>
+            <a:off x="3256174" y="6364664"/>
+            <a:ext cx="3676758" cy="0"/>
           </a:xfrm>
           <a:prstGeom prst="straightConnector1">
             <a:avLst/>
@@ -6619,24 +5262,22 @@
       </p:cxnSp>
       <p:cxnSp>
         <p:nvCxnSpPr>
-          <p:cNvPr id="596" name="Straight Arrow Connector 595">
-            <a:extLst>
-              <a:ext uri="{FF2B5EF4-FFF2-40B4-BE49-F238E27FC236}">
-                <a16:creationId xmlns:a16="http://schemas.microsoft.com/office/drawing/2014/main" id="{97499168-E7E0-8E82-CDFD-241287C1EADD}"/>
+          <p:cNvPr id="621" name="Straight Arrow Connector 620">
+            <a:extLst>
+              <a:ext uri="{FF2B5EF4-FFF2-40B4-BE49-F238E27FC236}">
+                <a16:creationId xmlns:a16="http://schemas.microsoft.com/office/drawing/2014/main" id="{5CDD27FB-F667-BC5C-BB75-50C4A3CA5D1A}"/>
               </a:ext>
             </a:extLst>
           </p:cNvPr>
           <p:cNvCxnSpPr>
             <a:cxnSpLocks/>
-            <a:stCxn id="594" idx="3"/>
-            <a:endCxn id="1114" idx="1"/>
           </p:cNvCxnSpPr>
           <p:nvPr/>
         </p:nvCxnSpPr>
         <p:spPr>
-          <a:xfrm>
-            <a:off x="4875007" y="6364664"/>
-            <a:ext cx="2057925" cy="0"/>
+          <a:xfrm flipH="1">
+            <a:off x="514728" y="5420325"/>
+            <a:ext cx="2005645" cy="0"/>
           </a:xfrm>
           <a:prstGeom prst="straightConnector1">
             <a:avLst/>
@@ -6665,23 +5306,22 @@
       </p:cxnSp>
       <p:cxnSp>
         <p:nvCxnSpPr>
-          <p:cNvPr id="621" name="Straight Arrow Connector 620">
-            <a:extLst>
-              <a:ext uri="{FF2B5EF4-FFF2-40B4-BE49-F238E27FC236}">
-                <a16:creationId xmlns:a16="http://schemas.microsoft.com/office/drawing/2014/main" id="{5CDD27FB-F667-BC5C-BB75-50C4A3CA5D1A}"/>
+          <p:cNvPr id="622" name="Straight Arrow Connector 621">
+            <a:extLst>
+              <a:ext uri="{FF2B5EF4-FFF2-40B4-BE49-F238E27FC236}">
+                <a16:creationId xmlns:a16="http://schemas.microsoft.com/office/drawing/2014/main" id="{41E5D8F3-E898-941D-BF29-7AB0A61CA132}"/>
               </a:ext>
             </a:extLst>
           </p:cNvPr>
           <p:cNvCxnSpPr>
             <a:cxnSpLocks/>
-            <a:endCxn id="25" idx="3"/>
           </p:cNvCxnSpPr>
           <p:nvPr/>
         </p:nvCxnSpPr>
         <p:spPr>
           <a:xfrm flipH="1">
-            <a:off x="2107630" y="5420325"/>
-            <a:ext cx="412743" cy="0"/>
+            <a:off x="514728" y="5152754"/>
+            <a:ext cx="1996101" cy="0"/>
           </a:xfrm>
           <a:prstGeom prst="straightConnector1">
             <a:avLst/>
@@ -6710,23 +5350,22 @@
       </p:cxnSp>
       <p:cxnSp>
         <p:nvCxnSpPr>
-          <p:cNvPr id="622" name="Straight Arrow Connector 621">
-            <a:extLst>
-              <a:ext uri="{FF2B5EF4-FFF2-40B4-BE49-F238E27FC236}">
-                <a16:creationId xmlns:a16="http://schemas.microsoft.com/office/drawing/2014/main" id="{41E5D8F3-E898-941D-BF29-7AB0A61CA132}"/>
+          <p:cNvPr id="623" name="Straight Arrow Connector 622">
+            <a:extLst>
+              <a:ext uri="{FF2B5EF4-FFF2-40B4-BE49-F238E27FC236}">
+                <a16:creationId xmlns:a16="http://schemas.microsoft.com/office/drawing/2014/main" id="{4BA845C5-DC4F-3E58-C66D-CA2D0F369895}"/>
               </a:ext>
             </a:extLst>
           </p:cNvPr>
           <p:cNvCxnSpPr>
             <a:cxnSpLocks/>
-            <a:endCxn id="23" idx="3"/>
           </p:cNvCxnSpPr>
           <p:nvPr/>
         </p:nvCxnSpPr>
         <p:spPr>
           <a:xfrm flipH="1">
-            <a:off x="2107630" y="5152754"/>
-            <a:ext cx="403199" cy="0"/>
+            <a:off x="514728" y="4881893"/>
+            <a:ext cx="2005644" cy="0"/>
           </a:xfrm>
           <a:prstGeom prst="straightConnector1">
             <a:avLst/>
@@ -6755,75 +5394,26 @@
       </p:cxnSp>
       <p:cxnSp>
         <p:nvCxnSpPr>
-          <p:cNvPr id="623" name="Straight Arrow Connector 622">
-            <a:extLst>
-              <a:ext uri="{FF2B5EF4-FFF2-40B4-BE49-F238E27FC236}">
-                <a16:creationId xmlns:a16="http://schemas.microsoft.com/office/drawing/2014/main" id="{4BA845C5-DC4F-3E58-C66D-CA2D0F369895}"/>
+          <p:cNvPr id="659" name="Connector: Elbow 658">
+            <a:extLst>
+              <a:ext uri="{FF2B5EF4-FFF2-40B4-BE49-F238E27FC236}">
+                <a16:creationId xmlns:a16="http://schemas.microsoft.com/office/drawing/2014/main" id="{C40A0251-9A11-6DCC-A81B-E1EEC7FC0D39}"/>
               </a:ext>
             </a:extLst>
           </p:cNvPr>
           <p:cNvCxnSpPr>
             <a:cxnSpLocks/>
-            <a:endCxn id="21" idx="3"/>
+            <a:stCxn id="28" idx="0"/>
           </p:cNvCxnSpPr>
           <p:nvPr/>
         </p:nvCxnSpPr>
         <p:spPr>
-          <a:xfrm flipH="1">
-            <a:off x="2107630" y="4881893"/>
-            <a:ext cx="412742" cy="0"/>
-          </a:xfrm>
-          <a:prstGeom prst="straightConnector1">
+          <a:xfrm rot="16200000" flipV="1">
+            <a:off x="5339060" y="1992786"/>
+            <a:ext cx="255032" cy="4439891"/>
+          </a:xfrm>
+          <a:prstGeom prst="bentConnector2">
             <a:avLst/>
-          </a:prstGeom>
-          <a:ln>
-            <a:solidFill>
-              <a:schemeClr val="accent5"/>
-            </a:solidFill>
-            <a:tailEnd type="triangle"/>
-          </a:ln>
-        </p:spPr>
-        <p:style>
-          <a:lnRef idx="2">
-            <a:schemeClr val="accent1"/>
-          </a:lnRef>
-          <a:fillRef idx="0">
-            <a:schemeClr val="accent1"/>
-          </a:fillRef>
-          <a:effectRef idx="1">
-            <a:schemeClr val="accent1"/>
-          </a:effectRef>
-          <a:fontRef idx="minor">
-            <a:schemeClr val="tx1"/>
-          </a:fontRef>
-        </p:style>
-      </p:cxnSp>
-      <p:cxnSp>
-        <p:nvCxnSpPr>
-          <p:cNvPr id="659" name="Connector: Elbow 658">
-            <a:extLst>
-              <a:ext uri="{FF2B5EF4-FFF2-40B4-BE49-F238E27FC236}">
-                <a16:creationId xmlns:a16="http://schemas.microsoft.com/office/drawing/2014/main" id="{C40A0251-9A11-6DCC-A81B-E1EEC7FC0D39}"/>
-              </a:ext>
-            </a:extLst>
-          </p:cNvPr>
-          <p:cNvCxnSpPr>
-            <a:cxnSpLocks/>
-            <a:stCxn id="569" idx="3"/>
-            <a:endCxn id="45" idx="0"/>
-          </p:cNvCxnSpPr>
-          <p:nvPr/>
-        </p:nvCxnSpPr>
-        <p:spPr>
-          <a:xfrm flipH="1" flipV="1">
-            <a:off x="2935171" y="387506"/>
-            <a:ext cx="8625299" cy="4013649"/>
-          </a:xfrm>
-          <a:prstGeom prst="bentConnector4">
-            <a:avLst>
-              <a:gd name="adj1" fmla="val -4125"/>
-              <a:gd name="adj2" fmla="val 105696"/>
-            </a:avLst>
           </a:prstGeom>
           <a:ln>
             <a:solidFill>
@@ -7000,14 +5590,13 @@
           </p:cNvPr>
           <p:cNvCxnSpPr>
             <a:cxnSpLocks/>
-            <a:stCxn id="230" idx="3"/>
           </p:cNvCxnSpPr>
           <p:nvPr/>
         </p:nvCxnSpPr>
         <p:spPr>
           <a:xfrm>
-            <a:off x="2107631" y="3103126"/>
-            <a:ext cx="403198" cy="0"/>
+            <a:off x="514728" y="3103126"/>
+            <a:ext cx="1996101" cy="0"/>
           </a:xfrm>
           <a:prstGeom prst="straightConnector1">
             <a:avLst/>
@@ -7045,14 +5634,13 @@
           </p:cNvPr>
           <p:cNvCxnSpPr>
             <a:cxnSpLocks/>
-            <a:stCxn id="231" idx="3"/>
           </p:cNvCxnSpPr>
           <p:nvPr/>
         </p:nvCxnSpPr>
         <p:spPr>
           <a:xfrm>
-            <a:off x="2107630" y="3376348"/>
-            <a:ext cx="403199" cy="0"/>
+            <a:off x="514728" y="3376348"/>
+            <a:ext cx="1996101" cy="0"/>
           </a:xfrm>
           <a:prstGeom prst="straightConnector1">
             <a:avLst/>
@@ -7090,14 +5678,13 @@
           </p:cNvPr>
           <p:cNvCxnSpPr>
             <a:cxnSpLocks/>
-            <a:stCxn id="232" idx="3"/>
           </p:cNvCxnSpPr>
           <p:nvPr/>
         </p:nvCxnSpPr>
         <p:spPr>
           <a:xfrm>
-            <a:off x="2107630" y="3641558"/>
-            <a:ext cx="403199" cy="0"/>
+            <a:off x="514728" y="3641558"/>
+            <a:ext cx="1996101" cy="0"/>
           </a:xfrm>
           <a:prstGeom prst="straightConnector1">
             <a:avLst/>
@@ -7135,14 +5722,13 @@
           </p:cNvPr>
           <p:cNvCxnSpPr>
             <a:cxnSpLocks/>
-            <a:stCxn id="242" idx="3"/>
           </p:cNvCxnSpPr>
           <p:nvPr/>
         </p:nvCxnSpPr>
         <p:spPr>
           <a:xfrm>
-            <a:off x="2107630" y="3906768"/>
-            <a:ext cx="403199" cy="0"/>
+            <a:off x="514728" y="3906768"/>
+            <a:ext cx="1996101" cy="0"/>
           </a:xfrm>
           <a:prstGeom prst="straightConnector1">
             <a:avLst/>
@@ -7180,14 +5766,13 @@
           </p:cNvPr>
           <p:cNvCxnSpPr>
             <a:cxnSpLocks/>
-            <a:stCxn id="14" idx="3"/>
           </p:cNvCxnSpPr>
           <p:nvPr/>
         </p:nvCxnSpPr>
         <p:spPr>
           <a:xfrm>
-            <a:off x="2107630" y="4169068"/>
-            <a:ext cx="403199" cy="0"/>
+            <a:off x="514728" y="4169068"/>
+            <a:ext cx="1996101" cy="0"/>
           </a:xfrm>
           <a:prstGeom prst="straightConnector1">
             <a:avLst/>
@@ -7225,19 +5810,18 @@
           </p:cNvPr>
           <p:cNvCxnSpPr>
             <a:cxnSpLocks/>
-            <a:stCxn id="12" idx="3"/>
             <a:endCxn id="759" idx="1"/>
           </p:cNvCxnSpPr>
           <p:nvPr/>
         </p:nvCxnSpPr>
         <p:spPr>
           <a:xfrm flipV="1">
-            <a:off x="4873963" y="1127501"/>
-            <a:ext cx="2929055" cy="409752"/>
+            <a:off x="3254078" y="1127501"/>
+            <a:ext cx="4548940" cy="405983"/>
           </a:xfrm>
           <a:prstGeom prst="bentConnector3">
             <a:avLst>
-              <a:gd name="adj1" fmla="val 50207"/>
+              <a:gd name="adj1" fmla="val 50000"/>
             </a:avLst>
           </a:prstGeom>
           <a:ln>
@@ -7344,14 +5928,15 @@
           </p:cNvPr>
           <p:cNvCxnSpPr>
             <a:cxnSpLocks/>
+            <a:stCxn id="37" idx="3"/>
             <a:endCxn id="531" idx="1"/>
           </p:cNvCxnSpPr>
           <p:nvPr/>
         </p:nvCxnSpPr>
         <p:spPr>
           <a:xfrm>
-            <a:off x="9093140" y="1033178"/>
-            <a:ext cx="1178420" cy="17120"/>
+            <a:off x="9085692" y="1045779"/>
+            <a:ext cx="1185868" cy="4519"/>
           </a:xfrm>
           <a:prstGeom prst="bentConnector3">
             <a:avLst>
@@ -7362,7 +5947,7 @@
             <a:solidFill>
               <a:schemeClr val="accent5"/>
             </a:solidFill>
-            <a:tailEnd type="triangle"/>
+            <a:tailEnd type="none"/>
           </a:ln>
         </p:spPr>
         <p:style>
@@ -7391,14 +5976,15 @@
           </p:cNvPr>
           <p:cNvCxnSpPr>
             <a:cxnSpLocks/>
+            <a:stCxn id="37" idx="3"/>
             <a:endCxn id="530" idx="1"/>
           </p:cNvCxnSpPr>
           <p:nvPr/>
         </p:nvCxnSpPr>
         <p:spPr>
           <a:xfrm flipV="1">
-            <a:off x="9093140" y="562790"/>
-            <a:ext cx="1178419" cy="470388"/>
+            <a:off x="9085692" y="562790"/>
+            <a:ext cx="1185867" cy="482989"/>
           </a:xfrm>
           <a:prstGeom prst="bentConnector3">
             <a:avLst>
@@ -7409,7 +5995,7 @@
             <a:solidFill>
               <a:schemeClr val="accent5"/>
             </a:solidFill>
-            <a:tailEnd type="triangle"/>
+            <a:tailEnd type="none"/>
           </a:ln>
         </p:spPr>
         <p:style>
@@ -7438,14 +6024,15 @@
           </p:cNvPr>
           <p:cNvCxnSpPr>
             <a:cxnSpLocks/>
+            <a:stCxn id="37" idx="3"/>
             <a:endCxn id="529" idx="1"/>
           </p:cNvCxnSpPr>
           <p:nvPr/>
         </p:nvCxnSpPr>
         <p:spPr>
           <a:xfrm flipV="1">
-            <a:off x="9093140" y="813217"/>
-            <a:ext cx="1182876" cy="219961"/>
+            <a:off x="9085692" y="813217"/>
+            <a:ext cx="1190324" cy="232562"/>
           </a:xfrm>
           <a:prstGeom prst="bentConnector3">
             <a:avLst>
@@ -7456,7 +6043,7 @@
             <a:solidFill>
               <a:schemeClr val="accent5"/>
             </a:solidFill>
-            <a:tailEnd type="triangle"/>
+            <a:tailEnd type="none"/>
           </a:ln>
         </p:spPr>
         <p:style>
@@ -7717,77 +6304,6 @@
               </a:rPr>
               <a:t>(+ inbound/outbound rules)</a:t>
             </a:r>
-          </a:p>
-        </p:txBody>
-      </p:sp>
-      <p:sp>
-        <p:nvSpPr>
-          <p:cNvPr id="313" name="Rectangle 312">
-            <a:extLst>
-              <a:ext uri="{FF2B5EF4-FFF2-40B4-BE49-F238E27FC236}">
-                <a16:creationId xmlns:a16="http://schemas.microsoft.com/office/drawing/2014/main" id="{A334EE5C-69EC-507B-791D-8464810D84DC}"/>
-              </a:ext>
-            </a:extLst>
-          </p:cNvPr>
-          <p:cNvSpPr/>
-          <p:nvPr/>
-        </p:nvSpPr>
-        <p:spPr>
-          <a:xfrm>
-            <a:off x="3593831" y="2308822"/>
-            <a:ext cx="1284454" cy="179084"/>
-          </a:xfrm>
-          <a:prstGeom prst="rect">
-            <a:avLst/>
-          </a:prstGeom>
-          <a:solidFill>
-            <a:schemeClr val="tx1">
-              <a:lumMod val="75000"/>
-              <a:lumOff val="25000"/>
-            </a:schemeClr>
-          </a:solidFill>
-          <a:ln w="12700">
-            <a:noFill/>
-          </a:ln>
-        </p:spPr>
-        <p:style>
-          <a:lnRef idx="2">
-            <a:schemeClr val="accent1">
-              <a:shade val="15000"/>
-            </a:schemeClr>
-          </a:lnRef>
-          <a:fillRef idx="1">
-            <a:schemeClr val="accent1"/>
-          </a:fillRef>
-          <a:effectRef idx="0">
-            <a:schemeClr val="accent1"/>
-          </a:effectRef>
-          <a:fontRef idx="minor">
-            <a:schemeClr val="lt1"/>
-          </a:fontRef>
-        </p:style>
-        <p:txBody>
-          <a:bodyPr rtlCol="0" anchor="ctr"/>
-          <a:lstStyle/>
-          <a:p>
-            <a:pPr algn="ctr"/>
-            <a:r>
-              <a:rPr lang="en-US" sz="800" dirty="0" err="1">
-                <a:solidFill>
-                  <a:schemeClr val="bg1">
-                    <a:lumMod val="95000"/>
-                  </a:schemeClr>
-                </a:solidFill>
-              </a:rPr>
-              <a:t>vpc_id</a:t>
-            </a:r>
-            <a:endParaRPr lang="en-US" sz="800" dirty="0">
-              <a:solidFill>
-                <a:schemeClr val="bg1">
-                  <a:lumMod val="95000"/>
-                </a:schemeClr>
-              </a:solidFill>
-            </a:endParaRPr>
           </a:p>
         </p:txBody>
       </p:sp>
@@ -7951,59 +6467,13 @@
           <p:cNvCxnSpPr>
             <a:cxnSpLocks/>
             <a:stCxn id="886" idx="1"/>
-            <a:endCxn id="313" idx="3"/>
           </p:cNvCxnSpPr>
           <p:nvPr/>
         </p:nvCxnSpPr>
         <p:spPr>
           <a:xfrm flipH="1">
-            <a:off x="4878285" y="2392043"/>
-            <a:ext cx="522174" cy="6321"/>
-          </a:xfrm>
-          <a:prstGeom prst="straightConnector1">
-            <a:avLst/>
-          </a:prstGeom>
-          <a:ln>
-            <a:solidFill>
-              <a:schemeClr val="accent5"/>
-            </a:solidFill>
-            <a:tailEnd type="triangle"/>
-          </a:ln>
-        </p:spPr>
-        <p:style>
-          <a:lnRef idx="2">
-            <a:schemeClr val="accent1"/>
-          </a:lnRef>
-          <a:fillRef idx="0">
-            <a:schemeClr val="accent1"/>
-          </a:fillRef>
-          <a:effectRef idx="1">
-            <a:schemeClr val="accent1"/>
-          </a:effectRef>
-          <a:fontRef idx="minor">
-            <a:schemeClr val="tx1"/>
-          </a:fontRef>
-        </p:style>
-      </p:cxnSp>
-      <p:cxnSp>
-        <p:nvCxnSpPr>
-          <p:cNvPr id="1050" name="Straight Arrow Connector 1049">
-            <a:extLst>
-              <a:ext uri="{FF2B5EF4-FFF2-40B4-BE49-F238E27FC236}">
-                <a16:creationId xmlns:a16="http://schemas.microsoft.com/office/drawing/2014/main" id="{7AAB9622-AAC0-CDFC-871D-0DBFBE3CD272}"/>
-              </a:ext>
-            </a:extLst>
-          </p:cNvPr>
-          <p:cNvCxnSpPr>
-            <a:cxnSpLocks/>
-            <a:stCxn id="314" idx="1"/>
-          </p:cNvCxnSpPr>
-          <p:nvPr/>
-        </p:nvCxnSpPr>
-        <p:spPr>
-          <a:xfrm flipH="1">
-            <a:off x="3256174" y="3287360"/>
-            <a:ext cx="337657" cy="0"/>
+            <a:off x="3246630" y="2392043"/>
+            <a:ext cx="2153829" cy="0"/>
           </a:xfrm>
           <a:prstGeom prst="straightConnector1">
             <a:avLst/>
@@ -8197,7 +6667,7 @@
         </p:nvSpPr>
         <p:spPr>
           <a:xfrm>
-            <a:off x="7386417" y="4236970"/>
+            <a:off x="7386417" y="4340248"/>
             <a:ext cx="1282674" cy="336608"/>
           </a:xfrm>
           <a:prstGeom prst="rect">
@@ -8268,7 +6738,7 @@
         </p:nvSpPr>
         <p:spPr>
           <a:xfrm>
-            <a:off x="5643335" y="4245098"/>
+            <a:off x="5643335" y="4348376"/>
             <a:ext cx="1289324" cy="313932"/>
           </a:xfrm>
           <a:prstGeom prst="flowChartMagneticDisk">
@@ -8343,7 +6813,7 @@
         </p:nvCxnSpPr>
         <p:spPr>
           <a:xfrm flipH="1" flipV="1">
-            <a:off x="6932659" y="4402064"/>
+            <a:off x="6932659" y="4505342"/>
             <a:ext cx="453758" cy="3210"/>
           </a:xfrm>
           <a:prstGeom prst="straightConnector1">
@@ -8383,20 +6853,17 @@
           </p:cNvPr>
           <p:cNvCxnSpPr>
             <a:cxnSpLocks/>
-            <a:stCxn id="1068" idx="3"/>
-            <a:endCxn id="569" idx="1"/>
+            <a:endCxn id="1068" idx="2"/>
           </p:cNvCxnSpPr>
           <p:nvPr/>
         </p:nvCxnSpPr>
         <p:spPr>
           <a:xfrm flipV="1">
-            <a:off x="8669091" y="4401155"/>
-            <a:ext cx="1606925" cy="4119"/>
-          </a:xfrm>
-          <a:prstGeom prst="bentConnector3">
-            <a:avLst>
-              <a:gd name="adj1" fmla="val 50000"/>
-            </a:avLst>
+            <a:off x="3246630" y="4676856"/>
+            <a:ext cx="4781124" cy="341154"/>
+          </a:xfrm>
+          <a:prstGeom prst="bentConnector2">
+            <a:avLst/>
           </a:prstGeom>
           <a:ln>
             <a:solidFill>
@@ -8437,9 +6904,9 @@
           <p:nvPr/>
         </p:nvCxnSpPr>
         <p:spPr>
-          <a:xfrm>
-            <a:off x="8669091" y="4405274"/>
-            <a:ext cx="1602469" cy="232962"/>
+          <a:xfrm flipV="1">
+            <a:off x="8669091" y="4392609"/>
+            <a:ext cx="1602469" cy="115943"/>
           </a:xfrm>
           <a:prstGeom prst="bentConnector3">
             <a:avLst>
@@ -8450,7 +6917,7 @@
             <a:solidFill>
               <a:schemeClr val="accent5"/>
             </a:solidFill>
-            <a:tailEnd type="triangle"/>
+            <a:tailEnd type="none"/>
           </a:ln>
         </p:spPr>
         <p:style>
@@ -8486,8 +6953,8 @@
         </p:nvCxnSpPr>
         <p:spPr>
           <a:xfrm>
-            <a:off x="8669091" y="4405274"/>
-            <a:ext cx="1602468" cy="478589"/>
+            <a:off x="8669091" y="4508552"/>
+            <a:ext cx="1602468" cy="129684"/>
           </a:xfrm>
           <a:prstGeom prst="bentConnector3">
             <a:avLst>
@@ -8498,7 +6965,7 @@
             <a:solidFill>
               <a:schemeClr val="accent5"/>
             </a:solidFill>
-            <a:tailEnd type="triangle"/>
+            <a:tailEnd type="none"/>
           </a:ln>
         </p:spPr>
         <p:style>
@@ -8516,148 +6983,6 @@
           </a:fontRef>
         </p:style>
       </p:cxnSp>
-      <p:sp>
-        <p:nvSpPr>
-          <p:cNvPr id="1098" name="Rectangle 1097">
-            <a:extLst>
-              <a:ext uri="{FF2B5EF4-FFF2-40B4-BE49-F238E27FC236}">
-                <a16:creationId xmlns:a16="http://schemas.microsoft.com/office/drawing/2014/main" id="{B28537BD-978A-091E-87D0-BEBC5DB9D099}"/>
-              </a:ext>
-            </a:extLst>
-          </p:cNvPr>
-          <p:cNvSpPr/>
-          <p:nvPr/>
-        </p:nvSpPr>
-        <p:spPr>
-          <a:xfrm>
-            <a:off x="3589510" y="5595538"/>
-            <a:ext cx="1284454" cy="179084"/>
-          </a:xfrm>
-          <a:prstGeom prst="rect">
-            <a:avLst/>
-          </a:prstGeom>
-          <a:solidFill>
-            <a:schemeClr val="tx1">
-              <a:lumMod val="75000"/>
-              <a:lumOff val="25000"/>
-            </a:schemeClr>
-          </a:solidFill>
-          <a:ln w="12700">
-            <a:noFill/>
-          </a:ln>
-        </p:spPr>
-        <p:style>
-          <a:lnRef idx="2">
-            <a:schemeClr val="accent1">
-              <a:shade val="15000"/>
-            </a:schemeClr>
-          </a:lnRef>
-          <a:fillRef idx="1">
-            <a:schemeClr val="accent1"/>
-          </a:fillRef>
-          <a:effectRef idx="0">
-            <a:schemeClr val="accent1"/>
-          </a:effectRef>
-          <a:fontRef idx="minor">
-            <a:schemeClr val="lt1"/>
-          </a:fontRef>
-        </p:style>
-        <p:txBody>
-          <a:bodyPr rtlCol="0" anchor="ctr"/>
-          <a:lstStyle/>
-          <a:p>
-            <a:pPr algn="ctr"/>
-            <a:r>
-              <a:rPr lang="en-US" sz="800" dirty="0" err="1">
-                <a:solidFill>
-                  <a:schemeClr val="bg1">
-                    <a:lumMod val="95000"/>
-                  </a:schemeClr>
-                </a:solidFill>
-              </a:rPr>
-              <a:t>availability_zone</a:t>
-            </a:r>
-            <a:endParaRPr lang="en-US" sz="800" dirty="0">
-              <a:solidFill>
-                <a:schemeClr val="bg1">
-                  <a:lumMod val="95000"/>
-                </a:schemeClr>
-              </a:solidFill>
-            </a:endParaRPr>
-          </a:p>
-        </p:txBody>
-      </p:sp>
-      <p:sp>
-        <p:nvSpPr>
-          <p:cNvPr id="1100" name="Rectangle 1099">
-            <a:extLst>
-              <a:ext uri="{FF2B5EF4-FFF2-40B4-BE49-F238E27FC236}">
-                <a16:creationId xmlns:a16="http://schemas.microsoft.com/office/drawing/2014/main" id="{4DAE9D58-11D1-4D9F-CDA2-42D721240204}"/>
-              </a:ext>
-            </a:extLst>
-          </p:cNvPr>
-          <p:cNvSpPr/>
-          <p:nvPr/>
-        </p:nvSpPr>
-        <p:spPr>
-          <a:xfrm>
-            <a:off x="3589509" y="5841165"/>
-            <a:ext cx="1284454" cy="179084"/>
-          </a:xfrm>
-          <a:prstGeom prst="rect">
-            <a:avLst/>
-          </a:prstGeom>
-          <a:solidFill>
-            <a:schemeClr val="tx1">
-              <a:lumMod val="75000"/>
-              <a:lumOff val="25000"/>
-            </a:schemeClr>
-          </a:solidFill>
-          <a:ln w="12700">
-            <a:noFill/>
-          </a:ln>
-        </p:spPr>
-        <p:style>
-          <a:lnRef idx="2">
-            <a:schemeClr val="accent1">
-              <a:shade val="15000"/>
-            </a:schemeClr>
-          </a:lnRef>
-          <a:fillRef idx="1">
-            <a:schemeClr val="accent1"/>
-          </a:fillRef>
-          <a:effectRef idx="0">
-            <a:schemeClr val="accent1"/>
-          </a:effectRef>
-          <a:fontRef idx="minor">
-            <a:schemeClr val="lt1"/>
-          </a:fontRef>
-        </p:style>
-        <p:txBody>
-          <a:bodyPr rtlCol="0" anchor="ctr"/>
-          <a:lstStyle/>
-          <a:p>
-            <a:pPr algn="ctr"/>
-            <a:r>
-              <a:rPr lang="en-US" sz="800" dirty="0" err="1">
-                <a:solidFill>
-                  <a:schemeClr val="bg1">
-                    <a:lumMod val="95000"/>
-                  </a:schemeClr>
-                </a:solidFill>
-              </a:rPr>
-              <a:t>volume_id</a:t>
-            </a:r>
-            <a:endParaRPr lang="en-US" sz="800" dirty="0">
-              <a:solidFill>
-                <a:schemeClr val="bg1">
-                  <a:lumMod val="95000"/>
-                </a:schemeClr>
-              </a:solidFill>
-            </a:endParaRPr>
-          </a:p>
-        </p:txBody>
-      </p:sp>
       <p:sp>
         <p:nvSpPr>
           <p:cNvPr id="1114" name="Rectangle 1113">
@@ -8752,14 +7077,13 @@
           <p:cNvCxnSpPr>
             <a:cxnSpLocks/>
             <a:stCxn id="1114" idx="0"/>
-            <a:endCxn id="1098" idx="3"/>
           </p:cNvCxnSpPr>
           <p:nvPr/>
         </p:nvCxnSpPr>
         <p:spPr>
           <a:xfrm rot="16200000" flipV="1">
-            <a:off x="5993007" y="4566037"/>
-            <a:ext cx="511280" cy="2749366"/>
+            <a:off x="5178045" y="3751075"/>
+            <a:ext cx="513870" cy="4376700"/>
           </a:xfrm>
           <a:prstGeom prst="bentConnector2">
             <a:avLst/>
@@ -8798,14 +7122,13 @@
           <p:cNvCxnSpPr>
             <a:cxnSpLocks/>
             <a:stCxn id="1114" idx="0"/>
-            <a:endCxn id="1100" idx="3"/>
           </p:cNvCxnSpPr>
           <p:nvPr/>
         </p:nvCxnSpPr>
         <p:spPr>
           <a:xfrm rot="16200000" flipV="1">
-            <a:off x="6115821" y="4688850"/>
-            <a:ext cx="265653" cy="2749367"/>
+            <a:off x="5312344" y="3885374"/>
+            <a:ext cx="254816" cy="4367156"/>
           </a:xfrm>
           <a:prstGeom prst="bentConnector2">
             <a:avLst/>
@@ -8895,96 +7218,6 @@
           </a:p>
         </p:txBody>
       </p:sp>
-      <p:cxnSp>
-        <p:nvCxnSpPr>
-          <p:cNvPr id="1187" name="Straight Arrow Connector 1186">
-            <a:extLst>
-              <a:ext uri="{FF2B5EF4-FFF2-40B4-BE49-F238E27FC236}">
-                <a16:creationId xmlns:a16="http://schemas.microsoft.com/office/drawing/2014/main" id="{3EBEF6CD-B0F6-429A-24D6-334586D70138}"/>
-              </a:ext>
-            </a:extLst>
-          </p:cNvPr>
-          <p:cNvCxnSpPr>
-            <a:cxnSpLocks/>
-            <a:stCxn id="1098" idx="1"/>
-          </p:cNvCxnSpPr>
-          <p:nvPr/>
-        </p:nvCxnSpPr>
-        <p:spPr>
-          <a:xfrm flipH="1">
-            <a:off x="3246630" y="5685080"/>
-            <a:ext cx="342880" cy="0"/>
-          </a:xfrm>
-          <a:prstGeom prst="straightConnector1">
-            <a:avLst/>
-          </a:prstGeom>
-          <a:ln>
-            <a:solidFill>
-              <a:schemeClr val="accent5"/>
-            </a:solidFill>
-            <a:tailEnd type="triangle"/>
-          </a:ln>
-        </p:spPr>
-        <p:style>
-          <a:lnRef idx="2">
-            <a:schemeClr val="accent1"/>
-          </a:lnRef>
-          <a:fillRef idx="0">
-            <a:schemeClr val="accent1"/>
-          </a:fillRef>
-          <a:effectRef idx="1">
-            <a:schemeClr val="accent1"/>
-          </a:effectRef>
-          <a:fontRef idx="minor">
-            <a:schemeClr val="tx1"/>
-          </a:fontRef>
-        </p:style>
-      </p:cxnSp>
-      <p:cxnSp>
-        <p:nvCxnSpPr>
-          <p:cNvPr id="1190" name="Straight Arrow Connector 1189">
-            <a:extLst>
-              <a:ext uri="{FF2B5EF4-FFF2-40B4-BE49-F238E27FC236}">
-                <a16:creationId xmlns:a16="http://schemas.microsoft.com/office/drawing/2014/main" id="{1C81E520-B9DF-C7D2-E19A-51DF43D2E277}"/>
-              </a:ext>
-            </a:extLst>
-          </p:cNvPr>
-          <p:cNvCxnSpPr>
-            <a:cxnSpLocks/>
-            <a:stCxn id="1100" idx="1"/>
-          </p:cNvCxnSpPr>
-          <p:nvPr/>
-        </p:nvCxnSpPr>
-        <p:spPr>
-          <a:xfrm flipH="1">
-            <a:off x="3246630" y="5930707"/>
-            <a:ext cx="342879" cy="0"/>
-          </a:xfrm>
-          <a:prstGeom prst="straightConnector1">
-            <a:avLst/>
-          </a:prstGeom>
-          <a:ln>
-            <a:solidFill>
-              <a:schemeClr val="accent5"/>
-            </a:solidFill>
-            <a:tailEnd type="triangle"/>
-          </a:ln>
-        </p:spPr>
-        <p:style>
-          <a:lnRef idx="2">
-            <a:schemeClr val="accent1"/>
-          </a:lnRef>
-          <a:fillRef idx="0">
-            <a:schemeClr val="accent1"/>
-          </a:fillRef>
-          <a:effectRef idx="1">
-            <a:schemeClr val="accent1"/>
-          </a:effectRef>
-          <a:fontRef idx="minor">
-            <a:schemeClr val="tx1"/>
-          </a:fontRef>
-        </p:style>
-      </p:cxnSp>
       <p:sp>
         <p:nvSpPr>
           <p:cNvPr id="1214" name="Cube 1213">
@@ -10234,6 +8467,1425 @@
           </a:fontRef>
         </p:style>
       </p:cxnSp>
+      <p:sp>
+        <p:nvSpPr>
+          <p:cNvPr id="551" name="Rectangle 550">
+            <a:extLst>
+              <a:ext uri="{FF2B5EF4-FFF2-40B4-BE49-F238E27FC236}">
+                <a16:creationId xmlns:a16="http://schemas.microsoft.com/office/drawing/2014/main" id="{3313E321-9ACF-07D2-495C-74321F31B59F}"/>
+              </a:ext>
+            </a:extLst>
+          </p:cNvPr>
+          <p:cNvSpPr/>
+          <p:nvPr/>
+        </p:nvSpPr>
+        <p:spPr>
+          <a:xfrm>
+            <a:off x="3590553" y="4941087"/>
+            <a:ext cx="1284454" cy="179084"/>
+          </a:xfrm>
+          <a:prstGeom prst="rect">
+            <a:avLst/>
+          </a:prstGeom>
+          <a:solidFill>
+            <a:schemeClr val="tx1">
+              <a:lumMod val="75000"/>
+              <a:lumOff val="25000"/>
+            </a:schemeClr>
+          </a:solidFill>
+          <a:ln w="12700">
+            <a:noFill/>
+          </a:ln>
+        </p:spPr>
+        <p:style>
+          <a:lnRef idx="2">
+            <a:schemeClr val="accent1">
+              <a:shade val="15000"/>
+            </a:schemeClr>
+          </a:lnRef>
+          <a:fillRef idx="1">
+            <a:schemeClr val="accent1"/>
+          </a:fillRef>
+          <a:effectRef idx="0">
+            <a:schemeClr val="accent1"/>
+          </a:effectRef>
+          <a:fontRef idx="minor">
+            <a:schemeClr val="lt1"/>
+          </a:fontRef>
+        </p:style>
+        <p:txBody>
+          <a:bodyPr rtlCol="0" anchor="ctr"/>
+          <a:lstStyle/>
+          <a:p>
+            <a:pPr algn="ctr"/>
+            <a:r>
+              <a:rPr lang="en-US" sz="800" dirty="0" err="1">
+                <a:solidFill>
+                  <a:schemeClr val="bg1">
+                    <a:lumMod val="95000"/>
+                  </a:schemeClr>
+                </a:solidFill>
+              </a:rPr>
+              <a:t>user_data</a:t>
+            </a:r>
+            <a:endParaRPr lang="en-US" sz="800" dirty="0">
+              <a:solidFill>
+                <a:schemeClr val="bg1">
+                  <a:lumMod val="95000"/>
+                </a:schemeClr>
+              </a:solidFill>
+            </a:endParaRPr>
+          </a:p>
+        </p:txBody>
+      </p:sp>
+      <p:sp>
+        <p:nvSpPr>
+          <p:cNvPr id="28" name="Rectangle 27">
+            <a:extLst>
+              <a:ext uri="{FF2B5EF4-FFF2-40B4-BE49-F238E27FC236}">
+                <a16:creationId xmlns:a16="http://schemas.microsoft.com/office/drawing/2014/main" id="{A6E64F60-8303-2B65-7AC4-333E85F76D59}"/>
+              </a:ext>
+            </a:extLst>
+          </p:cNvPr>
+          <p:cNvSpPr/>
+          <p:nvPr/>
+        </p:nvSpPr>
+        <p:spPr>
+          <a:xfrm>
+            <a:off x="7576578" y="4340248"/>
+            <a:ext cx="219885" cy="63885"/>
+          </a:xfrm>
+          <a:prstGeom prst="rect">
+            <a:avLst/>
+          </a:prstGeom>
+          <a:solidFill>
+            <a:schemeClr val="accent1">
+              <a:alpha val="0"/>
+            </a:schemeClr>
+          </a:solidFill>
+          <a:ln>
+            <a:noFill/>
+          </a:ln>
+        </p:spPr>
+        <p:style>
+          <a:lnRef idx="2">
+            <a:schemeClr val="accent1">
+              <a:shade val="15000"/>
+            </a:schemeClr>
+          </a:lnRef>
+          <a:fillRef idx="1">
+            <a:schemeClr val="accent1"/>
+          </a:fillRef>
+          <a:effectRef idx="0">
+            <a:schemeClr val="accent1"/>
+          </a:effectRef>
+          <a:fontRef idx="minor">
+            <a:schemeClr val="lt1"/>
+          </a:fontRef>
+        </p:style>
+        <p:txBody>
+          <a:bodyPr rtlCol="0" anchor="ctr"/>
+          <a:lstStyle/>
+          <a:p>
+            <a:pPr algn="ctr"/>
+            <a:endParaRPr lang="en-US"/>
+          </a:p>
+        </p:txBody>
+      </p:sp>
+      <p:sp>
+        <p:nvSpPr>
+          <p:cNvPr id="569" name="Rectangle 568">
+            <a:extLst>
+              <a:ext uri="{FF2B5EF4-FFF2-40B4-BE49-F238E27FC236}">
+                <a16:creationId xmlns:a16="http://schemas.microsoft.com/office/drawing/2014/main" id="{03C20564-25E5-C23D-DB92-1AE24BA67D9D}"/>
+              </a:ext>
+            </a:extLst>
+          </p:cNvPr>
+          <p:cNvSpPr/>
+          <p:nvPr/>
+        </p:nvSpPr>
+        <p:spPr>
+          <a:xfrm>
+            <a:off x="3593831" y="3993158"/>
+            <a:ext cx="1284454" cy="179084"/>
+          </a:xfrm>
+          <a:prstGeom prst="rect">
+            <a:avLst/>
+          </a:prstGeom>
+          <a:solidFill>
+            <a:schemeClr val="tx1">
+              <a:lumMod val="75000"/>
+              <a:lumOff val="25000"/>
+            </a:schemeClr>
+          </a:solidFill>
+          <a:ln w="12700">
+            <a:noFill/>
+          </a:ln>
+        </p:spPr>
+        <p:style>
+          <a:lnRef idx="2">
+            <a:schemeClr val="accent1">
+              <a:shade val="15000"/>
+            </a:schemeClr>
+          </a:lnRef>
+          <a:fillRef idx="1">
+            <a:schemeClr val="accent1"/>
+          </a:fillRef>
+          <a:effectRef idx="0">
+            <a:schemeClr val="accent1"/>
+          </a:effectRef>
+          <a:fontRef idx="minor">
+            <a:schemeClr val="lt1"/>
+          </a:fontRef>
+        </p:style>
+        <p:txBody>
+          <a:bodyPr rtlCol="0" anchor="ctr"/>
+          <a:lstStyle/>
+          <a:p>
+            <a:pPr algn="ctr"/>
+            <a:r>
+              <a:rPr lang="en-US" sz="800" dirty="0" err="1">
+                <a:solidFill>
+                  <a:schemeClr val="bg1">
+                    <a:lumMod val="95000"/>
+                  </a:schemeClr>
+                </a:solidFill>
+              </a:rPr>
+              <a:t>public_ip</a:t>
+            </a:r>
+            <a:endParaRPr lang="en-US" sz="800" dirty="0">
+              <a:solidFill>
+                <a:schemeClr val="bg1">
+                  <a:lumMod val="95000"/>
+                </a:schemeClr>
+              </a:solidFill>
+            </a:endParaRPr>
+          </a:p>
+        </p:txBody>
+      </p:sp>
+      <p:sp>
+        <p:nvSpPr>
+          <p:cNvPr id="33" name="Rectangle 32">
+            <a:extLst>
+              <a:ext uri="{FF2B5EF4-FFF2-40B4-BE49-F238E27FC236}">
+                <a16:creationId xmlns:a16="http://schemas.microsoft.com/office/drawing/2014/main" id="{8616F4A3-2A59-E598-F055-A119CC4BE4B8}"/>
+              </a:ext>
+            </a:extLst>
+          </p:cNvPr>
+          <p:cNvSpPr/>
+          <p:nvPr/>
+        </p:nvSpPr>
+        <p:spPr>
+          <a:xfrm>
+            <a:off x="8193055" y="4340248"/>
+            <a:ext cx="219885" cy="89542"/>
+          </a:xfrm>
+          <a:prstGeom prst="rect">
+            <a:avLst/>
+          </a:prstGeom>
+          <a:solidFill>
+            <a:schemeClr val="accent1">
+              <a:alpha val="0"/>
+            </a:schemeClr>
+          </a:solidFill>
+          <a:ln>
+            <a:noFill/>
+          </a:ln>
+        </p:spPr>
+        <p:style>
+          <a:lnRef idx="2">
+            <a:schemeClr val="accent1">
+              <a:shade val="15000"/>
+            </a:schemeClr>
+          </a:lnRef>
+          <a:fillRef idx="1">
+            <a:schemeClr val="accent1"/>
+          </a:fillRef>
+          <a:effectRef idx="0">
+            <a:schemeClr val="accent1"/>
+          </a:effectRef>
+          <a:fontRef idx="minor">
+            <a:schemeClr val="lt1"/>
+          </a:fontRef>
+        </p:style>
+        <p:txBody>
+          <a:bodyPr rtlCol="0" anchor="ctr"/>
+          <a:lstStyle/>
+          <a:p>
+            <a:pPr algn="ctr"/>
+            <a:endParaRPr lang="en-US"/>
+          </a:p>
+        </p:txBody>
+      </p:sp>
+      <p:sp>
+        <p:nvSpPr>
+          <p:cNvPr id="594" name="Rectangle 593">
+            <a:extLst>
+              <a:ext uri="{FF2B5EF4-FFF2-40B4-BE49-F238E27FC236}">
+                <a16:creationId xmlns:a16="http://schemas.microsoft.com/office/drawing/2014/main" id="{0D5C298F-A5E8-F0BD-B4C8-E7CAA1AC5D29}"/>
+              </a:ext>
+            </a:extLst>
+          </p:cNvPr>
+          <p:cNvSpPr/>
+          <p:nvPr/>
+        </p:nvSpPr>
+        <p:spPr>
+          <a:xfrm>
+            <a:off x="3590553" y="6275122"/>
+            <a:ext cx="1284454" cy="179084"/>
+          </a:xfrm>
+          <a:prstGeom prst="rect">
+            <a:avLst/>
+          </a:prstGeom>
+          <a:solidFill>
+            <a:schemeClr val="tx1">
+              <a:lumMod val="75000"/>
+              <a:lumOff val="25000"/>
+            </a:schemeClr>
+          </a:solidFill>
+          <a:ln w="12700">
+            <a:noFill/>
+          </a:ln>
+        </p:spPr>
+        <p:style>
+          <a:lnRef idx="2">
+            <a:schemeClr val="accent1">
+              <a:shade val="15000"/>
+            </a:schemeClr>
+          </a:lnRef>
+          <a:fillRef idx="1">
+            <a:schemeClr val="accent1"/>
+          </a:fillRef>
+          <a:effectRef idx="0">
+            <a:schemeClr val="accent1"/>
+          </a:effectRef>
+          <a:fontRef idx="minor">
+            <a:schemeClr val="lt1"/>
+          </a:fontRef>
+        </p:style>
+        <p:txBody>
+          <a:bodyPr rtlCol="0" anchor="ctr"/>
+          <a:lstStyle/>
+          <a:p>
+            <a:pPr algn="ctr"/>
+            <a:r>
+              <a:rPr lang="en-US" sz="800" dirty="0" err="1">
+                <a:solidFill>
+                  <a:schemeClr val="bg1">
+                    <a:lumMod val="95000"/>
+                  </a:schemeClr>
+                </a:solidFill>
+              </a:rPr>
+              <a:t>size_gb</a:t>
+            </a:r>
+            <a:endParaRPr lang="en-US" sz="800" dirty="0">
+              <a:solidFill>
+                <a:schemeClr val="bg1">
+                  <a:lumMod val="95000"/>
+                </a:schemeClr>
+              </a:solidFill>
+            </a:endParaRPr>
+          </a:p>
+        </p:txBody>
+      </p:sp>
+      <p:sp>
+        <p:nvSpPr>
+          <p:cNvPr id="1098" name="Rectangle 1097">
+            <a:extLst>
+              <a:ext uri="{FF2B5EF4-FFF2-40B4-BE49-F238E27FC236}">
+                <a16:creationId xmlns:a16="http://schemas.microsoft.com/office/drawing/2014/main" id="{B28537BD-978A-091E-87D0-BEBC5DB9D099}"/>
+              </a:ext>
+            </a:extLst>
+          </p:cNvPr>
+          <p:cNvSpPr/>
+          <p:nvPr/>
+        </p:nvSpPr>
+        <p:spPr>
+          <a:xfrm>
+            <a:off x="3589510" y="5595538"/>
+            <a:ext cx="1284454" cy="179084"/>
+          </a:xfrm>
+          <a:prstGeom prst="rect">
+            <a:avLst/>
+          </a:prstGeom>
+          <a:solidFill>
+            <a:schemeClr val="tx1">
+              <a:lumMod val="75000"/>
+              <a:lumOff val="25000"/>
+            </a:schemeClr>
+          </a:solidFill>
+          <a:ln w="12700">
+            <a:noFill/>
+          </a:ln>
+        </p:spPr>
+        <p:style>
+          <a:lnRef idx="2">
+            <a:schemeClr val="accent1">
+              <a:shade val="15000"/>
+            </a:schemeClr>
+          </a:lnRef>
+          <a:fillRef idx="1">
+            <a:schemeClr val="accent1"/>
+          </a:fillRef>
+          <a:effectRef idx="0">
+            <a:schemeClr val="accent1"/>
+          </a:effectRef>
+          <a:fontRef idx="minor">
+            <a:schemeClr val="lt1"/>
+          </a:fontRef>
+        </p:style>
+        <p:txBody>
+          <a:bodyPr rtlCol="0" anchor="ctr"/>
+          <a:lstStyle/>
+          <a:p>
+            <a:pPr algn="ctr"/>
+            <a:r>
+              <a:rPr lang="en-US" sz="800" dirty="0" err="1">
+                <a:solidFill>
+                  <a:schemeClr val="bg1">
+                    <a:lumMod val="95000"/>
+                  </a:schemeClr>
+                </a:solidFill>
+              </a:rPr>
+              <a:t>availability_zone</a:t>
+            </a:r>
+            <a:endParaRPr lang="en-US" sz="800" dirty="0">
+              <a:solidFill>
+                <a:schemeClr val="bg1">
+                  <a:lumMod val="95000"/>
+                </a:schemeClr>
+              </a:solidFill>
+            </a:endParaRPr>
+          </a:p>
+        </p:txBody>
+      </p:sp>
+      <p:sp>
+        <p:nvSpPr>
+          <p:cNvPr id="1100" name="Rectangle 1099">
+            <a:extLst>
+              <a:ext uri="{FF2B5EF4-FFF2-40B4-BE49-F238E27FC236}">
+                <a16:creationId xmlns:a16="http://schemas.microsoft.com/office/drawing/2014/main" id="{4DAE9D58-11D1-4D9F-CDA2-42D721240204}"/>
+              </a:ext>
+            </a:extLst>
+          </p:cNvPr>
+          <p:cNvSpPr/>
+          <p:nvPr/>
+        </p:nvSpPr>
+        <p:spPr>
+          <a:xfrm>
+            <a:off x="3589509" y="5841165"/>
+            <a:ext cx="1284454" cy="179084"/>
+          </a:xfrm>
+          <a:prstGeom prst="rect">
+            <a:avLst/>
+          </a:prstGeom>
+          <a:solidFill>
+            <a:schemeClr val="tx1">
+              <a:lumMod val="75000"/>
+              <a:lumOff val="25000"/>
+            </a:schemeClr>
+          </a:solidFill>
+          <a:ln w="12700">
+            <a:noFill/>
+          </a:ln>
+        </p:spPr>
+        <p:style>
+          <a:lnRef idx="2">
+            <a:schemeClr val="accent1">
+              <a:shade val="15000"/>
+            </a:schemeClr>
+          </a:lnRef>
+          <a:fillRef idx="1">
+            <a:schemeClr val="accent1"/>
+          </a:fillRef>
+          <a:effectRef idx="0">
+            <a:schemeClr val="accent1"/>
+          </a:effectRef>
+          <a:fontRef idx="minor">
+            <a:schemeClr val="lt1"/>
+          </a:fontRef>
+        </p:style>
+        <p:txBody>
+          <a:bodyPr rtlCol="0" anchor="ctr"/>
+          <a:lstStyle/>
+          <a:p>
+            <a:pPr algn="ctr"/>
+            <a:r>
+              <a:rPr lang="en-US" sz="800" dirty="0" err="1">
+                <a:solidFill>
+                  <a:schemeClr val="bg1">
+                    <a:lumMod val="95000"/>
+                  </a:schemeClr>
+                </a:solidFill>
+              </a:rPr>
+              <a:t>volume_id</a:t>
+            </a:r>
+            <a:endParaRPr lang="en-US" sz="800" dirty="0">
+              <a:solidFill>
+                <a:schemeClr val="bg1">
+                  <a:lumMod val="95000"/>
+                </a:schemeClr>
+              </a:solidFill>
+            </a:endParaRPr>
+          </a:p>
+        </p:txBody>
+      </p:sp>
+      <p:sp>
+        <p:nvSpPr>
+          <p:cNvPr id="313" name="Rectangle 312">
+            <a:extLst>
+              <a:ext uri="{FF2B5EF4-FFF2-40B4-BE49-F238E27FC236}">
+                <a16:creationId xmlns:a16="http://schemas.microsoft.com/office/drawing/2014/main" id="{A334EE5C-69EC-507B-791D-8464810D84DC}"/>
+              </a:ext>
+            </a:extLst>
+          </p:cNvPr>
+          <p:cNvSpPr/>
+          <p:nvPr/>
+        </p:nvSpPr>
+        <p:spPr>
+          <a:xfrm>
+            <a:off x="3593831" y="2308822"/>
+            <a:ext cx="1284454" cy="179084"/>
+          </a:xfrm>
+          <a:prstGeom prst="rect">
+            <a:avLst/>
+          </a:prstGeom>
+          <a:solidFill>
+            <a:schemeClr val="tx1">
+              <a:lumMod val="75000"/>
+              <a:lumOff val="25000"/>
+            </a:schemeClr>
+          </a:solidFill>
+          <a:ln w="12700">
+            <a:noFill/>
+          </a:ln>
+        </p:spPr>
+        <p:style>
+          <a:lnRef idx="2">
+            <a:schemeClr val="accent1">
+              <a:shade val="15000"/>
+            </a:schemeClr>
+          </a:lnRef>
+          <a:fillRef idx="1">
+            <a:schemeClr val="accent1"/>
+          </a:fillRef>
+          <a:effectRef idx="0">
+            <a:schemeClr val="accent1"/>
+          </a:effectRef>
+          <a:fontRef idx="minor">
+            <a:schemeClr val="lt1"/>
+          </a:fontRef>
+        </p:style>
+        <p:txBody>
+          <a:bodyPr rtlCol="0" anchor="ctr"/>
+          <a:lstStyle/>
+          <a:p>
+            <a:pPr algn="ctr"/>
+            <a:r>
+              <a:rPr lang="en-US" sz="800" dirty="0" err="1">
+                <a:solidFill>
+                  <a:schemeClr val="bg1">
+                    <a:lumMod val="95000"/>
+                  </a:schemeClr>
+                </a:solidFill>
+              </a:rPr>
+              <a:t>vpc_id</a:t>
+            </a:r>
+            <a:endParaRPr lang="en-US" sz="800" dirty="0">
+              <a:solidFill>
+                <a:schemeClr val="bg1">
+                  <a:lumMod val="95000"/>
+                </a:schemeClr>
+              </a:solidFill>
+            </a:endParaRPr>
+          </a:p>
+        </p:txBody>
+      </p:sp>
+      <p:sp>
+        <p:nvSpPr>
+          <p:cNvPr id="12" name="Rectangle 11">
+            <a:extLst>
+              <a:ext uri="{FF2B5EF4-FFF2-40B4-BE49-F238E27FC236}">
+                <a16:creationId xmlns:a16="http://schemas.microsoft.com/office/drawing/2014/main" id="{90748546-5113-33E4-9C50-33730F6ABFF6}"/>
+              </a:ext>
+            </a:extLst>
+          </p:cNvPr>
+          <p:cNvSpPr/>
+          <p:nvPr/>
+        </p:nvSpPr>
+        <p:spPr>
+          <a:xfrm>
+            <a:off x="3589509" y="1447711"/>
+            <a:ext cx="1284454" cy="179084"/>
+          </a:xfrm>
+          <a:prstGeom prst="rect">
+            <a:avLst/>
+          </a:prstGeom>
+          <a:solidFill>
+            <a:schemeClr val="tx1">
+              <a:lumMod val="75000"/>
+              <a:lumOff val="25000"/>
+            </a:schemeClr>
+          </a:solidFill>
+          <a:ln w="12700">
+            <a:noFill/>
+          </a:ln>
+        </p:spPr>
+        <p:style>
+          <a:lnRef idx="2">
+            <a:schemeClr val="accent1">
+              <a:shade val="15000"/>
+            </a:schemeClr>
+          </a:lnRef>
+          <a:fillRef idx="1">
+            <a:schemeClr val="accent1"/>
+          </a:fillRef>
+          <a:effectRef idx="0">
+            <a:schemeClr val="accent1"/>
+          </a:effectRef>
+          <a:fontRef idx="minor">
+            <a:schemeClr val="lt1"/>
+          </a:fontRef>
+        </p:style>
+        <p:txBody>
+          <a:bodyPr rtlCol="0" anchor="ctr"/>
+          <a:lstStyle/>
+          <a:p>
+            <a:pPr algn="ctr"/>
+            <a:r>
+              <a:rPr lang="en-US" sz="800" dirty="0">
+                <a:solidFill>
+                  <a:schemeClr val="bg1">
+                    <a:lumMod val="95000"/>
+                  </a:schemeClr>
+                </a:solidFill>
+              </a:rPr>
+              <a:t>namespace</a:t>
+            </a:r>
+          </a:p>
+        </p:txBody>
+      </p:sp>
+      <p:sp>
+        <p:nvSpPr>
+          <p:cNvPr id="16" name="Rectangle 15">
+            <a:extLst>
+              <a:ext uri="{FF2B5EF4-FFF2-40B4-BE49-F238E27FC236}">
+                <a16:creationId xmlns:a16="http://schemas.microsoft.com/office/drawing/2014/main" id="{1C8129DE-8797-FF90-6F9D-D75199286DBF}"/>
+              </a:ext>
+            </a:extLst>
+          </p:cNvPr>
+          <p:cNvSpPr/>
+          <p:nvPr/>
+        </p:nvSpPr>
+        <p:spPr>
+          <a:xfrm>
+            <a:off x="3593832" y="630114"/>
+            <a:ext cx="1284454" cy="179084"/>
+          </a:xfrm>
+          <a:prstGeom prst="rect">
+            <a:avLst/>
+          </a:prstGeom>
+          <a:solidFill>
+            <a:schemeClr val="tx1">
+              <a:lumMod val="75000"/>
+              <a:lumOff val="25000"/>
+            </a:schemeClr>
+          </a:solidFill>
+          <a:ln w="12700">
+            <a:noFill/>
+          </a:ln>
+        </p:spPr>
+        <p:style>
+          <a:lnRef idx="2">
+            <a:schemeClr val="accent1">
+              <a:shade val="15000"/>
+            </a:schemeClr>
+          </a:lnRef>
+          <a:fillRef idx="1">
+            <a:schemeClr val="accent1"/>
+          </a:fillRef>
+          <a:effectRef idx="0">
+            <a:schemeClr val="accent1"/>
+          </a:effectRef>
+          <a:fontRef idx="minor">
+            <a:schemeClr val="lt1"/>
+          </a:fontRef>
+        </p:style>
+        <p:txBody>
+          <a:bodyPr rtlCol="0" anchor="ctr"/>
+          <a:lstStyle/>
+          <a:p>
+            <a:pPr algn="ctr"/>
+            <a:r>
+              <a:rPr lang="en-US" sz="800" dirty="0" err="1">
+                <a:solidFill>
+                  <a:schemeClr val="bg1">
+                    <a:lumMod val="95000"/>
+                  </a:schemeClr>
+                </a:solidFill>
+              </a:rPr>
+              <a:t>db_name</a:t>
+            </a:r>
+            <a:endParaRPr lang="en-US" sz="800" dirty="0">
+              <a:solidFill>
+                <a:schemeClr val="bg1">
+                  <a:lumMod val="95000"/>
+                </a:schemeClr>
+              </a:solidFill>
+            </a:endParaRPr>
+          </a:p>
+        </p:txBody>
+      </p:sp>
+      <p:sp>
+        <p:nvSpPr>
+          <p:cNvPr id="18" name="Rectangle 17">
+            <a:extLst>
+              <a:ext uri="{FF2B5EF4-FFF2-40B4-BE49-F238E27FC236}">
+                <a16:creationId xmlns:a16="http://schemas.microsoft.com/office/drawing/2014/main" id="{7880AA8C-A3A4-6526-CC40-95DCBCBBDC59}"/>
+              </a:ext>
+            </a:extLst>
+          </p:cNvPr>
+          <p:cNvSpPr/>
+          <p:nvPr/>
+        </p:nvSpPr>
+        <p:spPr>
+          <a:xfrm>
+            <a:off x="3593831" y="903336"/>
+            <a:ext cx="1284454" cy="179084"/>
+          </a:xfrm>
+          <a:prstGeom prst="rect">
+            <a:avLst/>
+          </a:prstGeom>
+          <a:solidFill>
+            <a:schemeClr val="tx1">
+              <a:lumMod val="75000"/>
+              <a:lumOff val="25000"/>
+            </a:schemeClr>
+          </a:solidFill>
+          <a:ln w="12700">
+            <a:noFill/>
+          </a:ln>
+        </p:spPr>
+        <p:style>
+          <a:lnRef idx="2">
+            <a:schemeClr val="accent1">
+              <a:shade val="15000"/>
+            </a:schemeClr>
+          </a:lnRef>
+          <a:fillRef idx="1">
+            <a:schemeClr val="accent1"/>
+          </a:fillRef>
+          <a:effectRef idx="0">
+            <a:schemeClr val="accent1"/>
+          </a:effectRef>
+          <a:fontRef idx="minor">
+            <a:schemeClr val="lt1"/>
+          </a:fontRef>
+        </p:style>
+        <p:txBody>
+          <a:bodyPr rtlCol="0" anchor="ctr"/>
+          <a:lstStyle/>
+          <a:p>
+            <a:pPr algn="ctr"/>
+            <a:r>
+              <a:rPr lang="en-US" sz="800" dirty="0" err="1">
+                <a:solidFill>
+                  <a:schemeClr val="bg1">
+                    <a:lumMod val="95000"/>
+                  </a:schemeClr>
+                </a:solidFill>
+              </a:rPr>
+              <a:t>db_username</a:t>
+            </a:r>
+            <a:endParaRPr lang="en-US" sz="800" dirty="0">
+              <a:solidFill>
+                <a:schemeClr val="bg1">
+                  <a:lumMod val="95000"/>
+                </a:schemeClr>
+              </a:solidFill>
+            </a:endParaRPr>
+          </a:p>
+        </p:txBody>
+      </p:sp>
+      <p:sp>
+        <p:nvSpPr>
+          <p:cNvPr id="19" name="Rectangle 18">
+            <a:extLst>
+              <a:ext uri="{FF2B5EF4-FFF2-40B4-BE49-F238E27FC236}">
+                <a16:creationId xmlns:a16="http://schemas.microsoft.com/office/drawing/2014/main" id="{C5017D0B-1948-D640-7617-A4D01B9E39DE}"/>
+              </a:ext>
+            </a:extLst>
+          </p:cNvPr>
+          <p:cNvSpPr/>
+          <p:nvPr/>
+        </p:nvSpPr>
+        <p:spPr>
+          <a:xfrm>
+            <a:off x="3593831" y="1175510"/>
+            <a:ext cx="1284454" cy="179084"/>
+          </a:xfrm>
+          <a:prstGeom prst="rect">
+            <a:avLst/>
+          </a:prstGeom>
+          <a:solidFill>
+            <a:schemeClr val="tx1">
+              <a:lumMod val="75000"/>
+              <a:lumOff val="25000"/>
+            </a:schemeClr>
+          </a:solidFill>
+          <a:ln w="12700">
+            <a:noFill/>
+          </a:ln>
+        </p:spPr>
+        <p:style>
+          <a:lnRef idx="2">
+            <a:schemeClr val="accent1">
+              <a:shade val="15000"/>
+            </a:schemeClr>
+          </a:lnRef>
+          <a:fillRef idx="1">
+            <a:schemeClr val="accent1"/>
+          </a:fillRef>
+          <a:effectRef idx="0">
+            <a:schemeClr val="accent1"/>
+          </a:effectRef>
+          <a:fontRef idx="minor">
+            <a:schemeClr val="lt1"/>
+          </a:fontRef>
+        </p:style>
+        <p:txBody>
+          <a:bodyPr rtlCol="0" anchor="ctr"/>
+          <a:lstStyle/>
+          <a:p>
+            <a:pPr algn="ctr"/>
+            <a:r>
+              <a:rPr lang="en-US" sz="800" dirty="0" err="1">
+                <a:solidFill>
+                  <a:schemeClr val="bg1">
+                    <a:lumMod val="95000"/>
+                  </a:schemeClr>
+                </a:solidFill>
+              </a:rPr>
+              <a:t>db_password</a:t>
+            </a:r>
+            <a:endParaRPr lang="en-US" sz="800" dirty="0">
+              <a:solidFill>
+                <a:schemeClr val="bg1">
+                  <a:lumMod val="95000"/>
+                </a:schemeClr>
+              </a:solidFill>
+            </a:endParaRPr>
+          </a:p>
+        </p:txBody>
+      </p:sp>
+      <p:sp>
+        <p:nvSpPr>
+          <p:cNvPr id="14" name="Rectangle 13">
+            <a:extLst>
+              <a:ext uri="{FF2B5EF4-FFF2-40B4-BE49-F238E27FC236}">
+                <a16:creationId xmlns:a16="http://schemas.microsoft.com/office/drawing/2014/main" id="{1FD9D23D-F062-141F-B0EE-5538F6B65C2C}"/>
+              </a:ext>
+            </a:extLst>
+          </p:cNvPr>
+          <p:cNvSpPr/>
+          <p:nvPr/>
+        </p:nvSpPr>
+        <p:spPr>
+          <a:xfrm>
+            <a:off x="823176" y="4079526"/>
+            <a:ext cx="1284454" cy="179084"/>
+          </a:xfrm>
+          <a:prstGeom prst="rect">
+            <a:avLst/>
+          </a:prstGeom>
+          <a:solidFill>
+            <a:schemeClr val="tx1">
+              <a:lumMod val="75000"/>
+              <a:lumOff val="25000"/>
+            </a:schemeClr>
+          </a:solidFill>
+          <a:ln w="12700">
+            <a:noFill/>
+          </a:ln>
+        </p:spPr>
+        <p:style>
+          <a:lnRef idx="2">
+            <a:schemeClr val="accent1">
+              <a:shade val="15000"/>
+            </a:schemeClr>
+          </a:lnRef>
+          <a:fillRef idx="1">
+            <a:schemeClr val="accent1"/>
+          </a:fillRef>
+          <a:effectRef idx="0">
+            <a:schemeClr val="accent1"/>
+          </a:effectRef>
+          <a:fontRef idx="minor">
+            <a:schemeClr val="lt1"/>
+          </a:fontRef>
+        </p:style>
+        <p:txBody>
+          <a:bodyPr rtlCol="0" anchor="ctr"/>
+          <a:lstStyle/>
+          <a:p>
+            <a:pPr algn="ctr"/>
+            <a:r>
+              <a:rPr lang="en-US" sz="800" dirty="0">
+                <a:solidFill>
+                  <a:schemeClr val="bg1">
+                    <a:lumMod val="95000"/>
+                  </a:schemeClr>
+                </a:solidFill>
+              </a:rPr>
+              <a:t>region</a:t>
+            </a:r>
+          </a:p>
+        </p:txBody>
+      </p:sp>
+      <p:sp>
+        <p:nvSpPr>
+          <p:cNvPr id="230" name="Rectangle 229">
+            <a:extLst>
+              <a:ext uri="{FF2B5EF4-FFF2-40B4-BE49-F238E27FC236}">
+                <a16:creationId xmlns:a16="http://schemas.microsoft.com/office/drawing/2014/main" id="{8191BFEA-A323-CE73-71B3-101C1C69AE0A}"/>
+              </a:ext>
+            </a:extLst>
+          </p:cNvPr>
+          <p:cNvSpPr/>
+          <p:nvPr/>
+        </p:nvSpPr>
+        <p:spPr>
+          <a:xfrm>
+            <a:off x="823177" y="3013584"/>
+            <a:ext cx="1284454" cy="179084"/>
+          </a:xfrm>
+          <a:prstGeom prst="rect">
+            <a:avLst/>
+          </a:prstGeom>
+          <a:solidFill>
+            <a:schemeClr val="tx1">
+              <a:lumMod val="75000"/>
+              <a:lumOff val="25000"/>
+            </a:schemeClr>
+          </a:solidFill>
+          <a:ln w="12700">
+            <a:noFill/>
+          </a:ln>
+        </p:spPr>
+        <p:style>
+          <a:lnRef idx="2">
+            <a:schemeClr val="accent1">
+              <a:shade val="15000"/>
+            </a:schemeClr>
+          </a:lnRef>
+          <a:fillRef idx="1">
+            <a:schemeClr val="accent1"/>
+          </a:fillRef>
+          <a:effectRef idx="0">
+            <a:schemeClr val="accent1"/>
+          </a:effectRef>
+          <a:fontRef idx="minor">
+            <a:schemeClr val="lt1"/>
+          </a:fontRef>
+        </p:style>
+        <p:txBody>
+          <a:bodyPr rtlCol="0" anchor="ctr"/>
+          <a:lstStyle/>
+          <a:p>
+            <a:pPr algn="ctr"/>
+            <a:r>
+              <a:rPr lang="en-US" sz="800" dirty="0" err="1">
+                <a:solidFill>
+                  <a:schemeClr val="bg1">
+                    <a:lumMod val="95000"/>
+                  </a:schemeClr>
+                </a:solidFill>
+              </a:rPr>
+              <a:t>db_name</a:t>
+            </a:r>
+            <a:endParaRPr lang="en-US" sz="800" dirty="0">
+              <a:solidFill>
+                <a:schemeClr val="bg1">
+                  <a:lumMod val="95000"/>
+                </a:schemeClr>
+              </a:solidFill>
+            </a:endParaRPr>
+          </a:p>
+        </p:txBody>
+      </p:sp>
+      <p:sp>
+        <p:nvSpPr>
+          <p:cNvPr id="231" name="Rectangle 230">
+            <a:extLst>
+              <a:ext uri="{FF2B5EF4-FFF2-40B4-BE49-F238E27FC236}">
+                <a16:creationId xmlns:a16="http://schemas.microsoft.com/office/drawing/2014/main" id="{EA51BE06-5205-71A1-2303-219B4BF5A2CF}"/>
+              </a:ext>
+            </a:extLst>
+          </p:cNvPr>
+          <p:cNvSpPr/>
+          <p:nvPr/>
+        </p:nvSpPr>
+        <p:spPr>
+          <a:xfrm>
+            <a:off x="823176" y="3286806"/>
+            <a:ext cx="1284454" cy="179084"/>
+          </a:xfrm>
+          <a:prstGeom prst="rect">
+            <a:avLst/>
+          </a:prstGeom>
+          <a:solidFill>
+            <a:schemeClr val="tx1">
+              <a:lumMod val="75000"/>
+              <a:lumOff val="25000"/>
+            </a:schemeClr>
+          </a:solidFill>
+          <a:ln w="12700">
+            <a:noFill/>
+          </a:ln>
+        </p:spPr>
+        <p:style>
+          <a:lnRef idx="2">
+            <a:schemeClr val="accent1">
+              <a:shade val="15000"/>
+            </a:schemeClr>
+          </a:lnRef>
+          <a:fillRef idx="1">
+            <a:schemeClr val="accent1"/>
+          </a:fillRef>
+          <a:effectRef idx="0">
+            <a:schemeClr val="accent1"/>
+          </a:effectRef>
+          <a:fontRef idx="minor">
+            <a:schemeClr val="lt1"/>
+          </a:fontRef>
+        </p:style>
+        <p:txBody>
+          <a:bodyPr rtlCol="0" anchor="ctr"/>
+          <a:lstStyle/>
+          <a:p>
+            <a:pPr algn="ctr"/>
+            <a:r>
+              <a:rPr lang="en-US" sz="800" dirty="0" err="1">
+                <a:solidFill>
+                  <a:schemeClr val="bg1">
+                    <a:lumMod val="95000"/>
+                  </a:schemeClr>
+                </a:solidFill>
+              </a:rPr>
+              <a:t>db_username</a:t>
+            </a:r>
+            <a:endParaRPr lang="en-US" sz="800" dirty="0">
+              <a:solidFill>
+                <a:schemeClr val="bg1">
+                  <a:lumMod val="95000"/>
+                </a:schemeClr>
+              </a:solidFill>
+            </a:endParaRPr>
+          </a:p>
+        </p:txBody>
+      </p:sp>
+      <p:sp>
+        <p:nvSpPr>
+          <p:cNvPr id="232" name="Rectangle 231">
+            <a:extLst>
+              <a:ext uri="{FF2B5EF4-FFF2-40B4-BE49-F238E27FC236}">
+                <a16:creationId xmlns:a16="http://schemas.microsoft.com/office/drawing/2014/main" id="{F2FF2A0A-93F3-B33E-085D-8EED0423AEFD}"/>
+              </a:ext>
+            </a:extLst>
+          </p:cNvPr>
+          <p:cNvSpPr/>
+          <p:nvPr/>
+        </p:nvSpPr>
+        <p:spPr>
+          <a:xfrm>
+            <a:off x="823176" y="3552016"/>
+            <a:ext cx="1284454" cy="179084"/>
+          </a:xfrm>
+          <a:prstGeom prst="rect">
+            <a:avLst/>
+          </a:prstGeom>
+          <a:solidFill>
+            <a:schemeClr val="tx1">
+              <a:lumMod val="75000"/>
+              <a:lumOff val="25000"/>
+            </a:schemeClr>
+          </a:solidFill>
+          <a:ln w="12700">
+            <a:noFill/>
+          </a:ln>
+        </p:spPr>
+        <p:style>
+          <a:lnRef idx="2">
+            <a:schemeClr val="accent1">
+              <a:shade val="15000"/>
+            </a:schemeClr>
+          </a:lnRef>
+          <a:fillRef idx="1">
+            <a:schemeClr val="accent1"/>
+          </a:fillRef>
+          <a:effectRef idx="0">
+            <a:schemeClr val="accent1"/>
+          </a:effectRef>
+          <a:fontRef idx="minor">
+            <a:schemeClr val="lt1"/>
+          </a:fontRef>
+        </p:style>
+        <p:txBody>
+          <a:bodyPr rtlCol="0" anchor="ctr"/>
+          <a:lstStyle/>
+          <a:p>
+            <a:pPr algn="ctr"/>
+            <a:r>
+              <a:rPr lang="en-US" sz="800" dirty="0" err="1">
+                <a:solidFill>
+                  <a:schemeClr val="bg1">
+                    <a:lumMod val="95000"/>
+                  </a:schemeClr>
+                </a:solidFill>
+              </a:rPr>
+              <a:t>db_password</a:t>
+            </a:r>
+            <a:endParaRPr lang="en-US" sz="800" dirty="0">
+              <a:solidFill>
+                <a:schemeClr val="bg1">
+                  <a:lumMod val="95000"/>
+                </a:schemeClr>
+              </a:solidFill>
+            </a:endParaRPr>
+          </a:p>
+        </p:txBody>
+      </p:sp>
+      <p:sp>
+        <p:nvSpPr>
+          <p:cNvPr id="242" name="Rectangle 241">
+            <a:extLst>
+              <a:ext uri="{FF2B5EF4-FFF2-40B4-BE49-F238E27FC236}">
+                <a16:creationId xmlns:a16="http://schemas.microsoft.com/office/drawing/2014/main" id="{DA1B2662-E071-FD1E-9B02-993B4D7B013D}"/>
+              </a:ext>
+            </a:extLst>
+          </p:cNvPr>
+          <p:cNvSpPr/>
+          <p:nvPr/>
+        </p:nvSpPr>
+        <p:spPr>
+          <a:xfrm>
+            <a:off x="823176" y="3817226"/>
+            <a:ext cx="1284454" cy="179084"/>
+          </a:xfrm>
+          <a:prstGeom prst="rect">
+            <a:avLst/>
+          </a:prstGeom>
+          <a:solidFill>
+            <a:schemeClr val="tx1">
+              <a:lumMod val="75000"/>
+              <a:lumOff val="25000"/>
+            </a:schemeClr>
+          </a:solidFill>
+          <a:ln w="12700">
+            <a:noFill/>
+          </a:ln>
+        </p:spPr>
+        <p:style>
+          <a:lnRef idx="2">
+            <a:schemeClr val="accent1">
+              <a:shade val="15000"/>
+            </a:schemeClr>
+          </a:lnRef>
+          <a:fillRef idx="1">
+            <a:schemeClr val="accent1"/>
+          </a:fillRef>
+          <a:effectRef idx="0">
+            <a:schemeClr val="accent1"/>
+          </a:effectRef>
+          <a:fontRef idx="minor">
+            <a:schemeClr val="lt1"/>
+          </a:fontRef>
+        </p:style>
+        <p:txBody>
+          <a:bodyPr rtlCol="0" anchor="ctr"/>
+          <a:lstStyle/>
+          <a:p>
+            <a:pPr algn="ctr"/>
+            <a:r>
+              <a:rPr lang="en-US" sz="800" dirty="0">
+                <a:solidFill>
+                  <a:schemeClr val="bg1">
+                    <a:lumMod val="95000"/>
+                  </a:schemeClr>
+                </a:solidFill>
+              </a:rPr>
+              <a:t>namespace</a:t>
+            </a:r>
+          </a:p>
+        </p:txBody>
+      </p:sp>
+      <p:sp>
+        <p:nvSpPr>
+          <p:cNvPr id="21" name="Rectangle 20">
+            <a:extLst>
+              <a:ext uri="{FF2B5EF4-FFF2-40B4-BE49-F238E27FC236}">
+                <a16:creationId xmlns:a16="http://schemas.microsoft.com/office/drawing/2014/main" id="{567C05BB-0EFD-1DD8-D313-38886E0460C0}"/>
+              </a:ext>
+            </a:extLst>
+          </p:cNvPr>
+          <p:cNvSpPr/>
+          <p:nvPr/>
+        </p:nvSpPr>
+        <p:spPr>
+          <a:xfrm>
+            <a:off x="823176" y="4792351"/>
+            <a:ext cx="1284454" cy="179084"/>
+          </a:xfrm>
+          <a:prstGeom prst="rect">
+            <a:avLst/>
+          </a:prstGeom>
+          <a:solidFill>
+            <a:schemeClr val="tx1">
+              <a:lumMod val="75000"/>
+              <a:lumOff val="25000"/>
+            </a:schemeClr>
+          </a:solidFill>
+          <a:ln w="12700">
+            <a:noFill/>
+          </a:ln>
+        </p:spPr>
+        <p:style>
+          <a:lnRef idx="2">
+            <a:schemeClr val="accent1">
+              <a:shade val="15000"/>
+            </a:schemeClr>
+          </a:lnRef>
+          <a:fillRef idx="1">
+            <a:schemeClr val="accent1"/>
+          </a:fillRef>
+          <a:effectRef idx="0">
+            <a:schemeClr val="accent1"/>
+          </a:effectRef>
+          <a:fontRef idx="minor">
+            <a:schemeClr val="lt1"/>
+          </a:fontRef>
+        </p:style>
+        <p:txBody>
+          <a:bodyPr rtlCol="0" anchor="ctr"/>
+          <a:lstStyle/>
+          <a:p>
+            <a:pPr algn="ctr"/>
+            <a:r>
+              <a:rPr lang="en-US" sz="800" dirty="0" err="1">
+                <a:solidFill>
+                  <a:schemeClr val="bg1">
+                    <a:lumMod val="95000"/>
+                  </a:schemeClr>
+                </a:solidFill>
+              </a:rPr>
+              <a:t>wordpress_url</a:t>
+            </a:r>
+            <a:endParaRPr lang="en-US" sz="800" dirty="0">
+              <a:solidFill>
+                <a:schemeClr val="bg1">
+                  <a:lumMod val="95000"/>
+                </a:schemeClr>
+              </a:solidFill>
+            </a:endParaRPr>
+          </a:p>
+        </p:txBody>
+      </p:sp>
+      <p:sp>
+        <p:nvSpPr>
+          <p:cNvPr id="23" name="Rectangle 22">
+            <a:extLst>
+              <a:ext uri="{FF2B5EF4-FFF2-40B4-BE49-F238E27FC236}">
+                <a16:creationId xmlns:a16="http://schemas.microsoft.com/office/drawing/2014/main" id="{E7DC2BE7-B053-5A67-609C-DF89BE2CFC74}"/>
+              </a:ext>
+            </a:extLst>
+          </p:cNvPr>
+          <p:cNvSpPr/>
+          <p:nvPr/>
+        </p:nvSpPr>
+        <p:spPr>
+          <a:xfrm>
+            <a:off x="823176" y="5063212"/>
+            <a:ext cx="1284454" cy="179084"/>
+          </a:xfrm>
+          <a:prstGeom prst="rect">
+            <a:avLst/>
+          </a:prstGeom>
+          <a:solidFill>
+            <a:schemeClr val="tx1">
+              <a:lumMod val="75000"/>
+              <a:lumOff val="25000"/>
+            </a:schemeClr>
+          </a:solidFill>
+          <a:ln w="12700">
+            <a:noFill/>
+          </a:ln>
+        </p:spPr>
+        <p:style>
+          <a:lnRef idx="2">
+            <a:schemeClr val="accent1">
+              <a:shade val="15000"/>
+            </a:schemeClr>
+          </a:lnRef>
+          <a:fillRef idx="1">
+            <a:schemeClr val="accent1"/>
+          </a:fillRef>
+          <a:effectRef idx="0">
+            <a:schemeClr val="accent1"/>
+          </a:effectRef>
+          <a:fontRef idx="minor">
+            <a:schemeClr val="lt1"/>
+          </a:fontRef>
+        </p:style>
+        <p:txBody>
+          <a:bodyPr rtlCol="0" anchor="ctr"/>
+          <a:lstStyle/>
+          <a:p>
+            <a:pPr algn="ctr"/>
+            <a:r>
+              <a:rPr lang="en-US" sz="800" dirty="0" err="1">
+                <a:solidFill>
+                  <a:schemeClr val="bg1">
+                    <a:lumMod val="95000"/>
+                  </a:schemeClr>
+                </a:solidFill>
+              </a:rPr>
+              <a:t>rds_endpoint</a:t>
+            </a:r>
+            <a:endParaRPr lang="en-US" sz="800" dirty="0">
+              <a:solidFill>
+                <a:schemeClr val="bg1">
+                  <a:lumMod val="95000"/>
+                </a:schemeClr>
+              </a:solidFill>
+            </a:endParaRPr>
+          </a:p>
+        </p:txBody>
+      </p:sp>
+      <p:sp>
+        <p:nvSpPr>
+          <p:cNvPr id="25" name="Rectangle 24">
+            <a:extLst>
+              <a:ext uri="{FF2B5EF4-FFF2-40B4-BE49-F238E27FC236}">
+                <a16:creationId xmlns:a16="http://schemas.microsoft.com/office/drawing/2014/main" id="{3AB2C2BE-AC00-BC31-9D4D-1368132F4E74}"/>
+              </a:ext>
+            </a:extLst>
+          </p:cNvPr>
+          <p:cNvSpPr/>
+          <p:nvPr/>
+        </p:nvSpPr>
+        <p:spPr>
+          <a:xfrm>
+            <a:off x="823176" y="5330783"/>
+            <a:ext cx="1284454" cy="179084"/>
+          </a:xfrm>
+          <a:prstGeom prst="rect">
+            <a:avLst/>
+          </a:prstGeom>
+          <a:solidFill>
+            <a:schemeClr val="tx1">
+              <a:lumMod val="75000"/>
+              <a:lumOff val="25000"/>
+            </a:schemeClr>
+          </a:solidFill>
+          <a:ln w="12700">
+            <a:noFill/>
+          </a:ln>
+        </p:spPr>
+        <p:style>
+          <a:lnRef idx="2">
+            <a:schemeClr val="accent1">
+              <a:shade val="15000"/>
+            </a:schemeClr>
+          </a:lnRef>
+          <a:fillRef idx="1">
+            <a:schemeClr val="accent1"/>
+          </a:fillRef>
+          <a:effectRef idx="0">
+            <a:schemeClr val="accent1"/>
+          </a:effectRef>
+          <a:fontRef idx="minor">
+            <a:schemeClr val="lt1"/>
+          </a:fontRef>
+        </p:style>
+        <p:txBody>
+          <a:bodyPr rtlCol="0" anchor="ctr"/>
+          <a:lstStyle/>
+          <a:p>
+            <a:pPr algn="ctr"/>
+            <a:r>
+              <a:rPr lang="en-US" sz="800" dirty="0" err="1">
+                <a:solidFill>
+                  <a:schemeClr val="bg1">
+                    <a:lumMod val="95000"/>
+                  </a:schemeClr>
+                </a:solidFill>
+              </a:rPr>
+              <a:t>ebs_volume_id</a:t>
+            </a:r>
+            <a:endParaRPr lang="en-US" sz="800" dirty="0">
+              <a:solidFill>
+                <a:schemeClr val="bg1">
+                  <a:lumMod val="95000"/>
+                </a:schemeClr>
+              </a:solidFill>
+            </a:endParaRPr>
+          </a:p>
+        </p:txBody>
+      </p:sp>
+      <p:sp>
+        <p:nvSpPr>
+          <p:cNvPr id="37" name="Rectangle 36">
+            <a:extLst>
+              <a:ext uri="{FF2B5EF4-FFF2-40B4-BE49-F238E27FC236}">
+                <a16:creationId xmlns:a16="http://schemas.microsoft.com/office/drawing/2014/main" id="{C921F0D4-4C35-0D6A-3F07-EC127D1BF6CC}"/>
+              </a:ext>
+            </a:extLst>
+          </p:cNvPr>
+          <p:cNvSpPr/>
+          <p:nvPr/>
+        </p:nvSpPr>
+        <p:spPr>
+          <a:xfrm>
+            <a:off x="8834392" y="964057"/>
+            <a:ext cx="251300" cy="163444"/>
+          </a:xfrm>
+          <a:prstGeom prst="rect">
+            <a:avLst/>
+          </a:prstGeom>
+          <a:solidFill>
+            <a:schemeClr val="accent1">
+              <a:alpha val="0"/>
+            </a:schemeClr>
+          </a:solidFill>
+          <a:ln>
+            <a:noFill/>
+          </a:ln>
+        </p:spPr>
+        <p:style>
+          <a:lnRef idx="2">
+            <a:schemeClr val="accent1">
+              <a:shade val="15000"/>
+            </a:schemeClr>
+          </a:lnRef>
+          <a:fillRef idx="1">
+            <a:schemeClr val="accent1"/>
+          </a:fillRef>
+          <a:effectRef idx="0">
+            <a:schemeClr val="accent1"/>
+          </a:effectRef>
+          <a:fontRef idx="minor">
+            <a:schemeClr val="lt1"/>
+          </a:fontRef>
+        </p:style>
+        <p:txBody>
+          <a:bodyPr rtlCol="0" anchor="ctr"/>
+          <a:lstStyle/>
+          <a:p>
+            <a:pPr algn="ctr"/>
+            <a:endParaRPr lang="en-US"/>
+          </a:p>
+        </p:txBody>
+      </p:sp>
     </p:spTree>
     <p:extLst>
       <p:ext uri="{BB962C8B-B14F-4D97-AF65-F5344CB8AC3E}">

--- a/sources/diagram.pptx
+++ b/sources/diagram.pptx
@@ -3394,8 +3394,8 @@
         </p:nvSpPr>
         <p:spPr>
           <a:xfrm>
-            <a:off x="2520373" y="387506"/>
-            <a:ext cx="726257" cy="6386674"/>
+            <a:off x="2520373" y="283210"/>
+            <a:ext cx="726257" cy="6574790"/>
           </a:xfrm>
           <a:prstGeom prst="cube">
             <a:avLst>
@@ -3438,7 +3438,7 @@
           <a:p>
             <a:pPr algn="ctr"/>
             <a:r>
-              <a:rPr lang="en-US" sz="1000" dirty="0">
+              <a:rPr lang="en-US" sz="1000" b="1" dirty="0">
                 <a:solidFill>
                   <a:schemeClr val="tx1">
                     <a:lumMod val="85000"/>
@@ -3465,7 +3465,7 @@
         </p:nvSpPr>
         <p:spPr>
           <a:xfrm>
-            <a:off x="5206391" y="387650"/>
+            <a:off x="5206391" y="283210"/>
             <a:ext cx="4833882" cy="1489346"/>
           </a:xfrm>
           <a:prstGeom prst="cube">
@@ -3509,7 +3509,7 @@
           <a:p>
             <a:pPr algn="ctr"/>
             <a:r>
-              <a:rPr lang="en-US" sz="1000" dirty="0" err="1">
+              <a:rPr lang="en-US" sz="1000" b="1" dirty="0" err="1">
                 <a:solidFill>
                   <a:schemeClr val="tx1">
                     <a:lumMod val="85000"/>
@@ -3519,7 +3519,7 @@
               </a:rPr>
               <a:t>rds</a:t>
             </a:r>
-            <a:endParaRPr lang="en-US" sz="1000" dirty="0">
+            <a:endParaRPr lang="en-US" sz="1000" b="1" dirty="0">
               <a:solidFill>
                 <a:schemeClr val="tx1">
                   <a:lumMod val="85000"/>
@@ -3544,7 +3544,7 @@
         </p:nvSpPr>
         <p:spPr>
           <a:xfrm>
-            <a:off x="5206392" y="2020136"/>
+            <a:off x="5206392" y="1975529"/>
             <a:ext cx="4833877" cy="1489346"/>
           </a:xfrm>
           <a:prstGeom prst="cube">
@@ -3588,7 +3588,7 @@
           <a:p>
             <a:pPr algn="ctr"/>
             <a:r>
-              <a:rPr lang="en-US" sz="1000" dirty="0">
+              <a:rPr lang="en-US" sz="1000" b="1" dirty="0">
                 <a:solidFill>
                   <a:schemeClr val="tx1">
                     <a:lumMod val="85000"/>
@@ -3615,7 +3615,7 @@
         </p:nvSpPr>
         <p:spPr>
           <a:xfrm>
-            <a:off x="5206392" y="3652746"/>
+            <a:off x="5206392" y="3678226"/>
             <a:ext cx="4833877" cy="1489346"/>
           </a:xfrm>
           <a:prstGeom prst="cube">
@@ -3659,7 +3659,7 @@
           <a:p>
             <a:pPr algn="ctr"/>
             <a:r>
-              <a:rPr lang="en-US" sz="1000" dirty="0">
+              <a:rPr lang="en-US" sz="1000" b="1" dirty="0">
                 <a:solidFill>
                   <a:schemeClr val="tx1">
                     <a:lumMod val="85000"/>
@@ -3686,7 +3686,7 @@
         </p:nvSpPr>
         <p:spPr>
           <a:xfrm>
-            <a:off x="5206392" y="5268426"/>
+            <a:off x="5206392" y="5368655"/>
             <a:ext cx="4833877" cy="1489346"/>
           </a:xfrm>
           <a:prstGeom prst="cube">
@@ -3730,7 +3730,7 @@
           <a:p>
             <a:pPr algn="ctr"/>
             <a:r>
-              <a:rPr lang="en-US" sz="1000" dirty="0" err="1">
+              <a:rPr lang="en-US" sz="1000" b="1" dirty="0" err="1">
                 <a:solidFill>
                   <a:schemeClr val="tx1">
                     <a:lumMod val="85000"/>
@@ -3740,7 +3740,7 @@
               </a:rPr>
               <a:t>ebs</a:t>
             </a:r>
-            <a:endParaRPr lang="en-US" sz="1000" dirty="0">
+            <a:endParaRPr lang="en-US" sz="1000" b="1" dirty="0">
               <a:solidFill>
                 <a:schemeClr val="tx1">
                   <a:lumMod val="85000"/>
@@ -3765,7 +3765,7 @@
         </p:nvSpPr>
         <p:spPr>
           <a:xfrm>
-            <a:off x="10280473" y="2697370"/>
+            <a:off x="10280473" y="2652763"/>
             <a:ext cx="1284454" cy="179084"/>
           </a:xfrm>
           <a:prstGeom prst="rect">
@@ -3836,7 +3836,7 @@
         </p:nvSpPr>
         <p:spPr>
           <a:xfrm>
-            <a:off x="10276016" y="2422196"/>
+            <a:off x="10276016" y="2377589"/>
             <a:ext cx="1284454" cy="179084"/>
           </a:xfrm>
           <a:prstGeom prst="rect">
@@ -3911,12 +3911,12 @@
         </p:nvCxnSpPr>
         <p:spPr>
           <a:xfrm rot="16200000" flipH="1">
-            <a:off x="6284626" y="-426096"/>
-            <a:ext cx="716760" cy="4822541"/>
+            <a:off x="6254710" y="-500620"/>
+            <a:ext cx="776593" cy="4822541"/>
           </a:xfrm>
           <a:prstGeom prst="bentConnector3">
             <a:avLst>
-              <a:gd name="adj1" fmla="val 44931"/>
+              <a:gd name="adj1" fmla="val 46729"/>
             </a:avLst>
           </a:prstGeom>
           <a:ln>
@@ -3958,12 +3958,12 @@
         </p:nvCxnSpPr>
         <p:spPr>
           <a:xfrm>
-            <a:off x="3254076" y="733177"/>
+            <a:off x="3254076" y="628737"/>
             <a:ext cx="4548942" cy="394324"/>
           </a:xfrm>
           <a:prstGeom prst="bentConnector3">
             <a:avLst>
-              <a:gd name="adj1" fmla="val 50000"/>
+              <a:gd name="adj1" fmla="val 39617"/>
             </a:avLst>
           </a:prstGeom>
           <a:ln>
@@ -4005,12 +4005,12 @@
         </p:nvCxnSpPr>
         <p:spPr>
           <a:xfrm>
-            <a:off x="3254077" y="988227"/>
+            <a:off x="3254077" y="883787"/>
             <a:ext cx="4548941" cy="139274"/>
           </a:xfrm>
           <a:prstGeom prst="bentConnector3">
             <a:avLst>
-              <a:gd name="adj1" fmla="val 50000"/>
+              <a:gd name="adj1" fmla="val 38152"/>
             </a:avLst>
           </a:prstGeom>
           <a:ln>
@@ -4052,12 +4052,12 @@
         </p:nvCxnSpPr>
         <p:spPr>
           <a:xfrm flipV="1">
-            <a:off x="3254076" y="1127501"/>
+            <a:off x="3254076" y="1023061"/>
             <a:ext cx="4548942" cy="141788"/>
           </a:xfrm>
           <a:prstGeom prst="bentConnector3">
             <a:avLst>
-              <a:gd name="adj1" fmla="val 50000"/>
+              <a:gd name="adj1" fmla="val 38152"/>
             </a:avLst>
           </a:prstGeom>
           <a:ln>
@@ -4096,7 +4096,7 @@
         </p:nvSpPr>
         <p:spPr>
           <a:xfrm>
-            <a:off x="10276016" y="3197468"/>
+            <a:off x="10276016" y="3152861"/>
             <a:ext cx="1284454" cy="179084"/>
           </a:xfrm>
           <a:prstGeom prst="rect">
@@ -4167,7 +4167,7 @@
         </p:nvSpPr>
         <p:spPr>
           <a:xfrm>
-            <a:off x="10276016" y="2906941"/>
+            <a:off x="10276016" y="2862334"/>
             <a:ext cx="1284454" cy="179084"/>
           </a:xfrm>
           <a:prstGeom prst="rect">
@@ -4241,7 +4241,7 @@
         </p:nvCxnSpPr>
         <p:spPr>
           <a:xfrm flipH="1">
-            <a:off x="3246630" y="3285661"/>
+            <a:off x="3246630" y="3241054"/>
             <a:ext cx="3532025" cy="0"/>
           </a:xfrm>
           <a:prstGeom prst="straightConnector1">
@@ -4286,7 +4286,7 @@
         </p:nvCxnSpPr>
         <p:spPr>
           <a:xfrm>
-            <a:off x="9695614" y="2996483"/>
+            <a:off x="9695614" y="2951876"/>
             <a:ext cx="580402" cy="0"/>
           </a:xfrm>
           <a:prstGeom prst="straightConnector1">
@@ -4332,7 +4332,7 @@
         </p:nvCxnSpPr>
         <p:spPr>
           <a:xfrm>
-            <a:off x="9695614" y="3285661"/>
+            <a:off x="9695614" y="3241054"/>
             <a:ext cx="580402" cy="1349"/>
           </a:xfrm>
           <a:prstGeom prst="straightConnector1">
@@ -4377,7 +4377,7 @@
         </p:nvCxnSpPr>
         <p:spPr>
           <a:xfrm>
-            <a:off x="9695614" y="2786912"/>
+            <a:off x="9695614" y="2742305"/>
             <a:ext cx="584859" cy="0"/>
           </a:xfrm>
           <a:prstGeom prst="straightConnector1">
@@ -4423,7 +4423,7 @@
         </p:nvCxnSpPr>
         <p:spPr>
           <a:xfrm flipV="1">
-            <a:off x="9695614" y="2511738"/>
+            <a:off x="9695614" y="2467131"/>
             <a:ext cx="580402" cy="121"/>
           </a:xfrm>
           <a:prstGeom prst="straightConnector1">
@@ -4462,17 +4462,20 @@
           </p:cNvPr>
           <p:cNvCxnSpPr>
             <a:cxnSpLocks/>
-            <a:stCxn id="83" idx="0"/>
+            <a:stCxn id="83" idx="3"/>
+            <a:endCxn id="757" idx="3"/>
           </p:cNvCxnSpPr>
           <p:nvPr/>
         </p:nvCxnSpPr>
         <p:spPr>
-          <a:xfrm rot="16200000" flipV="1">
-            <a:off x="9024204" y="528157"/>
-            <a:ext cx="682530" cy="3105548"/>
-          </a:xfrm>
-          <a:prstGeom prst="bentConnector2">
-            <a:avLst/>
+          <a:xfrm flipH="1" flipV="1">
+            <a:off x="7812695" y="1525399"/>
+            <a:ext cx="3747775" cy="941732"/>
+          </a:xfrm>
+          <a:prstGeom prst="bentConnector3">
+            <a:avLst>
+              <a:gd name="adj1" fmla="val -3220"/>
+            </a:avLst>
           </a:prstGeom>
           <a:ln>
             <a:solidFill>
@@ -4508,17 +4511,18 @@
           <p:cNvCxnSpPr>
             <a:cxnSpLocks/>
             <a:stCxn id="74" idx="3"/>
+            <a:endCxn id="50" idx="3"/>
           </p:cNvCxnSpPr>
           <p:nvPr/>
         </p:nvCxnSpPr>
         <p:spPr>
           <a:xfrm flipH="1" flipV="1">
-            <a:off x="9093140" y="1226089"/>
-            <a:ext cx="2471787" cy="1560823"/>
+            <a:off x="9085692" y="1092763"/>
+            <a:ext cx="2479235" cy="1649542"/>
           </a:xfrm>
           <a:prstGeom prst="bentConnector3">
             <a:avLst>
-              <a:gd name="adj1" fmla="val -9248"/>
+              <a:gd name="adj1" fmla="val -9221"/>
             </a:avLst>
           </a:prstGeom>
           <a:ln>
@@ -4561,13 +4565,13 @@
         </p:nvCxnSpPr>
         <p:spPr>
           <a:xfrm flipH="1">
-            <a:off x="8302998" y="2996483"/>
-            <a:ext cx="3257472" cy="1343765"/>
+            <a:off x="8302998" y="2951876"/>
+            <a:ext cx="3257472" cy="1413852"/>
           </a:xfrm>
           <a:prstGeom prst="bentConnector4">
             <a:avLst>
               <a:gd name="adj1" fmla="val -7018"/>
-              <a:gd name="adj2" fmla="val 77059"/>
+              <a:gd name="adj2" fmla="val 81013"/>
             </a:avLst>
           </a:prstGeom>
           <a:ln>
@@ -4603,19 +4607,20 @@
           </p:cNvPr>
           <p:cNvCxnSpPr>
             <a:cxnSpLocks/>
-            <a:stCxn id="312" idx="2"/>
+            <a:stCxn id="312" idx="3"/>
             <a:endCxn id="1068" idx="0"/>
           </p:cNvCxnSpPr>
           <p:nvPr/>
         </p:nvCxnSpPr>
         <p:spPr>
-          <a:xfrm rot="5400000">
-            <a:off x="8991151" y="2413156"/>
-            <a:ext cx="963696" cy="2890489"/>
-          </a:xfrm>
-          <a:prstGeom prst="bentConnector3">
+          <a:xfrm flipH="1">
+            <a:off x="8027754" y="3242403"/>
+            <a:ext cx="3532716" cy="1123325"/>
+          </a:xfrm>
+          <a:prstGeom prst="bentConnector4">
             <a:avLst>
-              <a:gd name="adj1" fmla="val 50000"/>
+              <a:gd name="adj1" fmla="val -3056"/>
+              <a:gd name="adj2" fmla="val 65291"/>
             </a:avLst>
           </a:prstGeom>
           <a:ln>
@@ -4654,7 +4659,7 @@
         </p:nvSpPr>
         <p:spPr>
           <a:xfrm>
-            <a:off x="10276016" y="723675"/>
+            <a:off x="10276016" y="619235"/>
             <a:ext cx="1284454" cy="179084"/>
           </a:xfrm>
           <a:prstGeom prst="rect">
@@ -4718,7 +4723,7 @@
         </p:nvSpPr>
         <p:spPr>
           <a:xfrm>
-            <a:off x="10271559" y="473248"/>
+            <a:off x="10271559" y="368808"/>
             <a:ext cx="1284454" cy="179084"/>
           </a:xfrm>
           <a:prstGeom prst="rect">
@@ -4782,7 +4787,7 @@
         </p:nvSpPr>
         <p:spPr>
           <a:xfrm>
-            <a:off x="10271560" y="960756"/>
+            <a:off x="10271560" y="856316"/>
             <a:ext cx="1284454" cy="179084"/>
           </a:xfrm>
           <a:prstGeom prst="rect">
@@ -4844,19 +4849,18 @@
           <p:cNvCxnSpPr>
             <a:cxnSpLocks/>
             <a:stCxn id="530" idx="3"/>
-            <a:endCxn id="45" idx="0"/>
           </p:cNvCxnSpPr>
           <p:nvPr/>
         </p:nvCxnSpPr>
         <p:spPr>
           <a:xfrm flipH="1" flipV="1">
-            <a:off x="2935171" y="387506"/>
-            <a:ext cx="8620842" cy="175284"/>
+            <a:off x="2935171" y="283210"/>
+            <a:ext cx="8620842" cy="175140"/>
           </a:xfrm>
           <a:prstGeom prst="bentConnector4">
             <a:avLst>
-              <a:gd name="adj1" fmla="val -2652"/>
-              <a:gd name="adj2" fmla="val 230417"/>
+              <a:gd name="adj1" fmla="val -1107"/>
+              <a:gd name="adj2" fmla="val 161372"/>
             </a:avLst>
           </a:prstGeom>
           <a:ln>
@@ -4893,19 +4897,18 @@
           <p:cNvCxnSpPr>
             <a:cxnSpLocks/>
             <a:stCxn id="529" idx="3"/>
-            <a:endCxn id="45" idx="0"/>
           </p:cNvCxnSpPr>
           <p:nvPr/>
         </p:nvCxnSpPr>
         <p:spPr>
           <a:xfrm flipH="1" flipV="1">
-            <a:off x="2935171" y="387506"/>
-            <a:ext cx="8625299" cy="425711"/>
+            <a:off x="2935171" y="283210"/>
+            <a:ext cx="8625299" cy="425567"/>
           </a:xfrm>
           <a:prstGeom prst="bentConnector4">
             <a:avLst>
-              <a:gd name="adj1" fmla="val -2650"/>
-              <a:gd name="adj2" fmla="val 153698"/>
+              <a:gd name="adj1" fmla="val -1878"/>
+              <a:gd name="adj2" fmla="val 139488"/>
             </a:avLst>
           </a:prstGeom>
           <a:ln>
@@ -4942,19 +4945,18 @@
           <p:cNvCxnSpPr>
             <a:cxnSpLocks/>
             <a:stCxn id="531" idx="3"/>
-            <a:endCxn id="45" idx="0"/>
           </p:cNvCxnSpPr>
           <p:nvPr/>
         </p:nvCxnSpPr>
         <p:spPr>
           <a:xfrm flipH="1" flipV="1">
-            <a:off x="2935171" y="387506"/>
-            <a:ext cx="8620843" cy="662792"/>
+            <a:off x="2935171" y="283210"/>
+            <a:ext cx="8620843" cy="662648"/>
           </a:xfrm>
           <a:prstGeom prst="bentConnector4">
             <a:avLst>
               <a:gd name="adj1" fmla="val -2652"/>
-              <a:gd name="adj2" fmla="val 134490"/>
+              <a:gd name="adj2" fmla="val 134498"/>
             </a:avLst>
           </a:prstGeom>
           <a:ln>
@@ -4993,7 +4995,7 @@
         </p:nvSpPr>
         <p:spPr>
           <a:xfrm>
-            <a:off x="10271560" y="4303067"/>
+            <a:off x="10271560" y="4328547"/>
             <a:ext cx="1284454" cy="179084"/>
           </a:xfrm>
           <a:prstGeom prst="rect">
@@ -5064,7 +5066,7 @@
         </p:nvSpPr>
         <p:spPr>
           <a:xfrm>
-            <a:off x="10271559" y="4548694"/>
+            <a:off x="10271559" y="4574174"/>
             <a:ext cx="1284454" cy="179084"/>
           </a:xfrm>
           <a:prstGeom prst="rect">
@@ -5133,18 +5135,18 @@
           <p:cNvCxnSpPr>
             <a:cxnSpLocks/>
             <a:stCxn id="572" idx="3"/>
-            <a:endCxn id="1114" idx="3"/>
+            <a:endCxn id="155" idx="3"/>
           </p:cNvCxnSpPr>
           <p:nvPr/>
         </p:nvCxnSpPr>
         <p:spPr>
           <a:xfrm flipH="1">
-            <a:off x="8313728" y="4392609"/>
-            <a:ext cx="3242286" cy="1972055"/>
+            <a:off x="8302998" y="4418089"/>
+            <a:ext cx="3253016" cy="2129357"/>
           </a:xfrm>
           <a:prstGeom prst="bentConnector3">
             <a:avLst>
-              <a:gd name="adj1" fmla="val -7051"/>
+              <a:gd name="adj1" fmla="val -7027"/>
             </a:avLst>
           </a:prstGeom>
           <a:ln>
@@ -5180,18 +5182,20 @@
           </p:cNvPr>
           <p:cNvCxnSpPr>
             <a:cxnSpLocks/>
-            <a:stCxn id="573" idx="2"/>
-            <a:endCxn id="1114" idx="3"/>
+            <a:stCxn id="573" idx="3"/>
+            <a:endCxn id="153" idx="3"/>
           </p:cNvCxnSpPr>
           <p:nvPr/>
         </p:nvCxnSpPr>
         <p:spPr>
-          <a:xfrm rot="5400000">
-            <a:off x="8795314" y="4246192"/>
-            <a:ext cx="1636886" cy="2600058"/>
-          </a:xfrm>
-          <a:prstGeom prst="bentConnector2">
-            <a:avLst/>
+          <a:xfrm flipH="1">
+            <a:off x="8313728" y="4663716"/>
+            <a:ext cx="3242285" cy="1716620"/>
+          </a:xfrm>
+          <a:prstGeom prst="bentConnector3">
+            <a:avLst>
+              <a:gd name="adj1" fmla="val -3689"/>
+            </a:avLst>
           </a:prstGeom>
           <a:ln>
             <a:solidFill>
@@ -5232,7 +5236,7 @@
         </p:nvCxnSpPr>
         <p:spPr>
           <a:xfrm>
-            <a:off x="3256174" y="6364664"/>
+            <a:off x="3256174" y="6464893"/>
             <a:ext cx="3676758" cy="0"/>
           </a:xfrm>
           <a:prstGeom prst="straightConnector1">
@@ -5409,7 +5413,7 @@
         </p:nvCxnSpPr>
         <p:spPr>
           <a:xfrm rot="16200000" flipV="1">
-            <a:off x="5339060" y="1992786"/>
+            <a:off x="5339060" y="2018266"/>
             <a:ext cx="255032" cy="4439891"/>
           </a:xfrm>
           <a:prstGeom prst="bentConnector2">
@@ -5451,7 +5455,7 @@
         </p:nvSpPr>
         <p:spPr>
           <a:xfrm>
-            <a:off x="6530021" y="1461535"/>
+            <a:off x="6530021" y="1357095"/>
             <a:ext cx="1282674" cy="336608"/>
           </a:xfrm>
           <a:prstGeom prst="rect">
@@ -5522,7 +5526,7 @@
         </p:nvSpPr>
         <p:spPr>
           <a:xfrm>
-            <a:off x="7803018" y="959197"/>
+            <a:off x="7803018" y="854757"/>
             <a:ext cx="1282674" cy="336608"/>
           </a:xfrm>
           <a:prstGeom prst="rect">
@@ -5816,12 +5820,12 @@
         </p:nvCxnSpPr>
         <p:spPr>
           <a:xfrm flipV="1">
-            <a:off x="3254078" y="1127501"/>
+            <a:off x="3254078" y="1023061"/>
             <a:ext cx="4548940" cy="405983"/>
           </a:xfrm>
           <a:prstGeom prst="bentConnector3">
             <a:avLst>
-              <a:gd name="adj1" fmla="val 50000"/>
+              <a:gd name="adj1" fmla="val 39617"/>
             </a:avLst>
           </a:prstGeom>
           <a:ln>
@@ -5860,7 +5864,7 @@
         </p:nvSpPr>
         <p:spPr>
           <a:xfrm>
-            <a:off x="5400459" y="2223739"/>
+            <a:off x="5400459" y="2179132"/>
             <a:ext cx="1282674" cy="336608"/>
           </a:xfrm>
           <a:prstGeom prst="rect">
@@ -5919,29 +5923,27 @@
       </p:sp>
       <p:cxnSp>
         <p:nvCxnSpPr>
-          <p:cNvPr id="965" name="Connector: Elbow 964">
-            <a:extLst>
-              <a:ext uri="{FF2B5EF4-FFF2-40B4-BE49-F238E27FC236}">
-                <a16:creationId xmlns:a16="http://schemas.microsoft.com/office/drawing/2014/main" id="{D8C71EC0-B096-349A-90BF-508BA675FA65}"/>
+          <p:cNvPr id="977" name="Connector: Elbow 976">
+            <a:extLst>
+              <a:ext uri="{FF2B5EF4-FFF2-40B4-BE49-F238E27FC236}">
+                <a16:creationId xmlns:a16="http://schemas.microsoft.com/office/drawing/2014/main" id="{A32D01BA-59E1-EDBA-5D7C-378784D883E6}"/>
               </a:ext>
             </a:extLst>
           </p:cNvPr>
           <p:cNvCxnSpPr>
             <a:cxnSpLocks/>
-            <a:stCxn id="37" idx="3"/>
-            <a:endCxn id="531" idx="1"/>
+            <a:stCxn id="759" idx="0"/>
+            <a:endCxn id="530" idx="1"/>
           </p:cNvCxnSpPr>
           <p:nvPr/>
         </p:nvCxnSpPr>
         <p:spPr>
-          <a:xfrm>
-            <a:off x="9085692" y="1045779"/>
-            <a:ext cx="1185868" cy="4519"/>
-          </a:xfrm>
-          <a:prstGeom prst="bentConnector3">
-            <a:avLst>
-              <a:gd name="adj1" fmla="val 50000"/>
-            </a:avLst>
+          <a:xfrm rot="5400000" flipH="1" flipV="1">
+            <a:off x="9159754" y="-257048"/>
+            <a:ext cx="396407" cy="1827204"/>
+          </a:xfrm>
+          <a:prstGeom prst="bentConnector2">
+            <a:avLst/>
           </a:prstGeom>
           <a:ln>
             <a:solidFill>
@@ -5967,29 +5969,26 @@
       </p:cxnSp>
       <p:cxnSp>
         <p:nvCxnSpPr>
-          <p:cNvPr id="977" name="Connector: Elbow 976">
-            <a:extLst>
-              <a:ext uri="{FF2B5EF4-FFF2-40B4-BE49-F238E27FC236}">
-                <a16:creationId xmlns:a16="http://schemas.microsoft.com/office/drawing/2014/main" id="{A32D01BA-59E1-EDBA-5D7C-378784D883E6}"/>
+          <p:cNvPr id="980" name="Connector: Elbow 979">
+            <a:extLst>
+              <a:ext uri="{FF2B5EF4-FFF2-40B4-BE49-F238E27FC236}">
+                <a16:creationId xmlns:a16="http://schemas.microsoft.com/office/drawing/2014/main" id="{84F2F6FF-20FE-FC98-DBCD-F70C3E2E4A5A}"/>
               </a:ext>
             </a:extLst>
           </p:cNvPr>
           <p:cNvCxnSpPr>
             <a:cxnSpLocks/>
-            <a:stCxn id="37" idx="3"/>
-            <a:endCxn id="530" idx="1"/>
+            <a:endCxn id="529" idx="1"/>
           </p:cNvCxnSpPr>
           <p:nvPr/>
         </p:nvCxnSpPr>
         <p:spPr>
-          <a:xfrm flipV="1">
-            <a:off x="9085692" y="562790"/>
-            <a:ext cx="1185867" cy="482989"/>
-          </a:xfrm>
-          <a:prstGeom prst="bentConnector3">
-            <a:avLst>
-              <a:gd name="adj1" fmla="val 50000"/>
-            </a:avLst>
+          <a:xfrm rot="5400000" flipH="1" flipV="1">
+            <a:off x="9555793" y="134412"/>
+            <a:ext cx="145858" cy="1294588"/>
+          </a:xfrm>
+          <a:prstGeom prst="bentConnector2">
+            <a:avLst/>
           </a:prstGeom>
           <a:ln>
             <a:solidFill>
@@ -6013,54 +6012,6 @@
           </a:fontRef>
         </p:style>
       </p:cxnSp>
-      <p:cxnSp>
-        <p:nvCxnSpPr>
-          <p:cNvPr id="980" name="Connector: Elbow 979">
-            <a:extLst>
-              <a:ext uri="{FF2B5EF4-FFF2-40B4-BE49-F238E27FC236}">
-                <a16:creationId xmlns:a16="http://schemas.microsoft.com/office/drawing/2014/main" id="{84F2F6FF-20FE-FC98-DBCD-F70C3E2E4A5A}"/>
-              </a:ext>
-            </a:extLst>
-          </p:cNvPr>
-          <p:cNvCxnSpPr>
-            <a:cxnSpLocks/>
-            <a:stCxn id="37" idx="3"/>
-            <a:endCxn id="529" idx="1"/>
-          </p:cNvCxnSpPr>
-          <p:nvPr/>
-        </p:nvCxnSpPr>
-        <p:spPr>
-          <a:xfrm flipV="1">
-            <a:off x="9085692" y="813217"/>
-            <a:ext cx="1190324" cy="232562"/>
-          </a:xfrm>
-          <a:prstGeom prst="bentConnector3">
-            <a:avLst>
-              <a:gd name="adj1" fmla="val 50000"/>
-            </a:avLst>
-          </a:prstGeom>
-          <a:ln>
-            <a:solidFill>
-              <a:schemeClr val="accent5"/>
-            </a:solidFill>
-            <a:tailEnd type="none"/>
-          </a:ln>
-        </p:spPr>
-        <p:style>
-          <a:lnRef idx="2">
-            <a:schemeClr val="accent1"/>
-          </a:lnRef>
-          <a:fillRef idx="0">
-            <a:schemeClr val="accent1"/>
-          </a:fillRef>
-          <a:effectRef idx="1">
-            <a:schemeClr val="accent1"/>
-          </a:effectRef>
-          <a:fontRef idx="minor">
-            <a:schemeClr val="tx1"/>
-          </a:fontRef>
-        </p:style>
-      </p:cxnSp>
       <p:sp>
         <p:nvSpPr>
           <p:cNvPr id="995" name="Rectangle 994">
@@ -6075,7 +6026,7 @@
         </p:nvSpPr>
         <p:spPr>
           <a:xfrm>
-            <a:off x="8412940" y="2343555"/>
+            <a:off x="8412940" y="2298948"/>
             <a:ext cx="1282674" cy="336608"/>
           </a:xfrm>
           <a:prstGeom prst="rect">
@@ -6157,7 +6108,7 @@
         </p:nvSpPr>
         <p:spPr>
           <a:xfrm>
-            <a:off x="8412940" y="2733347"/>
+            <a:off x="8412940" y="2688740"/>
             <a:ext cx="1282674" cy="336608"/>
           </a:xfrm>
           <a:prstGeom prst="rect">
@@ -6239,7 +6190,7 @@
         </p:nvSpPr>
         <p:spPr>
           <a:xfrm>
-            <a:off x="8412940" y="3117357"/>
+            <a:off x="8412940" y="3072750"/>
             <a:ext cx="1282674" cy="336608"/>
           </a:xfrm>
           <a:prstGeom prst="rect">
@@ -6321,7 +6272,7 @@
         </p:nvSpPr>
         <p:spPr>
           <a:xfrm>
-            <a:off x="3593831" y="3197818"/>
+            <a:off x="3593831" y="3153211"/>
             <a:ext cx="1284454" cy="179084"/>
           </a:xfrm>
           <a:prstGeom prst="rect">
@@ -6392,7 +6343,7 @@
         </p:nvSpPr>
         <p:spPr>
           <a:xfrm>
-            <a:off x="6778655" y="3128695"/>
+            <a:off x="6778655" y="3084088"/>
             <a:ext cx="1289324" cy="313932"/>
           </a:xfrm>
           <a:prstGeom prst="flowChartMagneticDisk">
@@ -6472,7 +6423,7 @@
         </p:nvCxnSpPr>
         <p:spPr>
           <a:xfrm flipH="1">
-            <a:off x="3246630" y="2392043"/>
+            <a:off x="3246630" y="2347436"/>
             <a:ext cx="2153829" cy="0"/>
           </a:xfrm>
           <a:prstGeom prst="straightConnector1">
@@ -6514,7 +6465,7 @@
         </p:nvSpPr>
         <p:spPr>
           <a:xfrm>
-            <a:off x="6783866" y="2581234"/>
+            <a:off x="6783866" y="2536627"/>
             <a:ext cx="1282674" cy="336608"/>
           </a:xfrm>
           <a:prstGeom prst="rect">
@@ -6585,7 +6536,7 @@
         </p:nvSpPr>
         <p:spPr>
           <a:xfrm>
-            <a:off x="5400459" y="2876870"/>
+            <a:off x="5400459" y="2832263"/>
             <a:ext cx="1282674" cy="336608"/>
           </a:xfrm>
           <a:prstGeom prst="rect">
@@ -6667,7 +6618,7 @@
         </p:nvSpPr>
         <p:spPr>
           <a:xfrm>
-            <a:off x="7386417" y="4340248"/>
+            <a:off x="7386417" y="4365728"/>
             <a:ext cx="1282674" cy="336608"/>
           </a:xfrm>
           <a:prstGeom prst="rect">
@@ -6738,7 +6689,7 @@
         </p:nvSpPr>
         <p:spPr>
           <a:xfrm>
-            <a:off x="5643335" y="4348376"/>
+            <a:off x="5643335" y="4373856"/>
             <a:ext cx="1289324" cy="313932"/>
           </a:xfrm>
           <a:prstGeom prst="flowChartMagneticDisk">
@@ -6813,7 +6764,7 @@
         </p:nvCxnSpPr>
         <p:spPr>
           <a:xfrm flipH="1" flipV="1">
-            <a:off x="6932659" y="4505342"/>
+            <a:off x="6932659" y="4530822"/>
             <a:ext cx="453758" cy="3210"/>
           </a:xfrm>
           <a:prstGeom prst="straightConnector1">
@@ -6859,7 +6810,7 @@
         </p:nvCxnSpPr>
         <p:spPr>
           <a:xfrm flipV="1">
-            <a:off x="3246630" y="4676856"/>
+            <a:off x="3246630" y="4702336"/>
             <a:ext cx="4781124" cy="341154"/>
           </a:xfrm>
           <a:prstGeom prst="bentConnector2">
@@ -6898,15 +6849,15 @@
           </p:cNvPr>
           <p:cNvCxnSpPr>
             <a:cxnSpLocks/>
-            <a:stCxn id="1068" idx="3"/>
+            <a:stCxn id="162" idx="3"/>
             <a:endCxn id="572" idx="1"/>
           </p:cNvCxnSpPr>
           <p:nvPr/>
         </p:nvCxnSpPr>
         <p:spPr>
           <a:xfrm flipV="1">
-            <a:off x="8669091" y="4392609"/>
-            <a:ext cx="1602469" cy="115943"/>
+            <a:off x="8669091" y="4418089"/>
+            <a:ext cx="1602469" cy="61722"/>
           </a:xfrm>
           <a:prstGeom prst="bentConnector3">
             <a:avLst>
@@ -6946,15 +6897,15 @@
           </p:cNvPr>
           <p:cNvCxnSpPr>
             <a:cxnSpLocks/>
-            <a:stCxn id="1068" idx="3"/>
+            <a:stCxn id="164" idx="3"/>
             <a:endCxn id="573" idx="1"/>
           </p:cNvCxnSpPr>
           <p:nvPr/>
         </p:nvCxnSpPr>
         <p:spPr>
           <a:xfrm>
-            <a:off x="8669091" y="4508552"/>
-            <a:ext cx="1602468" cy="129684"/>
+            <a:off x="8669091" y="4608319"/>
+            <a:ext cx="1602468" cy="55397"/>
           </a:xfrm>
           <a:prstGeom prst="bentConnector3">
             <a:avLst>
@@ -6997,7 +6948,7 @@
         </p:nvSpPr>
         <p:spPr>
           <a:xfrm>
-            <a:off x="6932932" y="6196360"/>
+            <a:off x="6932932" y="6296589"/>
             <a:ext cx="1380796" cy="336608"/>
           </a:xfrm>
           <a:prstGeom prst="rect">
@@ -7082,7 +7033,7 @@
         </p:nvCxnSpPr>
         <p:spPr>
           <a:xfrm rot="16200000" flipV="1">
-            <a:off x="5178045" y="3751075"/>
+            <a:off x="5178045" y="3851304"/>
             <a:ext cx="513870" cy="4376700"/>
           </a:xfrm>
           <a:prstGeom prst="bentConnector2">
@@ -7121,14 +7072,14 @@
           </p:cNvPr>
           <p:cNvCxnSpPr>
             <a:cxnSpLocks/>
-            <a:stCxn id="1114" idx="0"/>
+            <a:stCxn id="175" idx="0"/>
           </p:cNvCxnSpPr>
           <p:nvPr/>
         </p:nvCxnSpPr>
         <p:spPr>
           <a:xfrm rot="16200000" flipV="1">
-            <a:off x="5312344" y="3885374"/>
-            <a:ext cx="254816" cy="4367156"/>
+            <a:off x="5057562" y="4226279"/>
+            <a:ext cx="251454" cy="3873320"/>
           </a:xfrm>
           <a:prstGeom prst="bentConnector2">
             <a:avLst/>
@@ -7276,7 +7227,7 @@
           <a:p>
             <a:pPr algn="ctr"/>
             <a:r>
-              <a:rPr lang="en-US" sz="1000" dirty="0">
+              <a:rPr lang="en-US" sz="1000" b="1" dirty="0">
                 <a:solidFill>
                   <a:schemeClr val="tx1">
                     <a:lumMod val="85000"/>
@@ -7505,7 +7456,7 @@
         </p:nvCxnSpPr>
         <p:spPr>
           <a:xfrm rot="5400000">
-            <a:off x="8007779" y="1095367"/>
+            <a:off x="8007779" y="990927"/>
             <a:ext cx="236139" cy="637015"/>
           </a:xfrm>
           <a:prstGeom prst="bentConnector2">
@@ -7552,12 +7503,12 @@
         </p:nvCxnSpPr>
         <p:spPr>
           <a:xfrm>
-            <a:off x="6683133" y="2392043"/>
+            <a:off x="6683133" y="2347436"/>
             <a:ext cx="1725350" cy="422351"/>
           </a:xfrm>
           <a:prstGeom prst="bentConnector3">
             <a:avLst>
-              <a:gd name="adj1" fmla="val 85296"/>
+              <a:gd name="adj1" fmla="val 94313"/>
             </a:avLst>
           </a:prstGeom>
           <a:ln w="12700">
@@ -7595,15 +7546,15 @@
           </p:cNvPr>
           <p:cNvCxnSpPr>
             <a:cxnSpLocks/>
-            <a:stCxn id="886" idx="3"/>
+            <a:stCxn id="9" idx="3"/>
             <a:endCxn id="893" idx="0"/>
           </p:cNvCxnSpPr>
           <p:nvPr/>
         </p:nvCxnSpPr>
         <p:spPr>
           <a:xfrm>
-            <a:off x="6683133" y="2392043"/>
-            <a:ext cx="742070" cy="189191"/>
+            <a:off x="6678676" y="2449626"/>
+            <a:ext cx="746527" cy="87001"/>
           </a:xfrm>
           <a:prstGeom prst="bentConnector2">
             <a:avLst/>
@@ -7634,28 +7585,28 @@
       </p:cxnSp>
       <p:cxnSp>
         <p:nvCxnSpPr>
-          <p:cNvPr id="1326" name="Connector: Elbow 1325">
-            <a:extLst>
-              <a:ext uri="{FF2B5EF4-FFF2-40B4-BE49-F238E27FC236}">
-                <a16:creationId xmlns:a16="http://schemas.microsoft.com/office/drawing/2014/main" id="{86AD4E52-D9D9-B2BC-2D5B-2634724174B3}"/>
+          <p:cNvPr id="1329" name="Connector: Elbow 1328">
+            <a:extLst>
+              <a:ext uri="{FF2B5EF4-FFF2-40B4-BE49-F238E27FC236}">
+                <a16:creationId xmlns:a16="http://schemas.microsoft.com/office/drawing/2014/main" id="{D7469452-103B-D3E1-8A44-D04AF0F68847}"/>
               </a:ext>
             </a:extLst>
           </p:cNvPr>
           <p:cNvCxnSpPr>
             <a:cxnSpLocks/>
             <a:stCxn id="886" idx="3"/>
-            <a:endCxn id="1553" idx="1"/>
+            <a:endCxn id="999" idx="1"/>
           </p:cNvCxnSpPr>
           <p:nvPr/>
         </p:nvCxnSpPr>
         <p:spPr>
-          <a:xfrm flipV="1">
-            <a:off x="6683133" y="2390506"/>
-            <a:ext cx="1725350" cy="1537"/>
+          <a:xfrm>
+            <a:off x="6683133" y="2347436"/>
+            <a:ext cx="1729807" cy="893618"/>
           </a:xfrm>
           <a:prstGeom prst="bentConnector3">
             <a:avLst>
-              <a:gd name="adj1" fmla="val 46841"/>
+              <a:gd name="adj1" fmla="val 87994"/>
             </a:avLst>
           </a:prstGeom>
           <a:ln w="12700">
@@ -7682,56 +7633,6 @@
           </a:fontRef>
         </p:style>
       </p:cxnSp>
-      <p:cxnSp>
-        <p:nvCxnSpPr>
-          <p:cNvPr id="1329" name="Connector: Elbow 1328">
-            <a:extLst>
-              <a:ext uri="{FF2B5EF4-FFF2-40B4-BE49-F238E27FC236}">
-                <a16:creationId xmlns:a16="http://schemas.microsoft.com/office/drawing/2014/main" id="{D7469452-103B-D3E1-8A44-D04AF0F68847}"/>
-              </a:ext>
-            </a:extLst>
-          </p:cNvPr>
-          <p:cNvCxnSpPr>
-            <a:cxnSpLocks/>
-            <a:stCxn id="886" idx="3"/>
-            <a:endCxn id="1358" idx="1"/>
-          </p:cNvCxnSpPr>
-          <p:nvPr/>
-        </p:nvCxnSpPr>
-        <p:spPr>
-          <a:xfrm>
-            <a:off x="6683133" y="2392043"/>
-            <a:ext cx="1729807" cy="989801"/>
-          </a:xfrm>
-          <a:prstGeom prst="bentConnector3">
-            <a:avLst>
-              <a:gd name="adj1" fmla="val 92070"/>
-            </a:avLst>
-          </a:prstGeom>
-          <a:ln w="12700">
-            <a:solidFill>
-              <a:schemeClr val="accent5"/>
-            </a:solidFill>
-            <a:prstDash val="dash"/>
-            <a:headEnd type="triangle"/>
-            <a:tailEnd type="none"/>
-          </a:ln>
-        </p:spPr>
-        <p:style>
-          <a:lnRef idx="2">
-            <a:schemeClr val="accent1"/>
-          </a:lnRef>
-          <a:fillRef idx="0">
-            <a:schemeClr val="accent1"/>
-          </a:fillRef>
-          <a:effectRef idx="1">
-            <a:schemeClr val="accent1"/>
-          </a:effectRef>
-          <a:fontRef idx="minor">
-            <a:schemeClr val="tx1"/>
-          </a:fontRef>
-        </p:style>
-      </p:cxnSp>
       <p:sp>
         <p:nvSpPr>
           <p:cNvPr id="1355" name="Rectangle 1354">
@@ -7746,61 +7647,7 @@
         </p:nvSpPr>
         <p:spPr>
           <a:xfrm>
-            <a:off x="8412940" y="3136296"/>
-            <a:ext cx="219885" cy="112743"/>
-          </a:xfrm>
-          <a:prstGeom prst="rect">
-            <a:avLst/>
-          </a:prstGeom>
-          <a:solidFill>
-            <a:schemeClr val="accent1">
-              <a:alpha val="0"/>
-            </a:schemeClr>
-          </a:solidFill>
-          <a:ln>
-            <a:noFill/>
-          </a:ln>
-        </p:spPr>
-        <p:style>
-          <a:lnRef idx="2">
-            <a:schemeClr val="accent1">
-              <a:shade val="15000"/>
-            </a:schemeClr>
-          </a:lnRef>
-          <a:fillRef idx="1">
-            <a:schemeClr val="accent1"/>
-          </a:fillRef>
-          <a:effectRef idx="0">
-            <a:schemeClr val="accent1"/>
-          </a:effectRef>
-          <a:fontRef idx="minor">
-            <a:schemeClr val="lt1"/>
-          </a:fontRef>
-        </p:style>
-        <p:txBody>
-          <a:bodyPr rtlCol="0" anchor="ctr"/>
-          <a:lstStyle/>
-          <a:p>
-            <a:pPr algn="ctr"/>
-            <a:endParaRPr lang="en-US"/>
-          </a:p>
-        </p:txBody>
-      </p:sp>
-      <p:sp>
-        <p:nvSpPr>
-          <p:cNvPr id="1358" name="Rectangle 1357">
-            <a:extLst>
-              <a:ext uri="{FF2B5EF4-FFF2-40B4-BE49-F238E27FC236}">
-                <a16:creationId xmlns:a16="http://schemas.microsoft.com/office/drawing/2014/main" id="{922F92C0-8BB9-C45E-F168-1E5F14C97DEB}"/>
-              </a:ext>
-            </a:extLst>
-          </p:cNvPr>
-          <p:cNvSpPr/>
-          <p:nvPr/>
-        </p:nvSpPr>
-        <p:spPr>
-          <a:xfrm>
-            <a:off x="8412940" y="3325472"/>
+            <a:off x="8412940" y="3091689"/>
             <a:ext cx="219885" cy="112743"/>
           </a:xfrm>
           <a:prstGeom prst="rect">
@@ -8034,7 +7881,7 @@
         </p:nvCxnSpPr>
         <p:spPr>
           <a:xfrm flipV="1">
-            <a:off x="6041796" y="2560347"/>
+            <a:off x="6041796" y="2515740"/>
             <a:ext cx="0" cy="316523"/>
           </a:xfrm>
           <a:prstGeom prst="straightConnector1">
@@ -8075,14 +7922,14 @@
           <p:cNvCxnSpPr>
             <a:cxnSpLocks/>
             <a:stCxn id="893" idx="1"/>
-            <a:endCxn id="1064" idx="0"/>
+            <a:endCxn id="5" idx="0"/>
           </p:cNvCxnSpPr>
           <p:nvPr/>
         </p:nvCxnSpPr>
         <p:spPr>
           <a:xfrm rot="10800000" flipV="1">
-            <a:off x="6041796" y="2749538"/>
-            <a:ext cx="742070" cy="127332"/>
+            <a:off x="6371152" y="2704930"/>
+            <a:ext cx="412714" cy="112129"/>
           </a:xfrm>
           <a:prstGeom prst="bentConnector2">
             <a:avLst/>
@@ -8129,7 +7976,7 @@
         </p:nvCxnSpPr>
         <p:spPr>
           <a:xfrm rot="10800000" flipV="1">
-            <a:off x="7423317" y="2952627"/>
+            <a:off x="7423317" y="2908020"/>
             <a:ext cx="985166" cy="176068"/>
           </a:xfrm>
           <a:prstGeom prst="bentConnector2">
@@ -8173,7 +8020,7 @@
         </p:nvSpPr>
         <p:spPr>
           <a:xfrm>
-            <a:off x="8408483" y="2896255"/>
+            <a:off x="8408483" y="2851648"/>
             <a:ext cx="219885" cy="112743"/>
           </a:xfrm>
           <a:prstGeom prst="rect">
@@ -8227,62 +8074,8 @@
         </p:nvSpPr>
         <p:spPr>
           <a:xfrm>
-            <a:off x="8408483" y="2758022"/>
+            <a:off x="8408483" y="2713415"/>
             <a:ext cx="219885" cy="112743"/>
-          </a:xfrm>
-          <a:prstGeom prst="rect">
-            <a:avLst/>
-          </a:prstGeom>
-          <a:solidFill>
-            <a:schemeClr val="accent1">
-              <a:alpha val="0"/>
-            </a:schemeClr>
-          </a:solidFill>
-          <a:ln>
-            <a:noFill/>
-          </a:ln>
-        </p:spPr>
-        <p:style>
-          <a:lnRef idx="2">
-            <a:schemeClr val="accent1">
-              <a:shade val="15000"/>
-            </a:schemeClr>
-          </a:lnRef>
-          <a:fillRef idx="1">
-            <a:schemeClr val="accent1"/>
-          </a:fillRef>
-          <a:effectRef idx="0">
-            <a:schemeClr val="accent1"/>
-          </a:effectRef>
-          <a:fontRef idx="minor">
-            <a:schemeClr val="lt1"/>
-          </a:fontRef>
-        </p:style>
-        <p:txBody>
-          <a:bodyPr rtlCol="0" anchor="ctr"/>
-          <a:lstStyle/>
-          <a:p>
-            <a:pPr algn="ctr"/>
-            <a:endParaRPr lang="en-US"/>
-          </a:p>
-        </p:txBody>
-      </p:sp>
-      <p:sp>
-        <p:nvSpPr>
-          <p:cNvPr id="1553" name="Rectangle 1552">
-            <a:extLst>
-              <a:ext uri="{FF2B5EF4-FFF2-40B4-BE49-F238E27FC236}">
-                <a16:creationId xmlns:a16="http://schemas.microsoft.com/office/drawing/2014/main" id="{5E0C3457-4443-DA1B-6629-696B4FA4EB98}"/>
-              </a:ext>
-            </a:extLst>
-          </p:cNvPr>
-          <p:cNvSpPr/>
-          <p:nvPr/>
-        </p:nvSpPr>
-        <p:spPr>
-          <a:xfrm>
-            <a:off x="8408483" y="2358815"/>
-            <a:ext cx="219885" cy="63381"/>
           </a:xfrm>
           <a:prstGeom prst="rect">
             <a:avLst/>
@@ -8339,12 +8132,12 @@
         </p:nvCxnSpPr>
         <p:spPr>
           <a:xfrm rot="16200000" flipH="1">
-            <a:off x="6304593" y="704280"/>
-            <a:ext cx="1510529" cy="3988839"/>
+            <a:off x="6298064" y="653144"/>
+            <a:ext cx="1523587" cy="3988839"/>
           </a:xfrm>
           <a:prstGeom prst="bentConnector3">
             <a:avLst>
-              <a:gd name="adj1" fmla="val 108319"/>
+              <a:gd name="adj1" fmla="val 111253"/>
             </a:avLst>
           </a:prstGeom>
           <a:ln>
@@ -8383,7 +8176,7 @@
         </p:nvSpPr>
         <p:spPr>
           <a:xfrm>
-            <a:off x="4943916" y="1739666"/>
+            <a:off x="4943916" y="1682001"/>
             <a:ext cx="243044" cy="203770"/>
           </a:xfrm>
           <a:prstGeom prst="rect">
@@ -8439,7 +8232,7 @@
         </p:nvCxnSpPr>
         <p:spPr>
           <a:xfrm>
-            <a:off x="4873963" y="1610110"/>
+            <a:off x="4873963" y="1505670"/>
             <a:ext cx="1656058" cy="0"/>
           </a:xfrm>
           <a:prstGeom prst="straightConnector1">
@@ -8481,7 +8274,7 @@
         </p:nvSpPr>
         <p:spPr>
           <a:xfrm>
-            <a:off x="3590553" y="4941087"/>
+            <a:off x="3590553" y="4966567"/>
             <a:ext cx="1284454" cy="179084"/>
           </a:xfrm>
           <a:prstGeom prst="rect">
@@ -8552,7 +8345,7 @@
         </p:nvSpPr>
         <p:spPr>
           <a:xfrm>
-            <a:off x="7576578" y="4340248"/>
+            <a:off x="7576578" y="4365728"/>
             <a:ext cx="219885" cy="63885"/>
           </a:xfrm>
           <a:prstGeom prst="rect">
@@ -8606,7 +8399,7 @@
         </p:nvSpPr>
         <p:spPr>
           <a:xfrm>
-            <a:off x="3593831" y="3993158"/>
+            <a:off x="3593831" y="4018638"/>
             <a:ext cx="1284454" cy="179084"/>
           </a:xfrm>
           <a:prstGeom prst="rect">
@@ -8677,7 +8470,7 @@
         </p:nvSpPr>
         <p:spPr>
           <a:xfrm>
-            <a:off x="8193055" y="4340248"/>
+            <a:off x="8193055" y="4365728"/>
             <a:ext cx="219885" cy="89542"/>
           </a:xfrm>
           <a:prstGeom prst="rect">
@@ -8731,7 +8524,7 @@
         </p:nvSpPr>
         <p:spPr>
           <a:xfrm>
-            <a:off x="3590553" y="6275122"/>
+            <a:off x="3590553" y="6375351"/>
             <a:ext cx="1284454" cy="179084"/>
           </a:xfrm>
           <a:prstGeom prst="rect">
@@ -8802,7 +8595,7 @@
         </p:nvSpPr>
         <p:spPr>
           <a:xfrm>
-            <a:off x="3589510" y="5595538"/>
+            <a:off x="3589510" y="5695767"/>
             <a:ext cx="1284454" cy="179084"/>
           </a:xfrm>
           <a:prstGeom prst="rect">
@@ -8873,7 +8666,7 @@
         </p:nvSpPr>
         <p:spPr>
           <a:xfrm>
-            <a:off x="3589509" y="5841165"/>
+            <a:off x="3589509" y="5941394"/>
             <a:ext cx="1284454" cy="179084"/>
           </a:xfrm>
           <a:prstGeom prst="rect">
@@ -8944,7 +8737,7 @@
         </p:nvSpPr>
         <p:spPr>
           <a:xfrm>
-            <a:off x="3593831" y="2308822"/>
+            <a:off x="3593831" y="2264215"/>
             <a:ext cx="1284454" cy="179084"/>
           </a:xfrm>
           <a:prstGeom prst="rect">
@@ -9015,7 +8808,7 @@
         </p:nvSpPr>
         <p:spPr>
           <a:xfrm>
-            <a:off x="3589509" y="1447711"/>
+            <a:off x="3589509" y="1343271"/>
             <a:ext cx="1284454" cy="179084"/>
           </a:xfrm>
           <a:prstGeom prst="rect">
@@ -9079,7 +8872,7 @@
         </p:nvSpPr>
         <p:spPr>
           <a:xfrm>
-            <a:off x="3593832" y="630114"/>
+            <a:off x="3593832" y="525674"/>
             <a:ext cx="1284454" cy="179084"/>
           </a:xfrm>
           <a:prstGeom prst="rect">
@@ -9150,7 +8943,7 @@
         </p:nvSpPr>
         <p:spPr>
           <a:xfrm>
-            <a:off x="3593831" y="903336"/>
+            <a:off x="3593831" y="798896"/>
             <a:ext cx="1284454" cy="179084"/>
           </a:xfrm>
           <a:prstGeom prst="rect">
@@ -9221,7 +9014,7 @@
         </p:nvSpPr>
         <p:spPr>
           <a:xfrm>
-            <a:off x="3593831" y="1175510"/>
+            <a:off x="3593831" y="1071070"/>
             <a:ext cx="1284454" cy="179084"/>
           </a:xfrm>
           <a:prstGeom prst="rect">
@@ -9846,7 +9639,7 @@
         </p:nvSpPr>
         <p:spPr>
           <a:xfrm>
-            <a:off x="8834392" y="964057"/>
+            <a:off x="8834392" y="859617"/>
             <a:ext cx="251300" cy="163444"/>
           </a:xfrm>
           <a:prstGeom prst="rect">
@@ -9886,6 +9679,528 @@
           </a:p>
         </p:txBody>
       </p:sp>
+      <p:sp>
+        <p:nvSpPr>
+          <p:cNvPr id="5" name="Rectangle 4">
+            <a:extLst>
+              <a:ext uri="{FF2B5EF4-FFF2-40B4-BE49-F238E27FC236}">
+                <a16:creationId xmlns:a16="http://schemas.microsoft.com/office/drawing/2014/main" id="{F374DA69-26F8-DC95-1789-4C174DEFE7F4}"/>
+              </a:ext>
+            </a:extLst>
+          </p:cNvPr>
+          <p:cNvSpPr/>
+          <p:nvPr/>
+        </p:nvSpPr>
+        <p:spPr>
+          <a:xfrm>
+            <a:off x="6261209" y="2817060"/>
+            <a:ext cx="219885" cy="112743"/>
+          </a:xfrm>
+          <a:prstGeom prst="rect">
+            <a:avLst/>
+          </a:prstGeom>
+          <a:solidFill>
+            <a:schemeClr val="accent1">
+              <a:alpha val="0"/>
+            </a:schemeClr>
+          </a:solidFill>
+          <a:ln>
+            <a:noFill/>
+          </a:ln>
+        </p:spPr>
+        <p:style>
+          <a:lnRef idx="2">
+            <a:schemeClr val="accent1">
+              <a:shade val="15000"/>
+            </a:schemeClr>
+          </a:lnRef>
+          <a:fillRef idx="1">
+            <a:schemeClr val="accent1"/>
+          </a:fillRef>
+          <a:effectRef idx="0">
+            <a:schemeClr val="accent1"/>
+          </a:effectRef>
+          <a:fontRef idx="minor">
+            <a:schemeClr val="lt1"/>
+          </a:fontRef>
+        </p:style>
+        <p:txBody>
+          <a:bodyPr rtlCol="0" anchor="ctr"/>
+          <a:lstStyle/>
+          <a:p>
+            <a:pPr algn="ctr"/>
+            <a:endParaRPr lang="en-US"/>
+          </a:p>
+        </p:txBody>
+      </p:sp>
+      <p:sp>
+        <p:nvSpPr>
+          <p:cNvPr id="9" name="Rectangle 8">
+            <a:extLst>
+              <a:ext uri="{FF2B5EF4-FFF2-40B4-BE49-F238E27FC236}">
+                <a16:creationId xmlns:a16="http://schemas.microsoft.com/office/drawing/2014/main" id="{C8BF20F5-DD2A-AEA4-643C-0E6846392F78}"/>
+              </a:ext>
+            </a:extLst>
+          </p:cNvPr>
+          <p:cNvSpPr/>
+          <p:nvPr/>
+        </p:nvSpPr>
+        <p:spPr>
+          <a:xfrm>
+            <a:off x="6442929" y="2393796"/>
+            <a:ext cx="235747" cy="111660"/>
+          </a:xfrm>
+          <a:prstGeom prst="rect">
+            <a:avLst/>
+          </a:prstGeom>
+          <a:solidFill>
+            <a:schemeClr val="accent1">
+              <a:alpha val="0"/>
+            </a:schemeClr>
+          </a:solidFill>
+          <a:ln>
+            <a:noFill/>
+          </a:ln>
+        </p:spPr>
+        <p:style>
+          <a:lnRef idx="2">
+            <a:schemeClr val="accent1">
+              <a:shade val="15000"/>
+            </a:schemeClr>
+          </a:lnRef>
+          <a:fillRef idx="1">
+            <a:schemeClr val="accent1"/>
+          </a:fillRef>
+          <a:effectRef idx="0">
+            <a:schemeClr val="accent1"/>
+          </a:effectRef>
+          <a:fontRef idx="minor">
+            <a:schemeClr val="lt1"/>
+          </a:fontRef>
+        </p:style>
+        <p:txBody>
+          <a:bodyPr rtlCol="0" anchor="ctr"/>
+          <a:lstStyle/>
+          <a:p>
+            <a:pPr algn="ctr"/>
+            <a:endParaRPr lang="en-US"/>
+          </a:p>
+        </p:txBody>
+      </p:sp>
+      <p:sp>
+        <p:nvSpPr>
+          <p:cNvPr id="50" name="Rectangle 49">
+            <a:extLst>
+              <a:ext uri="{FF2B5EF4-FFF2-40B4-BE49-F238E27FC236}">
+                <a16:creationId xmlns:a16="http://schemas.microsoft.com/office/drawing/2014/main" id="{7E536E35-1FA2-D0C7-BDA6-C4E18AB8D472}"/>
+              </a:ext>
+            </a:extLst>
+          </p:cNvPr>
+          <p:cNvSpPr/>
+          <p:nvPr/>
+        </p:nvSpPr>
+        <p:spPr>
+          <a:xfrm>
+            <a:off x="8817212" y="1011041"/>
+            <a:ext cx="268480" cy="163444"/>
+          </a:xfrm>
+          <a:prstGeom prst="rect">
+            <a:avLst/>
+          </a:prstGeom>
+          <a:solidFill>
+            <a:schemeClr val="accent1">
+              <a:alpha val="0"/>
+            </a:schemeClr>
+          </a:solidFill>
+          <a:ln>
+            <a:noFill/>
+          </a:ln>
+        </p:spPr>
+        <p:style>
+          <a:lnRef idx="2">
+            <a:schemeClr val="accent1">
+              <a:shade val="15000"/>
+            </a:schemeClr>
+          </a:lnRef>
+          <a:fillRef idx="1">
+            <a:schemeClr val="accent1"/>
+          </a:fillRef>
+          <a:effectRef idx="0">
+            <a:schemeClr val="accent1"/>
+          </a:effectRef>
+          <a:fontRef idx="minor">
+            <a:schemeClr val="lt1"/>
+          </a:fontRef>
+        </p:style>
+        <p:txBody>
+          <a:bodyPr rtlCol="0" anchor="ctr"/>
+          <a:lstStyle/>
+          <a:p>
+            <a:pPr algn="ctr"/>
+            <a:endParaRPr lang="en-US"/>
+          </a:p>
+        </p:txBody>
+      </p:sp>
+      <p:cxnSp>
+        <p:nvCxnSpPr>
+          <p:cNvPr id="127" name="Straight Arrow Connector 126">
+            <a:extLst>
+              <a:ext uri="{FF2B5EF4-FFF2-40B4-BE49-F238E27FC236}">
+                <a16:creationId xmlns:a16="http://schemas.microsoft.com/office/drawing/2014/main" id="{E02B4152-E255-953C-BFC4-7F4DAED1C2AE}"/>
+              </a:ext>
+            </a:extLst>
+          </p:cNvPr>
+          <p:cNvCxnSpPr>
+            <a:cxnSpLocks/>
+            <a:endCxn id="886" idx="3"/>
+          </p:cNvCxnSpPr>
+          <p:nvPr/>
+        </p:nvCxnSpPr>
+        <p:spPr>
+          <a:xfrm flipH="1">
+            <a:off x="6683133" y="2347436"/>
+            <a:ext cx="1725350" cy="0"/>
+          </a:xfrm>
+          <a:prstGeom prst="straightConnector1">
+            <a:avLst/>
+          </a:prstGeom>
+          <a:ln w="12700">
+            <a:solidFill>
+              <a:schemeClr val="accent5"/>
+            </a:solidFill>
+            <a:prstDash val="dash"/>
+            <a:tailEnd type="triangle"/>
+          </a:ln>
+        </p:spPr>
+        <p:style>
+          <a:lnRef idx="2">
+            <a:schemeClr val="accent1"/>
+          </a:lnRef>
+          <a:fillRef idx="0">
+            <a:schemeClr val="accent1"/>
+          </a:fillRef>
+          <a:effectRef idx="1">
+            <a:schemeClr val="accent1"/>
+          </a:effectRef>
+          <a:fontRef idx="minor">
+            <a:schemeClr val="tx1"/>
+          </a:fontRef>
+        </p:style>
+      </p:cxnSp>
+      <p:sp>
+        <p:nvSpPr>
+          <p:cNvPr id="153" name="Rectangle 152">
+            <a:extLst>
+              <a:ext uri="{FF2B5EF4-FFF2-40B4-BE49-F238E27FC236}">
+                <a16:creationId xmlns:a16="http://schemas.microsoft.com/office/drawing/2014/main" id="{37321861-81BF-BE1F-1717-4EE077DD43A3}"/>
+              </a:ext>
+            </a:extLst>
+          </p:cNvPr>
+          <p:cNvSpPr/>
+          <p:nvPr/>
+        </p:nvSpPr>
+        <p:spPr>
+          <a:xfrm>
+            <a:off x="8093843" y="6295779"/>
+            <a:ext cx="219885" cy="169114"/>
+          </a:xfrm>
+          <a:prstGeom prst="rect">
+            <a:avLst/>
+          </a:prstGeom>
+          <a:solidFill>
+            <a:schemeClr val="accent1">
+              <a:alpha val="0"/>
+            </a:schemeClr>
+          </a:solidFill>
+          <a:ln>
+            <a:noFill/>
+          </a:ln>
+        </p:spPr>
+        <p:style>
+          <a:lnRef idx="2">
+            <a:schemeClr val="accent1">
+              <a:shade val="15000"/>
+            </a:schemeClr>
+          </a:lnRef>
+          <a:fillRef idx="1">
+            <a:schemeClr val="accent1"/>
+          </a:fillRef>
+          <a:effectRef idx="0">
+            <a:schemeClr val="accent1"/>
+          </a:effectRef>
+          <a:fontRef idx="minor">
+            <a:schemeClr val="lt1"/>
+          </a:fontRef>
+        </p:style>
+        <p:txBody>
+          <a:bodyPr rtlCol="0" anchor="ctr"/>
+          <a:lstStyle/>
+          <a:p>
+            <a:pPr algn="ctr"/>
+            <a:endParaRPr lang="en-US"/>
+          </a:p>
+        </p:txBody>
+      </p:sp>
+      <p:sp>
+        <p:nvSpPr>
+          <p:cNvPr id="155" name="Rectangle 154">
+            <a:extLst>
+              <a:ext uri="{FF2B5EF4-FFF2-40B4-BE49-F238E27FC236}">
+                <a16:creationId xmlns:a16="http://schemas.microsoft.com/office/drawing/2014/main" id="{47B415E8-F6BE-37CF-9BDE-5FA1EE8C0257}"/>
+              </a:ext>
+            </a:extLst>
+          </p:cNvPr>
+          <p:cNvSpPr/>
+          <p:nvPr/>
+        </p:nvSpPr>
+        <p:spPr>
+          <a:xfrm>
+            <a:off x="8083113" y="6464894"/>
+            <a:ext cx="219885" cy="165104"/>
+          </a:xfrm>
+          <a:prstGeom prst="rect">
+            <a:avLst/>
+          </a:prstGeom>
+          <a:solidFill>
+            <a:schemeClr val="accent1">
+              <a:alpha val="0"/>
+            </a:schemeClr>
+          </a:solidFill>
+          <a:ln>
+            <a:noFill/>
+          </a:ln>
+        </p:spPr>
+        <p:style>
+          <a:lnRef idx="2">
+            <a:schemeClr val="accent1">
+              <a:shade val="15000"/>
+            </a:schemeClr>
+          </a:lnRef>
+          <a:fillRef idx="1">
+            <a:schemeClr val="accent1"/>
+          </a:fillRef>
+          <a:effectRef idx="0">
+            <a:schemeClr val="accent1"/>
+          </a:effectRef>
+          <a:fontRef idx="minor">
+            <a:schemeClr val="lt1"/>
+          </a:fontRef>
+        </p:style>
+        <p:txBody>
+          <a:bodyPr rtlCol="0" anchor="ctr"/>
+          <a:lstStyle/>
+          <a:p>
+            <a:pPr algn="ctr"/>
+            <a:endParaRPr lang="en-US"/>
+          </a:p>
+        </p:txBody>
+      </p:sp>
+      <p:sp>
+        <p:nvSpPr>
+          <p:cNvPr id="162" name="Rectangle 161">
+            <a:extLst>
+              <a:ext uri="{FF2B5EF4-FFF2-40B4-BE49-F238E27FC236}">
+                <a16:creationId xmlns:a16="http://schemas.microsoft.com/office/drawing/2014/main" id="{DCF8BB91-9845-0F71-33D2-122B90F77581}"/>
+              </a:ext>
+            </a:extLst>
+          </p:cNvPr>
+          <p:cNvSpPr/>
+          <p:nvPr/>
+        </p:nvSpPr>
+        <p:spPr>
+          <a:xfrm>
+            <a:off x="8442581" y="4371788"/>
+            <a:ext cx="226510" cy="216045"/>
+          </a:xfrm>
+          <a:prstGeom prst="rect">
+            <a:avLst/>
+          </a:prstGeom>
+          <a:solidFill>
+            <a:schemeClr val="accent1">
+              <a:alpha val="0"/>
+            </a:schemeClr>
+          </a:solidFill>
+          <a:ln>
+            <a:noFill/>
+          </a:ln>
+        </p:spPr>
+        <p:style>
+          <a:lnRef idx="2">
+            <a:schemeClr val="accent1">
+              <a:shade val="15000"/>
+            </a:schemeClr>
+          </a:lnRef>
+          <a:fillRef idx="1">
+            <a:schemeClr val="accent1"/>
+          </a:fillRef>
+          <a:effectRef idx="0">
+            <a:schemeClr val="accent1"/>
+          </a:effectRef>
+          <a:fontRef idx="minor">
+            <a:schemeClr val="lt1"/>
+          </a:fontRef>
+        </p:style>
+        <p:txBody>
+          <a:bodyPr rtlCol="0" anchor="ctr"/>
+          <a:lstStyle/>
+          <a:p>
+            <a:pPr algn="ctr"/>
+            <a:endParaRPr lang="en-US"/>
+          </a:p>
+        </p:txBody>
+      </p:sp>
+      <p:sp>
+        <p:nvSpPr>
+          <p:cNvPr id="164" name="Rectangle 163">
+            <a:extLst>
+              <a:ext uri="{FF2B5EF4-FFF2-40B4-BE49-F238E27FC236}">
+                <a16:creationId xmlns:a16="http://schemas.microsoft.com/office/drawing/2014/main" id="{35854C37-1AEE-5026-B112-7A284219BB9C}"/>
+              </a:ext>
+            </a:extLst>
+          </p:cNvPr>
+          <p:cNvSpPr/>
+          <p:nvPr/>
+        </p:nvSpPr>
+        <p:spPr>
+          <a:xfrm>
+            <a:off x="8449206" y="4507631"/>
+            <a:ext cx="219885" cy="201375"/>
+          </a:xfrm>
+          <a:prstGeom prst="rect">
+            <a:avLst/>
+          </a:prstGeom>
+          <a:solidFill>
+            <a:schemeClr val="accent1">
+              <a:alpha val="0"/>
+            </a:schemeClr>
+          </a:solidFill>
+          <a:ln>
+            <a:noFill/>
+          </a:ln>
+        </p:spPr>
+        <p:style>
+          <a:lnRef idx="2">
+            <a:schemeClr val="accent1">
+              <a:shade val="15000"/>
+            </a:schemeClr>
+          </a:lnRef>
+          <a:fillRef idx="1">
+            <a:schemeClr val="accent1"/>
+          </a:fillRef>
+          <a:effectRef idx="0">
+            <a:schemeClr val="accent1"/>
+          </a:effectRef>
+          <a:fontRef idx="minor">
+            <a:schemeClr val="lt1"/>
+          </a:fontRef>
+        </p:style>
+        <p:txBody>
+          <a:bodyPr rtlCol="0" anchor="ctr"/>
+          <a:lstStyle/>
+          <a:p>
+            <a:pPr algn="ctr"/>
+            <a:endParaRPr lang="en-US"/>
+          </a:p>
+        </p:txBody>
+      </p:sp>
+      <p:sp>
+        <p:nvSpPr>
+          <p:cNvPr id="175" name="Rectangle 174">
+            <a:extLst>
+              <a:ext uri="{FF2B5EF4-FFF2-40B4-BE49-F238E27FC236}">
+                <a16:creationId xmlns:a16="http://schemas.microsoft.com/office/drawing/2014/main" id="{08146BD5-AF5F-786A-D456-3D0FB63218E1}"/>
+              </a:ext>
+            </a:extLst>
+          </p:cNvPr>
+          <p:cNvSpPr/>
+          <p:nvPr/>
+        </p:nvSpPr>
+        <p:spPr>
+          <a:xfrm>
+            <a:off x="7006694" y="6288666"/>
+            <a:ext cx="226510" cy="216045"/>
+          </a:xfrm>
+          <a:prstGeom prst="rect">
+            <a:avLst/>
+          </a:prstGeom>
+          <a:solidFill>
+            <a:schemeClr val="accent1">
+              <a:alpha val="0"/>
+            </a:schemeClr>
+          </a:solidFill>
+          <a:ln>
+            <a:noFill/>
+          </a:ln>
+        </p:spPr>
+        <p:style>
+          <a:lnRef idx="2">
+            <a:schemeClr val="accent1">
+              <a:shade val="15000"/>
+            </a:schemeClr>
+          </a:lnRef>
+          <a:fillRef idx="1">
+            <a:schemeClr val="accent1"/>
+          </a:fillRef>
+          <a:effectRef idx="0">
+            <a:schemeClr val="accent1"/>
+          </a:effectRef>
+          <a:fontRef idx="minor">
+            <a:schemeClr val="lt1"/>
+          </a:fontRef>
+        </p:style>
+        <p:txBody>
+          <a:bodyPr rtlCol="0" anchor="ctr"/>
+          <a:lstStyle/>
+          <a:p>
+            <a:pPr algn="ctr"/>
+            <a:endParaRPr lang="en-US"/>
+          </a:p>
+        </p:txBody>
+      </p:sp>
+      <p:cxnSp>
+        <p:nvCxnSpPr>
+          <p:cNvPr id="192" name="Straight Arrow Connector 191">
+            <a:extLst>
+              <a:ext uri="{FF2B5EF4-FFF2-40B4-BE49-F238E27FC236}">
+                <a16:creationId xmlns:a16="http://schemas.microsoft.com/office/drawing/2014/main" id="{FB779E89-0B83-7E15-EF1E-2D29FEBB6F43}"/>
+              </a:ext>
+            </a:extLst>
+          </p:cNvPr>
+          <p:cNvCxnSpPr>
+            <a:cxnSpLocks/>
+          </p:cNvCxnSpPr>
+          <p:nvPr/>
+        </p:nvCxnSpPr>
+        <p:spPr>
+          <a:xfrm>
+            <a:off x="9085692" y="948670"/>
+            <a:ext cx="1185868" cy="0"/>
+          </a:xfrm>
+          <a:prstGeom prst="straightConnector1">
+            <a:avLst/>
+          </a:prstGeom>
+          <a:ln>
+            <a:solidFill>
+              <a:schemeClr val="accent5"/>
+            </a:solidFill>
+            <a:tailEnd type="none"/>
+          </a:ln>
+        </p:spPr>
+        <p:style>
+          <a:lnRef idx="2">
+            <a:schemeClr val="accent1"/>
+          </a:lnRef>
+          <a:fillRef idx="0">
+            <a:schemeClr val="accent1"/>
+          </a:fillRef>
+          <a:effectRef idx="1">
+            <a:schemeClr val="accent1"/>
+          </a:effectRef>
+          <a:fontRef idx="minor">
+            <a:schemeClr val="tx1"/>
+          </a:fontRef>
+        </p:style>
+      </p:cxnSp>
     </p:spTree>
     <p:extLst>
       <p:ext uri="{BB962C8B-B14F-4D97-AF65-F5344CB8AC3E}">
